--- a/10-Knowledge-Products/KP1-GEA/videos/module_2/en/decks/KP1_M2_2.6_Deck_v0.2.pptx
+++ b/10-Knowledge-Products/KP1-GEA/videos/module_2/en/decks/KP1_M2_2.6_Deck_v0.2.pptx
@@ -14,15 +14,15 @@
     <p:handoutMasterId r:id="rId47"/>
   </p:handoutMasterIdLst>
   <p:sldIdLst>
-    <p:sldId id="2681" r:id="rId8"/>
-    <p:sldId id="2732" r:id="rId54"/>
-    <p:sldId id="2733" r:id="rId55"/>
-    <p:sldId id="2734" r:id="rId56"/>
-    <p:sldId id="2735" r:id="rId57"/>
-    <p:sldId id="2736" r:id="rId58"/>
     <p:sldId id="2737" r:id="rId59"/>
     <p:sldId id="2738" r:id="rId60"/>
     <p:sldId id="2739" r:id="rId61"/>
+    <p:sldId id="2740" r:id="rId62"/>
+    <p:sldId id="2741" r:id="rId63"/>
+    <p:sldId id="2742" r:id="rId64"/>
+    <p:sldId id="2743" r:id="rId65"/>
+    <p:sldId id="2744" r:id="rId66"/>
+    <p:sldId id="2745" r:id="rId67"/>
   </p:sldIdLst>
   <p:sldSz cx="12192000" cy="6858000"/>
   <p:notesSz cx="6858000" cy="9144000"/>
@@ -889,438 +889,6 @@
 </p:notesMaster>
 </file>
 
-<file path=ppt/notesSlides/notesSlide21.xml><?xml version="1.0" encoding="utf-8"?>
-<p:notes xmlns:a="http://schemas.openxmlformats.org/drawingml/2006/main" xmlns:p="http://schemas.openxmlformats.org/presentationml/2006/main" xmlns:r="http://schemas.openxmlformats.org/officeDocument/2006/relationships">
-  <p:cSld>
-    <p:spTree>
-      <p:nvGrpSpPr>
-        <p:cNvPr id="1" name=""/>
-        <p:cNvGrpSpPr/>
-        <p:nvPr/>
-      </p:nvGrpSpPr>
-      <p:grpSpPr>
-        <a:xfrm>
-          <a:off x="0" y="0"/>
-          <a:ext cx="0" cy="0"/>
-          <a:chOff x="0" y="0"/>
-          <a:chExt cx="0" cy="0"/>
-        </a:xfrm>
-      </p:grpSpPr>
-      <p:sp>
-        <p:nvSpPr>
-          <p:cNvPr id="2" name="Slide Image Placeholder 1"/>
-          <p:cNvSpPr>
-            <a:spLocks noGrp="1"/>
-          </p:cNvSpPr>
-          <p:nvPr>
-            <p:ph type="sldImg" idx="2"/>
-          </p:nvPr>
-        </p:nvSpPr>
-        <p:spPr/>
-      </p:sp>
-      <p:sp>
-        <p:nvSpPr>
-          <p:cNvPr id="3" name="Notes Placeholder 2"/>
-          <p:cNvSpPr>
-            <a:spLocks noGrp="1"/>
-          </p:cNvSpPr>
-          <p:nvPr>
-            <p:ph type="body" idx="3" sz="quarter"/>
-          </p:nvPr>
-        </p:nvSpPr>
-        <p:spPr/>
-        <p:txBody>
-          <a:bodyPr/>
-          <a:lstStyle/>
-          <a:p>
-            <a:r>
-              <a:t>Title card for standalone video 2.6. Content slides are identical to the corresponding section of the combined deck KP1_M2_Deck_v0.2.pptx; voice-over is in each slide’s notes.</a:t>
-            </a:r>
-          </a:p>
-        </p:txBody>
-      </p:sp>
-      <p:sp>
-        <p:nvSpPr>
-          <p:cNvPr id="4" name="Slide Number Placeholder 3"/>
-          <p:cNvSpPr>
-            <a:spLocks noGrp="1"/>
-          </p:cNvSpPr>
-          <p:nvPr>
-            <p:ph type="sldNum" idx="5" sz="quarter"/>
-          </p:nvPr>
-        </p:nvSpPr>
-        <p:spPr/>
-      </p:sp>
-    </p:spTree>
-  </p:cSld>
-  <p:clrMapOvr>
-    <a:masterClrMapping/>
-  </p:clrMapOvr>
-</p:notes>
-</file>
-
-<file path=ppt/notesSlides/notesSlide39.xml><?xml version="1.0" encoding="utf-8"?>
-<p:notes xmlns:a="http://schemas.openxmlformats.org/drawingml/2006/main" xmlns:p="http://schemas.openxmlformats.org/presentationml/2006/main" xmlns:r="http://schemas.openxmlformats.org/officeDocument/2006/relationships">
-  <p:cSld>
-    <p:spTree>
-      <p:nvGrpSpPr>
-        <p:cNvPr id="1" name=""/>
-        <p:cNvGrpSpPr/>
-        <p:nvPr/>
-      </p:nvGrpSpPr>
-      <p:grpSpPr>
-        <a:xfrm>
-          <a:off x="0" y="0"/>
-          <a:ext cx="0" cy="0"/>
-          <a:chOff x="0" y="0"/>
-          <a:chExt cx="0" cy="0"/>
-        </a:xfrm>
-      </p:grpSpPr>
-      <p:sp>
-        <p:nvSpPr>
-          <p:cNvPr id="2" name="Slide Image Placeholder 1"/>
-          <p:cNvSpPr>
-            <a:spLocks noGrp="1"/>
-          </p:cNvSpPr>
-          <p:nvPr>
-            <p:ph type="sldImg" idx="2"/>
-          </p:nvPr>
-        </p:nvSpPr>
-        <p:spPr/>
-      </p:sp>
-      <p:sp>
-        <p:nvSpPr>
-          <p:cNvPr id="3" name="Notes Placeholder 2"/>
-          <p:cNvSpPr>
-            <a:spLocks noGrp="1"/>
-          </p:cNvSpPr>
-          <p:nvPr>
-            <p:ph type="body" idx="3" sz="quarter"/>
-          </p:nvPr>
-        </p:nvSpPr>
-        <p:spPr/>
-        <p:txBody>
-          <a:bodyPr/>
-          <a:lstStyle/>
-          <a:p>
-            <a:r>
-              <a:t>VO, slide 1: The Assess phase produces the current-state picture and the gap analysis the roadmap is built on. The hard part is writing a description good enough to decide from. So you need the quality tests, layer by layer, and the gaps you will almost always find.</a:t>
-            </a:r>
-          </a:p>
-        </p:txBody>
-      </p:sp>
-      <p:sp>
-        <p:nvSpPr>
-          <p:cNvPr id="4" name="Slide Number Placeholder 3"/>
-          <p:cNvSpPr>
-            <a:spLocks noGrp="1"/>
-          </p:cNvSpPr>
-          <p:nvPr>
-            <p:ph type="sldNum" idx="5" sz="quarter"/>
-          </p:nvPr>
-        </p:nvSpPr>
-        <p:spPr/>
-      </p:sp>
-    </p:spTree>
-  </p:cSld>
-  <p:clrMapOvr>
-    <a:masterClrMapping/>
-  </p:clrMapOvr>
-</p:notes>
-</file>
-
-<file path=ppt/notesSlides/notesSlide40.xml><?xml version="1.0" encoding="utf-8"?>
-<p:notes xmlns:a="http://schemas.openxmlformats.org/drawingml/2006/main" xmlns:p="http://schemas.openxmlformats.org/presentationml/2006/main" xmlns:r="http://schemas.openxmlformats.org/officeDocument/2006/relationships">
-  <p:cSld>
-    <p:spTree>
-      <p:nvGrpSpPr>
-        <p:cNvPr id="1" name=""/>
-        <p:cNvGrpSpPr/>
-        <p:nvPr/>
-      </p:nvGrpSpPr>
-      <p:grpSpPr>
-        <a:xfrm>
-          <a:off x="0" y="0"/>
-          <a:ext cx="0" cy="0"/>
-          <a:chOff x="0" y="0"/>
-          <a:chExt cx="0" cy="0"/>
-        </a:xfrm>
-      </p:grpSpPr>
-      <p:sp>
-        <p:nvSpPr>
-          <p:cNvPr id="2" name="Slide Image Placeholder 1"/>
-          <p:cNvSpPr>
-            <a:spLocks noGrp="1"/>
-          </p:cNvSpPr>
-          <p:nvPr>
-            <p:ph type="sldImg" idx="2"/>
-          </p:nvPr>
-        </p:nvSpPr>
-        <p:spPr/>
-      </p:sp>
-      <p:sp>
-        <p:nvSpPr>
-          <p:cNvPr id="3" name="Notes Placeholder 2"/>
-          <p:cNvSpPr>
-            <a:spLocks noGrp="1"/>
-          </p:cNvSpPr>
-          <p:nvPr>
-            <p:ph type="body" idx="3" sz="quarter"/>
-          </p:nvPr>
-        </p:nvSpPr>
-        <p:spPr/>
-        <p:txBody>
-          <a:bodyPr/>
-          <a:lstStyle/>
-          <a:p>
-            <a:r>
-              <a:t>VO: Three tests apply to every layer. First, complete enough to decide — not exhaustive. A description that covers the capabilities and systems that matter, with the rest noted, beats a five-hundred-page audit no one reads. Second, owned — every capability, every data domain, every application has a named owner. An element with no owner is a finding, not a detail. Third, traceable — every element connects up and down. A service that traces to no capability, an application that traces to no data, a capability no application supports: each broken link is a gap. If your current-state picture passes these three tests, it is good enough to assess against. If it fails them, more pages will not fix it.</a:t>
-            </a:r>
-          </a:p>
-        </p:txBody>
-      </p:sp>
-      <p:sp>
-        <p:nvSpPr>
-          <p:cNvPr id="4" name="Slide Number Placeholder 3"/>
-          <p:cNvSpPr>
-            <a:spLocks noGrp="1"/>
-          </p:cNvSpPr>
-          <p:nvPr>
-            <p:ph type="sldNum" idx="5" sz="quarter"/>
-          </p:nvPr>
-        </p:nvSpPr>
-        <p:spPr/>
-      </p:sp>
-    </p:spTree>
-  </p:cSld>
-  <p:clrMapOvr>
-    <a:masterClrMapping/>
-  </p:clrMapOvr>
-</p:notes>
-</file>
-
-<file path=ppt/notesSlides/notesSlide41.xml><?xml version="1.0" encoding="utf-8"?>
-<p:notes xmlns:a="http://schemas.openxmlformats.org/drawingml/2006/main" xmlns:p="http://schemas.openxmlformats.org/presentationml/2006/main" xmlns:r="http://schemas.openxmlformats.org/officeDocument/2006/relationships">
-  <p:cSld>
-    <p:spTree>
-      <p:nvGrpSpPr>
-        <p:cNvPr id="1" name=""/>
-        <p:cNvGrpSpPr/>
-        <p:nvPr/>
-      </p:nvGrpSpPr>
-      <p:grpSpPr>
-        <a:xfrm>
-          <a:off x="0" y="0"/>
-          <a:ext cx="0" cy="0"/>
-          <a:chOff x="0" y="0"/>
-          <a:chExt cx="0" cy="0"/>
-        </a:xfrm>
-      </p:grpSpPr>
-      <p:sp>
-        <p:nvSpPr>
-          <p:cNvPr id="2" name="Slide Image Placeholder 1"/>
-          <p:cNvSpPr>
-            <a:spLocks noGrp="1"/>
-          </p:cNvSpPr>
-          <p:nvPr>
-            <p:ph type="sldImg" idx="2"/>
-          </p:nvPr>
-        </p:nvSpPr>
-        <p:spPr/>
-      </p:sp>
-      <p:sp>
-        <p:nvSpPr>
-          <p:cNvPr id="3" name="Notes Placeholder 2"/>
-          <p:cNvSpPr>
-            <a:spLocks noGrp="1"/>
-          </p:cNvSpPr>
-          <p:nvPr>
-            <p:ph type="body" idx="3" sz="quarter"/>
-          </p:nvPr>
-        </p:nvSpPr>
-        <p:spPr/>
-        <p:txBody>
-          <a:bodyPr/>
-          <a:lstStyle/>
-          <a:p>
-            <a:r>
-              <a:t>VO: Each layer has its own test. Business is good when it describes capabilities, not organisation boxes; Data when every domain has one owner and one authoritative copy; Application when every system maps to a capability and a data domain; Technology when it names the standards in use and the single points of failure.</a:t>
-            </a:r>
-          </a:p>
-          <a:p/>
-          <a:p>
-            <a:r>
-              <a:t>Two sentences over four rows — reveal the rows together and let the slide carry the per-layer detail.</a:t>
-            </a:r>
-          </a:p>
-        </p:txBody>
-      </p:sp>
-      <p:sp>
-        <p:nvSpPr>
-          <p:cNvPr id="4" name="Slide Number Placeholder 3"/>
-          <p:cNvSpPr>
-            <a:spLocks noGrp="1"/>
-          </p:cNvSpPr>
-          <p:nvPr>
-            <p:ph type="sldNum" idx="5" sz="quarter"/>
-          </p:nvPr>
-        </p:nvSpPr>
-        <p:spPr/>
-      </p:sp>
-    </p:spTree>
-  </p:cSld>
-  <p:clrMapOvr>
-    <a:masterClrMapping/>
-  </p:clrMapOvr>
-</p:notes>
-</file>
-
-<file path=ppt/notesSlides/notesSlide42.xml><?xml version="1.0" encoding="utf-8"?>
-<p:notes xmlns:a="http://schemas.openxmlformats.org/drawingml/2006/main" xmlns:p="http://schemas.openxmlformats.org/presentationml/2006/main" xmlns:r="http://schemas.openxmlformats.org/officeDocument/2006/relationships">
-  <p:cSld>
-    <p:spTree>
-      <p:nvGrpSpPr>
-        <p:cNvPr id="1" name=""/>
-        <p:cNvGrpSpPr/>
-        <p:nvPr/>
-      </p:nvGrpSpPr>
-      <p:grpSpPr>
-        <a:xfrm>
-          <a:off x="0" y="0"/>
-          <a:ext cx="0" cy="0"/>
-          <a:chOff x="0" y="0"/>
-          <a:chExt cx="0" cy="0"/>
-        </a:xfrm>
-      </p:grpSpPr>
-      <p:sp>
-        <p:nvSpPr>
-          <p:cNvPr id="2" name="Slide Image Placeholder 1"/>
-          <p:cNvSpPr>
-            <a:spLocks noGrp="1"/>
-          </p:cNvSpPr>
-          <p:nvPr>
-            <p:ph type="sldImg" idx="2"/>
-          </p:nvPr>
-        </p:nvSpPr>
-        <p:spPr/>
-      </p:sp>
-      <p:sp>
-        <p:nvSpPr>
-          <p:cNvPr id="3" name="Notes Placeholder 2"/>
-          <p:cNvSpPr>
-            <a:spLocks noGrp="1"/>
-          </p:cNvSpPr>
-          <p:nvPr>
-            <p:ph type="body" idx="3" sz="quarter"/>
-          </p:nvPr>
-        </p:nvSpPr>
-        <p:spPr/>
-        <p:txBody>
-          <a:bodyPr/>
-          <a:lstStyle/>
-          <a:p>
-            <a:r>
-              <a:t>RETRIEVAL MOMENT: before revealing, ask the viewer to predict which gaps they would expect to find in their own sector. Hold two seconds. Then reveal the four, one at a time — the answer is delivered on this slide.</a:t>
-            </a:r>
-          </a:p>
-          <a:p/>
-          <a:p>
-            <a:r>
-              <a:t>VO: Now the gaps. Four of them show up in almost every first assessment, so look for them on purpose. One: duplicate registries — several bodies each keeping their own copy of the same domain, none agreeing. Two: orphan systems — applications that map to no current capability, often left over from a project that ended. Three: point-to-point spaghetti — every system connected to every other by its own custom link, with no shared data exchange. Four: no clear owner — a capability or a domain that everyone uses and no one owns, which is where accountability quietly disappears. You will find these. Naming them is most of the Assess.</a:t>
-            </a:r>
-          </a:p>
-        </p:txBody>
-      </p:sp>
-      <p:sp>
-        <p:nvSpPr>
-          <p:cNvPr id="4" name="Slide Number Placeholder 3"/>
-          <p:cNvSpPr>
-            <a:spLocks noGrp="1"/>
-          </p:cNvSpPr>
-          <p:nvPr>
-            <p:ph type="sldNum" idx="5" sz="quarter"/>
-          </p:nvPr>
-        </p:nvSpPr>
-        <p:spPr/>
-      </p:sp>
-    </p:spTree>
-  </p:cSld>
-  <p:clrMapOvr>
-    <a:masterClrMapping/>
-  </p:clrMapOvr>
-</p:notes>
-</file>
-
-<file path=ppt/notesSlides/notesSlide43.xml><?xml version="1.0" encoding="utf-8"?>
-<p:notes xmlns:a="http://schemas.openxmlformats.org/drawingml/2006/main" xmlns:p="http://schemas.openxmlformats.org/presentationml/2006/main" xmlns:r="http://schemas.openxmlformats.org/officeDocument/2006/relationships">
-  <p:cSld>
-    <p:spTree>
-      <p:nvGrpSpPr>
-        <p:cNvPr id="1" name=""/>
-        <p:cNvGrpSpPr/>
-        <p:nvPr/>
-      </p:nvGrpSpPr>
-      <p:grpSpPr>
-        <a:xfrm>
-          <a:off x="0" y="0"/>
-          <a:ext cx="0" cy="0"/>
-          <a:chOff x="0" y="0"/>
-          <a:chExt cx="0" cy="0"/>
-        </a:xfrm>
-      </p:grpSpPr>
-      <p:sp>
-        <p:nvSpPr>
-          <p:cNvPr id="2" name="Slide Image Placeholder 1"/>
-          <p:cNvSpPr>
-            <a:spLocks noGrp="1"/>
-          </p:cNvSpPr>
-          <p:nvPr>
-            <p:ph type="sldImg" idx="2"/>
-          </p:nvPr>
-        </p:nvSpPr>
-        <p:spPr/>
-      </p:sp>
-      <p:sp>
-        <p:nvSpPr>
-          <p:cNvPr id="3" name="Notes Placeholder 2"/>
-          <p:cNvSpPr>
-            <a:spLocks noGrp="1"/>
-          </p:cNvSpPr>
-          <p:nvPr>
-            <p:ph type="body" idx="3" sz="quarter"/>
-          </p:nvPr>
-        </p:nvSpPr>
-        <p:spPr/>
-        <p:txBody>
-          <a:bodyPr/>
-          <a:lstStyle/>
-          <a:p>
-            <a:r>
-              <a:t>VO: A list of gaps is not an assessment. The assessment is the priority order. For each gap, judge two things: how much it hurts — the cost to the country, the burden on the citizen, the risk to the minister's programme — and how hard it is to close. The gaps you put at the top are the ones that hurt the most where movement is actually possible. A maturity scorecard per layer helps — a simple rating of how far each layer is from where it needs to be. The output your EA Board signs off is not 'here is everything wrong'. It is 'here are the right problems, in the right order, with the reasons'.</a:t>
-            </a:r>
-          </a:p>
-        </p:txBody>
-      </p:sp>
-      <p:sp>
-        <p:nvSpPr>
-          <p:cNvPr id="4" name="Slide Number Placeholder 3"/>
-          <p:cNvSpPr>
-            <a:spLocks noGrp="1"/>
-          </p:cNvSpPr>
-          <p:nvPr>
-            <p:ph type="sldNum" idx="5" sz="quarter"/>
-          </p:nvPr>
-        </p:nvSpPr>
-        <p:spPr/>
-      </p:sp>
-    </p:spTree>
-  </p:cSld>
-  <p:clrMapOvr>
-    <a:masterClrMapping/>
-  </p:clrMapOvr>
-</p:notes>
-</file>
-
 <file path=ppt/notesSlides/notesSlide44.xml><?xml version="1.0" encoding="utf-8"?>
 <p:notes xmlns:a="http://schemas.openxmlformats.org/drawingml/2006/main" xmlns:p="http://schemas.openxmlformats.org/presentationml/2006/main" xmlns:r="http://schemas.openxmlformats.org/officeDocument/2006/relationships">
   <p:cSld>
@@ -1366,13 +934,7 @@
           <a:lstStyle/>
           <a:p>
             <a:r>
-              <a:t>VO: The Assess phase ends with a sign-off: the senior decision-maker confirms the gap analysis reflects ground truth. That sign-off has one quality test of its own — honesty. An assessment that flatters the current state, that softens the duplicate-registry problem because a powerful ministry owns one of the copies, fails — quietly, and expensively, a year later. Your job in Assess is to name the right problems in the right order, including the politically uncomfortable ones, in language the decision-maker can act on. Get that sign-off honestly, and the roadmap that follows stands on solid ground.</a:t>
-            </a:r>
-          </a:p>
-          <a:p/>
-          <a:p>
-            <a:r>
-              <a:t>The emotional peak of the module — the only full-colour block in 2.6. Hold it a beat longer.</a:t>
+              <a:t>Title card — the cold open. The hosts name the module, the video number, the title and the single message on this slide; no scripted narration. Hold until the opener begins; the opener is narrated on the next slide.</a:t>
             </a:r>
           </a:p>
         </p:txBody>
@@ -1442,13 +1004,7 @@
           <a:lstStyle/>
           <a:p>
             <a:r>
-              <a:t>PRACTICE BOX (on-screen only — never read it, never paraphrase it, never point at it). It replaces the narrated handoff: this video ends on the recap and the Sources slide.</a:t>
-            </a:r>
-          </a:p>
-          <a:p/>
-          <a:p>
-            <a:r>
-              <a:t>VO: A Phase 2 Assess is not about volume. It is a current-state picture that is owned, traceable and complete enough to decide from, plus a gap analysis that scores and orders the problems honestly.</a:t>
+              <a:t>VO: The Assess phase produces the current-state picture and the gap analysis the roadmap is built on. The hard part is writing a description good enough to decide from. So you need the quality tests, layer by layer, and the gaps you will almost always find.</a:t>
             </a:r>
           </a:p>
         </p:txBody>
@@ -1474,6 +1030,450 @@
 </file>
 
 <file path=ppt/notesSlides/notesSlide46.xml><?xml version="1.0" encoding="utf-8"?>
+<p:notes xmlns:a="http://schemas.openxmlformats.org/drawingml/2006/main" xmlns:p="http://schemas.openxmlformats.org/presentationml/2006/main" xmlns:r="http://schemas.openxmlformats.org/officeDocument/2006/relationships">
+  <p:cSld>
+    <p:spTree>
+      <p:nvGrpSpPr>
+        <p:cNvPr id="1" name=""/>
+        <p:cNvGrpSpPr/>
+        <p:nvPr/>
+      </p:nvGrpSpPr>
+      <p:grpSpPr>
+        <a:xfrm>
+          <a:off x="0" y="0"/>
+          <a:ext cx="0" cy="0"/>
+          <a:chOff x="0" y="0"/>
+          <a:chExt cx="0" cy="0"/>
+        </a:xfrm>
+      </p:grpSpPr>
+      <p:sp>
+        <p:nvSpPr>
+          <p:cNvPr id="2" name="Slide Image Placeholder 1"/>
+          <p:cNvSpPr>
+            <a:spLocks noGrp="1"/>
+          </p:cNvSpPr>
+          <p:nvPr>
+            <p:ph type="sldImg" idx="2"/>
+          </p:nvPr>
+        </p:nvSpPr>
+        <p:spPr/>
+      </p:sp>
+      <p:sp>
+        <p:nvSpPr>
+          <p:cNvPr id="3" name="Notes Placeholder 2"/>
+          <p:cNvSpPr>
+            <a:spLocks noGrp="1"/>
+          </p:cNvSpPr>
+          <p:nvPr>
+            <p:ph type="body" idx="3" sz="quarter"/>
+          </p:nvPr>
+        </p:nvSpPr>
+        <p:spPr/>
+        <p:txBody>
+          <a:bodyPr/>
+          <a:lstStyle/>
+          <a:p>
+            <a:r>
+              <a:t>VO: Three tests apply to every layer. First, complete enough to decide — not exhaustive. A description that covers the capabilities and systems that matter, with the rest noted, beats a five-hundred-page audit no one reads. Second, owned — every capability, every data domain, every application has a named owner. An element with no owner is a finding, not a detail. Third, traceable — every element connects up and down. A service that traces to no capability, an application that traces to no data, a capability no application supports: each broken link is a gap. If your current-state picture passes these three tests, it is good enough to assess against. If it fails them, more pages will not fix it.</a:t>
+            </a:r>
+          </a:p>
+        </p:txBody>
+      </p:sp>
+      <p:sp>
+        <p:nvSpPr>
+          <p:cNvPr id="4" name="Slide Number Placeholder 3"/>
+          <p:cNvSpPr>
+            <a:spLocks noGrp="1"/>
+          </p:cNvSpPr>
+          <p:nvPr>
+            <p:ph type="sldNum" idx="5" sz="quarter"/>
+          </p:nvPr>
+        </p:nvSpPr>
+        <p:spPr/>
+      </p:sp>
+    </p:spTree>
+  </p:cSld>
+  <p:clrMapOvr>
+    <a:masterClrMapping/>
+  </p:clrMapOvr>
+</p:notes>
+</file>
+
+<file path=ppt/notesSlides/notesSlide47.xml><?xml version="1.0" encoding="utf-8"?>
+<p:notes xmlns:a="http://schemas.openxmlformats.org/drawingml/2006/main" xmlns:p="http://schemas.openxmlformats.org/presentationml/2006/main" xmlns:r="http://schemas.openxmlformats.org/officeDocument/2006/relationships">
+  <p:cSld>
+    <p:spTree>
+      <p:nvGrpSpPr>
+        <p:cNvPr id="1" name=""/>
+        <p:cNvGrpSpPr/>
+        <p:nvPr/>
+      </p:nvGrpSpPr>
+      <p:grpSpPr>
+        <a:xfrm>
+          <a:off x="0" y="0"/>
+          <a:ext cx="0" cy="0"/>
+          <a:chOff x="0" y="0"/>
+          <a:chExt cx="0" cy="0"/>
+        </a:xfrm>
+      </p:grpSpPr>
+      <p:sp>
+        <p:nvSpPr>
+          <p:cNvPr id="2" name="Slide Image Placeholder 1"/>
+          <p:cNvSpPr>
+            <a:spLocks noGrp="1"/>
+          </p:cNvSpPr>
+          <p:nvPr>
+            <p:ph type="sldImg" idx="2"/>
+          </p:nvPr>
+        </p:nvSpPr>
+        <p:spPr/>
+      </p:sp>
+      <p:sp>
+        <p:nvSpPr>
+          <p:cNvPr id="3" name="Notes Placeholder 2"/>
+          <p:cNvSpPr>
+            <a:spLocks noGrp="1"/>
+          </p:cNvSpPr>
+          <p:nvPr>
+            <p:ph type="body" idx="3" sz="quarter"/>
+          </p:nvPr>
+        </p:nvSpPr>
+        <p:spPr/>
+        <p:txBody>
+          <a:bodyPr/>
+          <a:lstStyle/>
+          <a:p>
+            <a:r>
+              <a:t>VO: Each layer has its own test. Business is good when it describes capabilities, not organisation boxes; Data when every domain has one owner and one authoritative copy; Application when every system maps to a capability and a data domain; Technology when it names the standards in use and the single points of failure.</a:t>
+            </a:r>
+          </a:p>
+          <a:p/>
+          <a:p>
+            <a:r>
+              <a:t>Two sentences over four rows — reveal the rows together and let the slide carry the per-layer detail.</a:t>
+            </a:r>
+          </a:p>
+        </p:txBody>
+      </p:sp>
+      <p:sp>
+        <p:nvSpPr>
+          <p:cNvPr id="4" name="Slide Number Placeholder 3"/>
+          <p:cNvSpPr>
+            <a:spLocks noGrp="1"/>
+          </p:cNvSpPr>
+          <p:nvPr>
+            <p:ph type="sldNum" idx="5" sz="quarter"/>
+          </p:nvPr>
+        </p:nvSpPr>
+        <p:spPr/>
+      </p:sp>
+    </p:spTree>
+  </p:cSld>
+  <p:clrMapOvr>
+    <a:masterClrMapping/>
+  </p:clrMapOvr>
+</p:notes>
+</file>
+
+<file path=ppt/notesSlides/notesSlide48.xml><?xml version="1.0" encoding="utf-8"?>
+<p:notes xmlns:a="http://schemas.openxmlformats.org/drawingml/2006/main" xmlns:p="http://schemas.openxmlformats.org/presentationml/2006/main" xmlns:r="http://schemas.openxmlformats.org/officeDocument/2006/relationships">
+  <p:cSld>
+    <p:spTree>
+      <p:nvGrpSpPr>
+        <p:cNvPr id="1" name=""/>
+        <p:cNvGrpSpPr/>
+        <p:nvPr/>
+      </p:nvGrpSpPr>
+      <p:grpSpPr>
+        <a:xfrm>
+          <a:off x="0" y="0"/>
+          <a:ext cx="0" cy="0"/>
+          <a:chOff x="0" y="0"/>
+          <a:chExt cx="0" cy="0"/>
+        </a:xfrm>
+      </p:grpSpPr>
+      <p:sp>
+        <p:nvSpPr>
+          <p:cNvPr id="2" name="Slide Image Placeholder 1"/>
+          <p:cNvSpPr>
+            <a:spLocks noGrp="1"/>
+          </p:cNvSpPr>
+          <p:nvPr>
+            <p:ph type="sldImg" idx="2"/>
+          </p:nvPr>
+        </p:nvSpPr>
+        <p:spPr/>
+      </p:sp>
+      <p:sp>
+        <p:nvSpPr>
+          <p:cNvPr id="3" name="Notes Placeholder 2"/>
+          <p:cNvSpPr>
+            <a:spLocks noGrp="1"/>
+          </p:cNvSpPr>
+          <p:nvPr>
+            <p:ph type="body" idx="3" sz="quarter"/>
+          </p:nvPr>
+        </p:nvSpPr>
+        <p:spPr/>
+        <p:txBody>
+          <a:bodyPr/>
+          <a:lstStyle/>
+          <a:p>
+            <a:r>
+              <a:t>RETRIEVAL MOMENT: before revealing, ask the viewer to predict which gaps they would expect to find in their own sector. Hold two seconds. Then reveal the four, one at a time — the answer is delivered on this slide.</a:t>
+            </a:r>
+          </a:p>
+          <a:p/>
+          <a:p>
+            <a:r>
+              <a:t>VO: Now the gaps. Four of them show up in almost every first assessment, so look for them on purpose. One: duplicate registries — several bodies each keeping their own copy of the same domain, none agreeing. Two: orphan systems — applications that map to no current capability, often left over from a project that ended. Three: point-to-point spaghetti — every system connected to every other by its own custom link, with no shared data exchange. Four: no clear owner — a capability or a domain that everyone uses and no one owns, which is where accountability quietly disappears. You will find these. Naming them is most of the Assess.</a:t>
+            </a:r>
+          </a:p>
+        </p:txBody>
+      </p:sp>
+      <p:sp>
+        <p:nvSpPr>
+          <p:cNvPr id="4" name="Slide Number Placeholder 3"/>
+          <p:cNvSpPr>
+            <a:spLocks noGrp="1"/>
+          </p:cNvSpPr>
+          <p:nvPr>
+            <p:ph type="sldNum" idx="5" sz="quarter"/>
+          </p:nvPr>
+        </p:nvSpPr>
+        <p:spPr/>
+      </p:sp>
+    </p:spTree>
+  </p:cSld>
+  <p:clrMapOvr>
+    <a:masterClrMapping/>
+  </p:clrMapOvr>
+</p:notes>
+</file>
+
+<file path=ppt/notesSlides/notesSlide49.xml><?xml version="1.0" encoding="utf-8"?>
+<p:notes xmlns:a="http://schemas.openxmlformats.org/drawingml/2006/main" xmlns:p="http://schemas.openxmlformats.org/presentationml/2006/main" xmlns:r="http://schemas.openxmlformats.org/officeDocument/2006/relationships">
+  <p:cSld>
+    <p:spTree>
+      <p:nvGrpSpPr>
+        <p:cNvPr id="1" name=""/>
+        <p:cNvGrpSpPr/>
+        <p:nvPr/>
+      </p:nvGrpSpPr>
+      <p:grpSpPr>
+        <a:xfrm>
+          <a:off x="0" y="0"/>
+          <a:ext cx="0" cy="0"/>
+          <a:chOff x="0" y="0"/>
+          <a:chExt cx="0" cy="0"/>
+        </a:xfrm>
+      </p:grpSpPr>
+      <p:sp>
+        <p:nvSpPr>
+          <p:cNvPr id="2" name="Slide Image Placeholder 1"/>
+          <p:cNvSpPr>
+            <a:spLocks noGrp="1"/>
+          </p:cNvSpPr>
+          <p:nvPr>
+            <p:ph type="sldImg" idx="2"/>
+          </p:nvPr>
+        </p:nvSpPr>
+        <p:spPr/>
+      </p:sp>
+      <p:sp>
+        <p:nvSpPr>
+          <p:cNvPr id="3" name="Notes Placeholder 2"/>
+          <p:cNvSpPr>
+            <a:spLocks noGrp="1"/>
+          </p:cNvSpPr>
+          <p:nvPr>
+            <p:ph type="body" idx="3" sz="quarter"/>
+          </p:nvPr>
+        </p:nvSpPr>
+        <p:spPr/>
+        <p:txBody>
+          <a:bodyPr/>
+          <a:lstStyle/>
+          <a:p>
+            <a:r>
+              <a:t>VO: A list of gaps is not an assessment. The assessment is the priority order. For each gap, judge two things: how much it hurts — the cost to the country, the burden on the citizen, the risk to the minister's programme — and how hard it is to close. The gaps you put at the top are the ones that hurt the most where movement is actually possible. A maturity scorecard per layer helps — a simple rating of how far each layer is from where it needs to be. The output your EA Board signs off is not 'here is everything wrong'. It is 'here are the right problems, in the right order, with the reasons'.</a:t>
+            </a:r>
+          </a:p>
+        </p:txBody>
+      </p:sp>
+      <p:sp>
+        <p:nvSpPr>
+          <p:cNvPr id="4" name="Slide Number Placeholder 3"/>
+          <p:cNvSpPr>
+            <a:spLocks noGrp="1"/>
+          </p:cNvSpPr>
+          <p:nvPr>
+            <p:ph type="sldNum" idx="5" sz="quarter"/>
+          </p:nvPr>
+        </p:nvSpPr>
+        <p:spPr/>
+      </p:sp>
+    </p:spTree>
+  </p:cSld>
+  <p:clrMapOvr>
+    <a:masterClrMapping/>
+  </p:clrMapOvr>
+</p:notes>
+</file>
+
+<file path=ppt/notesSlides/notesSlide50.xml><?xml version="1.0" encoding="utf-8"?>
+<p:notes xmlns:a="http://schemas.openxmlformats.org/drawingml/2006/main" xmlns:p="http://schemas.openxmlformats.org/presentationml/2006/main" xmlns:r="http://schemas.openxmlformats.org/officeDocument/2006/relationships">
+  <p:cSld>
+    <p:spTree>
+      <p:nvGrpSpPr>
+        <p:cNvPr id="1" name=""/>
+        <p:cNvGrpSpPr/>
+        <p:nvPr/>
+      </p:nvGrpSpPr>
+      <p:grpSpPr>
+        <a:xfrm>
+          <a:off x="0" y="0"/>
+          <a:ext cx="0" cy="0"/>
+          <a:chOff x="0" y="0"/>
+          <a:chExt cx="0" cy="0"/>
+        </a:xfrm>
+      </p:grpSpPr>
+      <p:sp>
+        <p:nvSpPr>
+          <p:cNvPr id="2" name="Slide Image Placeholder 1"/>
+          <p:cNvSpPr>
+            <a:spLocks noGrp="1"/>
+          </p:cNvSpPr>
+          <p:nvPr>
+            <p:ph type="sldImg" idx="2"/>
+          </p:nvPr>
+        </p:nvSpPr>
+        <p:spPr/>
+      </p:sp>
+      <p:sp>
+        <p:nvSpPr>
+          <p:cNvPr id="3" name="Notes Placeholder 2"/>
+          <p:cNvSpPr>
+            <a:spLocks noGrp="1"/>
+          </p:cNvSpPr>
+          <p:nvPr>
+            <p:ph type="body" idx="3" sz="quarter"/>
+          </p:nvPr>
+        </p:nvSpPr>
+        <p:spPr/>
+        <p:txBody>
+          <a:bodyPr/>
+          <a:lstStyle/>
+          <a:p>
+            <a:r>
+              <a:t>VO: The Assess phase ends with a sign-off: the senior decision-maker confirms the gap analysis reflects ground truth. That sign-off has one quality test of its own — honesty. An assessment that flatters the current state, that softens the duplicate-registry problem because a powerful ministry owns one of the copies, fails — quietly, and expensively, a year later. Your job in Assess is to name the right problems in the right order, including the politically uncomfortable ones, in language the decision-maker can act on. Get that sign-off honestly, and the roadmap that follows stands on solid ground.</a:t>
+            </a:r>
+          </a:p>
+          <a:p/>
+          <a:p>
+            <a:r>
+              <a:t>The emotional peak of the module — the only full-colour block in 2.6. Hold it a beat longer.</a:t>
+            </a:r>
+          </a:p>
+        </p:txBody>
+      </p:sp>
+      <p:sp>
+        <p:nvSpPr>
+          <p:cNvPr id="4" name="Slide Number Placeholder 3"/>
+          <p:cNvSpPr>
+            <a:spLocks noGrp="1"/>
+          </p:cNvSpPr>
+          <p:nvPr>
+            <p:ph type="sldNum" idx="5" sz="quarter"/>
+          </p:nvPr>
+        </p:nvSpPr>
+        <p:spPr/>
+      </p:sp>
+    </p:spTree>
+  </p:cSld>
+  <p:clrMapOvr>
+    <a:masterClrMapping/>
+  </p:clrMapOvr>
+</p:notes>
+</file>
+
+<file path=ppt/notesSlides/notesSlide51.xml><?xml version="1.0" encoding="utf-8"?>
+<p:notes xmlns:a="http://schemas.openxmlformats.org/drawingml/2006/main" xmlns:p="http://schemas.openxmlformats.org/presentationml/2006/main" xmlns:r="http://schemas.openxmlformats.org/officeDocument/2006/relationships">
+  <p:cSld>
+    <p:spTree>
+      <p:nvGrpSpPr>
+        <p:cNvPr id="1" name=""/>
+        <p:cNvGrpSpPr/>
+        <p:nvPr/>
+      </p:nvGrpSpPr>
+      <p:grpSpPr>
+        <a:xfrm>
+          <a:off x="0" y="0"/>
+          <a:ext cx="0" cy="0"/>
+          <a:chOff x="0" y="0"/>
+          <a:chExt cx="0" cy="0"/>
+        </a:xfrm>
+      </p:grpSpPr>
+      <p:sp>
+        <p:nvSpPr>
+          <p:cNvPr id="2" name="Slide Image Placeholder 1"/>
+          <p:cNvSpPr>
+            <a:spLocks noGrp="1"/>
+          </p:cNvSpPr>
+          <p:nvPr>
+            <p:ph type="sldImg" idx="2"/>
+          </p:nvPr>
+        </p:nvSpPr>
+        <p:spPr/>
+      </p:sp>
+      <p:sp>
+        <p:nvSpPr>
+          <p:cNvPr id="3" name="Notes Placeholder 2"/>
+          <p:cNvSpPr>
+            <a:spLocks noGrp="1"/>
+          </p:cNvSpPr>
+          <p:nvPr>
+            <p:ph type="body" idx="3" sz="quarter"/>
+          </p:nvPr>
+        </p:nvSpPr>
+        <p:spPr/>
+        <p:txBody>
+          <a:bodyPr/>
+          <a:lstStyle/>
+          <a:p>
+            <a:r>
+              <a:t>PRACTICE BOX (on-screen only — never read it, never paraphrase it, never point at it). It replaces the narrated handoff: this video ends on the recap and the Sources slide.</a:t>
+            </a:r>
+          </a:p>
+          <a:p/>
+          <a:p>
+            <a:r>
+              <a:t>VO: A Phase 2 Assess is not about volume. It is a current-state picture that is owned, traceable and complete enough to decide from, plus a gap analysis that scores and orders the problems honestly.</a:t>
+            </a:r>
+          </a:p>
+        </p:txBody>
+      </p:sp>
+      <p:sp>
+        <p:nvSpPr>
+          <p:cNvPr id="4" name="Slide Number Placeholder 3"/>
+          <p:cNvSpPr>
+            <a:spLocks noGrp="1"/>
+          </p:cNvSpPr>
+          <p:nvPr>
+            <p:ph type="sldNum" idx="5" sz="quarter"/>
+          </p:nvPr>
+        </p:nvSpPr>
+        <p:spPr/>
+      </p:sp>
+    </p:spTree>
+  </p:cSld>
+  <p:clrMapOvr>
+    <a:masterClrMapping/>
+  </p:clrMapOvr>
+</p:notes>
+</file>
+
+<file path=ppt/notesSlides/notesSlide52.xml><?xml version="1.0" encoding="utf-8"?>
 <p:notes xmlns:a="http://schemas.openxmlformats.org/drawingml/2006/main" xmlns:p="http://schemas.openxmlformats.org/presentationml/2006/main" xmlns:r="http://schemas.openxmlformats.org/officeDocument/2006/relationships">
   <p:cSld>
     <p:spTree>
@@ -11679,2988 +11679,6 @@
 </p:sldMaster>
 </file>
 
-<file path=ppt/slides/slide1.xml><?xml version="1.0" encoding="utf-8"?>
-<p:sld xmlns:a="http://schemas.openxmlformats.org/drawingml/2006/main" xmlns:r="http://schemas.openxmlformats.org/officeDocument/2006/relationships" xmlns:p="http://schemas.openxmlformats.org/presentationml/2006/main">
-  <p:cSld>
-    <p:spTree>
-      <p:nvGrpSpPr>
-        <p:cNvPr id="1" name=""/>
-        <p:cNvGrpSpPr/>
-        <p:nvPr/>
-      </p:nvGrpSpPr>
-      <p:grpSpPr>
-        <a:xfrm>
-          <a:off x="0" y="0"/>
-          <a:ext cx="0" cy="0"/>
-          <a:chOff x="0" y="0"/>
-          <a:chExt cx="0" cy="0"/>
-        </a:xfrm>
-      </p:grpSpPr>
-      <p:cxnSp>
-        <p:nvCxnSpPr>
-          <p:cNvPr id="11" name="Straight Connector 10">
-            <a:extLst>
-              <a:ext uri="{FF2B5EF4-FFF2-40B4-BE49-F238E27FC236}">
-                <a16:creationId xmlns:a16="http://schemas.microsoft.com/office/drawing/2014/main" id="{D9AD66F2-F7C0-4D03-9150-D28F17AC561D}"/>
-              </a:ext>
-            </a:extLst>
-          </p:cNvPr>
-          <p:cNvCxnSpPr>
-            <a:cxnSpLocks/>
-          </p:cNvCxnSpPr>
-          <p:nvPr/>
-        </p:nvCxnSpPr>
-        <p:spPr>
-          <a:xfrm>
-            <a:off x="373021" y="2198718"/>
-            <a:ext cx="6843567" cy="0"/>
-          </a:xfrm>
-          <a:prstGeom prst="line">
-            <a:avLst/>
-          </a:prstGeom>
-          <a:ln w="12700">
-            <a:solidFill>
-              <a:srgbClr val="009CD6"/>
-            </a:solidFill>
-          </a:ln>
-        </p:spPr>
-        <p:style>
-          <a:lnRef idx="1">
-            <a:schemeClr val="accent1"/>
-          </a:lnRef>
-          <a:fillRef idx="0">
-            <a:schemeClr val="accent1"/>
-          </a:fillRef>
-          <a:effectRef idx="0">
-            <a:schemeClr val="accent1"/>
-          </a:effectRef>
-          <a:fontRef idx="minor">
-            <a:schemeClr val="tx1"/>
-          </a:fontRef>
-        </p:style>
-      </p:cxnSp>
-      <p:sp>
-        <p:nvSpPr>
-          <p:cNvPr id="12" name="Title 9">
-            <a:extLst>
-              <a:ext uri="{FF2B5EF4-FFF2-40B4-BE49-F238E27FC236}">
-                <a16:creationId xmlns:a16="http://schemas.microsoft.com/office/drawing/2014/main" id="{EEB08032-CE0E-4986-AEDF-A41026C0E8B9}"/>
-              </a:ext>
-            </a:extLst>
-          </p:cNvPr>
-          <p:cNvSpPr txBox="1">
-            <a:spLocks/>
-          </p:cNvSpPr>
-          <p:nvPr/>
-        </p:nvSpPr>
-        <p:spPr>
-          <a:xfrm>
-            <a:off x="237734" y="702833"/>
-            <a:ext cx="6432007" cy="1218817"/>
-          </a:xfrm>
-          <a:prstGeom prst="rect">
-            <a:avLst/>
-          </a:prstGeom>
-        </p:spPr>
-        <p:txBody>
-          <a:bodyPr anchor="b">
-            <a:noAutofit/>
-          </a:bodyPr>
-          <a:lstStyle>
-            <a:lvl1pPr algn="l" defTabSz="914400" rtl="0" eaLnBrk="1" latinLnBrk="0" hangingPunct="1">
-              <a:lnSpc>
-                <a:spcPct val="90000"/>
-              </a:lnSpc>
-              <a:spcBef>
-                <a:spcPct val="0"/>
-              </a:spcBef>
-              <a:buNone/>
-              <a:defRPr sz="4000" kern="1200">
-                <a:solidFill>
-                  <a:schemeClr val="bg1"/>
-                </a:solidFill>
-                <a:latin typeface="Arial" panose="020B0604020202020204" pitchFamily="34" charset="0"/>
-                <a:ea typeface="+mj-ea"/>
-                <a:cs typeface="Arial" panose="020B0604020202020204" pitchFamily="34" charset="0"/>
-              </a:defRPr>
-            </a:lvl1pPr>
-          </a:lstStyle>
-          <a:p>
-            <a:r>
-              <a:rPr sz="2800" b="1" i="0">
-                <a:solidFill>
-                  <a:srgbClr val="1A1A1A"/>
-                </a:solidFill>
-                <a:latin typeface="Arial"/>
-              </a:rPr>
-              <a:t>2.6 — Run a Phase 2 Assess</a:t>
-            </a:r>
-          </a:p>
-        </p:txBody>
-      </p:sp>
-      <p:pic>
-        <p:nvPicPr>
-          <p:cNvPr id="7" name="Picture 6">
-            <a:extLst>
-              <a:ext uri="{FF2B5EF4-FFF2-40B4-BE49-F238E27FC236}">
-                <a16:creationId xmlns:a16="http://schemas.microsoft.com/office/drawing/2014/main" id="{A2066351-C569-4C4C-A096-308777FCDC32}"/>
-              </a:ext>
-            </a:extLst>
-          </p:cNvPr>
-          <p:cNvPicPr>
-            <a:picLocks noChangeAspect="1"/>
-          </p:cNvPicPr>
-          <p:nvPr/>
-        </p:nvPicPr>
-        <p:blipFill>
-          <a:blip r:embed="rId2">
-            <a:extLst>
-              <a:ext uri="{28A0092B-C50C-407E-A947-70E740481C1C}">
-                <a14:useLocalDpi xmlns:a14="http://schemas.microsoft.com/office/drawing/2010/main" val="0"/>
-              </a:ext>
-            </a:extLst>
-          </a:blip>
-          <a:srcRect t="20219" b="14729"/>
-          <a:stretch>
-            <a:fillRect/>
-          </a:stretch>
-        </p:blipFill>
-        <p:spPr>
-          <a:xfrm>
-            <a:off x="0" y="5620871"/>
-            <a:ext cx="1323975" cy="1218816"/>
-          </a:xfrm>
-          <a:prstGeom prst="rect">
-            <a:avLst/>
-          </a:prstGeom>
-        </p:spPr>
-      </p:pic>
-      <p:sp>
-        <p:nvSpPr>
-          <p:cNvPr id="14" name="Title 9">
-            <a:extLst>
-              <a:ext uri="{FF2B5EF4-FFF2-40B4-BE49-F238E27FC236}">
-                <a16:creationId xmlns:a16="http://schemas.microsoft.com/office/drawing/2014/main" id="{B5087B80-3EE4-1881-0130-ED58CA625092}"/>
-              </a:ext>
-            </a:extLst>
-          </p:cNvPr>
-          <p:cNvSpPr txBox="1">
-            <a:spLocks/>
-          </p:cNvSpPr>
-          <p:nvPr/>
-        </p:nvSpPr>
-        <p:spPr>
-          <a:xfrm>
-            <a:off x="284452" y="2475786"/>
-            <a:ext cx="6382893" cy="953213"/>
-          </a:xfrm>
-          <a:prstGeom prst="rect">
-            <a:avLst/>
-          </a:prstGeom>
-        </p:spPr>
-        <p:txBody>
-          <a:bodyPr anchor="t">
-            <a:noAutofit/>
-          </a:bodyPr>
-          <a:lstStyle>
-            <a:lvl1pPr algn="l" defTabSz="914400" rtl="0" eaLnBrk="1" latinLnBrk="0" hangingPunct="1">
-              <a:lnSpc>
-                <a:spcPct val="90000"/>
-              </a:lnSpc>
-              <a:spcBef>
-                <a:spcPct val="0"/>
-              </a:spcBef>
-              <a:buNone/>
-              <a:defRPr sz="4000" kern="1200">
-                <a:solidFill>
-                  <a:schemeClr val="bg1"/>
-                </a:solidFill>
-                <a:latin typeface="Arial" panose="020B0604020202020204" pitchFamily="34" charset="0"/>
-                <a:ea typeface="+mj-ea"/>
-                <a:cs typeface="Arial" panose="020B0604020202020204" pitchFamily="34" charset="0"/>
-              </a:defRPr>
-            </a:lvl1pPr>
-          </a:lstStyle>
-          <a:p>
-            <a:pPr marL="0" marR="0" lvl="0" indent="0" rtl="0">
-              <a:spcBef>
-                <a:spcPts val="600"/>
-              </a:spcBef>
-              <a:spcAft>
-                <a:spcPts val="0"/>
-              </a:spcAft>
-              <a:buNone/>
-            </a:pPr>
-            <a:r>
-              <a:rPr sz="1300" b="1" i="0">
-                <a:solidFill>
-                  <a:srgbClr val="006E96"/>
-                </a:solidFill>
-                <a:latin typeface="Arial"/>
-              </a:rPr>
-              <a:t>KP1 · Government Enterprise Architecture · Module 2 · Video 2.6</a:t>
-            </a:r>
-          </a:p>
-          <a:p>
-            <a:r>
-              <a:rPr sz="1200" b="0" i="1">
-                <a:solidFill>
-                  <a:srgbClr val="595959"/>
-                </a:solidFill>
-                <a:latin typeface="Arial"/>
-              </a:rPr>
-              <a:t>A good current-state picture is judged by a few quality tests per layer, not by its length. Learn the tests, learn the gaps you will always find, and you can run a Phase 2 Assess that names the right problems in the right order.</a:t>
-            </a:r>
-          </a:p>
-        </p:txBody>
-      </p:sp>
-      <p:sp>
-        <p:nvSpPr>
-          <p:cNvPr id="17" name="Title 9">
-            <a:extLst>
-              <a:ext uri="{FF2B5EF4-FFF2-40B4-BE49-F238E27FC236}">
-                <a16:creationId xmlns:a16="http://schemas.microsoft.com/office/drawing/2014/main" id="{5E8796F7-DD26-D250-5E97-B38B22298E72}"/>
-              </a:ext>
-            </a:extLst>
-          </p:cNvPr>
-          <p:cNvSpPr txBox="1">
-            <a:spLocks/>
-          </p:cNvSpPr>
-          <p:nvPr/>
-        </p:nvSpPr>
-        <p:spPr>
-          <a:xfrm>
-            <a:off x="284452" y="4363897"/>
-            <a:ext cx="6382893" cy="953213"/>
-          </a:xfrm>
-          <a:prstGeom prst="rect">
-            <a:avLst/>
-          </a:prstGeom>
-        </p:spPr>
-        <p:txBody>
-          <a:bodyPr anchor="t">
-            <a:noAutofit/>
-          </a:bodyPr>
-          <a:lstStyle>
-            <a:lvl1pPr algn="l" defTabSz="914400" rtl="0" eaLnBrk="1" latinLnBrk="0" hangingPunct="1">
-              <a:lnSpc>
-                <a:spcPct val="90000"/>
-              </a:lnSpc>
-              <a:spcBef>
-                <a:spcPct val="0"/>
-              </a:spcBef>
-              <a:buNone/>
-              <a:defRPr sz="4000" kern="1200">
-                <a:solidFill>
-                  <a:schemeClr val="bg1"/>
-                </a:solidFill>
-                <a:latin typeface="Arial" panose="020B0604020202020204" pitchFamily="34" charset="0"/>
-                <a:ea typeface="+mj-ea"/>
-                <a:cs typeface="Arial" panose="020B0604020202020204" pitchFamily="34" charset="0"/>
-              </a:defRPr>
-            </a:lvl1pPr>
-          </a:lstStyle>
-          <a:p>
-            <a:pPr marL="0" marR="0" lvl="0" indent="0" rtl="0">
-              <a:spcBef>
-                <a:spcPts val="600"/>
-              </a:spcBef>
-              <a:spcAft>
-                <a:spcPts val="1200"/>
-              </a:spcAft>
-              <a:buNone/>
-            </a:pPr>
-            <a:r>
-              <a:rPr sz="1400" b="1" i="0">
-                <a:solidFill>
-                  <a:srgbClr val="1A1A1A"/>
-                </a:solidFill>
-                <a:latin typeface="Arial"/>
-              </a:rPr>
-              <a:t>Target audience: </a:t>
-            </a:r>
-            <a:r>
-              <a:rPr sz="1400" b="0" i="0">
-                <a:solidFill>
-                  <a:srgbClr val="1A1A1A"/>
-                </a:solidFill>
-                <a:latin typeface="Arial"/>
-              </a:rPr>
-              <a:t>Chief architect · senior architect · sector ICT lead</a:t>
-            </a:r>
-          </a:p>
-        </p:txBody>
-      </p:sp>
-      <p:sp>
-        <p:nvSpPr>
-          <p:cNvPr id="18" name="Rectangle 17"/>
-          <p:cNvSpPr/>
-          <p:nvPr/>
-        </p:nvSpPr>
-        <p:spPr>
-          <a:xfrm>
-            <a:off x="7022592" y="0"/>
-            <a:ext cx="5169103" cy="6858000"/>
-          </a:xfrm>
-          <a:prstGeom prst="rect">
-            <a:avLst/>
-          </a:prstGeom>
-          <a:solidFill>
-            <a:srgbClr val="009CD6"/>
-          </a:solidFill>
-          <a:ln>
-            <a:noFill/>
-          </a:ln>
-          <a:effectLst/>
-        </p:spPr>
-        <p:style>
-          <a:lnRef idx="1">
-            <a:schemeClr val="accent1"/>
-          </a:lnRef>
-          <a:fillRef idx="3">
-            <a:schemeClr val="accent1"/>
-          </a:fillRef>
-          <a:effectRef idx="2">
-            <a:schemeClr val="accent1"/>
-          </a:effectRef>
-          <a:fontRef idx="minor">
-            <a:schemeClr val="lt1"/>
-          </a:fontRef>
-        </p:style>
-        <p:txBody>
-          <a:bodyPr rtlCol="0" anchor="ctr"/>
-          <a:lstStyle/>
-          <a:p>
-            <a:pPr algn="ctr"/>
-          </a:p>
-        </p:txBody>
-      </p:sp>
-      <p:sp>
-        <p:nvSpPr>
-          <p:cNvPr id="19" name="TextBox 18"/>
-          <p:cNvSpPr txBox="1"/>
-          <p:nvPr/>
-        </p:nvSpPr>
-        <p:spPr>
-          <a:xfrm>
-            <a:off x="7452360" y="457200"/>
-            <a:ext cx="4297680" cy="457200"/>
-          </a:xfrm>
-          <a:prstGeom prst="rect">
-            <a:avLst/>
-          </a:prstGeom>
-          <a:noFill/>
-        </p:spPr>
-        <p:txBody>
-          <a:bodyPr wrap="square">
-            <a:spAutoFit/>
-          </a:bodyPr>
-          <a:lstStyle/>
-          <a:p>
-            <a:r>
-              <a:rPr sz="1100" b="1" i="0">
-                <a:solidFill>
-                  <a:srgbClr val="E5F5FB"/>
-                </a:solidFill>
-                <a:latin typeface="Arial"/>
-              </a:rPr>
-              <a:t>THE FOUR LAYERS THIS MODULE TEACHES</a:t>
-            </a:r>
-          </a:p>
-        </p:txBody>
-      </p:sp>
-      <p:sp>
-        <p:nvSpPr>
-          <p:cNvPr id="20" name="Rounded Rectangle 19"/>
-          <p:cNvSpPr/>
-          <p:nvPr/>
-        </p:nvSpPr>
-        <p:spPr>
-          <a:xfrm>
-            <a:off x="7452360" y="960120"/>
-            <a:ext cx="3840480" cy="658368"/>
-          </a:xfrm>
-          <a:prstGeom prst="roundRect">
-            <a:avLst>
-              <a:gd name="adj" fmla="val 14000"/>
-            </a:avLst>
-          </a:prstGeom>
-          <a:solidFill>
-            <a:srgbClr val="FFFFFF"/>
-          </a:solidFill>
-          <a:ln>
-            <a:noFill/>
-          </a:ln>
-          <a:effectLst/>
-        </p:spPr>
-        <p:style>
-          <a:lnRef idx="1">
-            <a:schemeClr val="accent1"/>
-          </a:lnRef>
-          <a:fillRef idx="3">
-            <a:schemeClr val="accent1"/>
-          </a:fillRef>
-          <a:effectRef idx="2">
-            <a:schemeClr val="accent1"/>
-          </a:effectRef>
-          <a:fontRef idx="minor">
-            <a:schemeClr val="lt1"/>
-          </a:fontRef>
-        </p:style>
-        <p:txBody>
-          <a:bodyPr rtlCol="0" anchor="ctr" lIns="164592" wrap="square"/>
-          <a:lstStyle/>
-          <a:p>
-            <a:pPr algn="ctr"/>
-            <a:r>
-              <a:rPr sz="1500" b="1" i="0">
-                <a:solidFill>
-                  <a:srgbClr val="1A1A1A"/>
-                </a:solidFill>
-                <a:latin typeface="Arial"/>
-              </a:rPr>
-              <a:t>Business — what the body does</a:t>
-            </a:r>
-          </a:p>
-        </p:txBody>
-      </p:sp>
-      <p:sp>
-        <p:nvSpPr>
-          <p:cNvPr id="21" name="Rounded Rectangle 20"/>
-          <p:cNvSpPr/>
-          <p:nvPr/>
-        </p:nvSpPr>
-        <p:spPr>
-          <a:xfrm>
-            <a:off x="7452360" y="1892808"/>
-            <a:ext cx="3840480" cy="658368"/>
-          </a:xfrm>
-          <a:prstGeom prst="roundRect">
-            <a:avLst>
-              <a:gd name="adj" fmla="val 14000"/>
-            </a:avLst>
-          </a:prstGeom>
-          <a:solidFill>
-            <a:srgbClr val="FFFFFF"/>
-          </a:solidFill>
-          <a:ln>
-            <a:noFill/>
-          </a:ln>
-          <a:effectLst/>
-        </p:spPr>
-        <p:style>
-          <a:lnRef idx="1">
-            <a:schemeClr val="accent1"/>
-          </a:lnRef>
-          <a:fillRef idx="3">
-            <a:schemeClr val="accent1"/>
-          </a:fillRef>
-          <a:effectRef idx="2">
-            <a:schemeClr val="accent1"/>
-          </a:effectRef>
-          <a:fontRef idx="minor">
-            <a:schemeClr val="lt1"/>
-          </a:fontRef>
-        </p:style>
-        <p:txBody>
-          <a:bodyPr rtlCol="0" anchor="ctr" lIns="164592" wrap="square"/>
-          <a:lstStyle/>
-          <a:p>
-            <a:pPr algn="ctr"/>
-            <a:r>
-              <a:rPr sz="1500" b="1" i="0">
-                <a:solidFill>
-                  <a:srgbClr val="1A1A1A"/>
-                </a:solidFill>
-                <a:latin typeface="Arial"/>
-              </a:rPr>
-              <a:t>Data — what it holds, who owns it</a:t>
-            </a:r>
-          </a:p>
-        </p:txBody>
-      </p:sp>
-      <p:sp>
-        <p:nvSpPr>
-          <p:cNvPr id="22" name="Rounded Rectangle 21"/>
-          <p:cNvSpPr/>
-          <p:nvPr/>
-        </p:nvSpPr>
-        <p:spPr>
-          <a:xfrm>
-            <a:off x="7452360" y="2825496"/>
-            <a:ext cx="3840480" cy="658368"/>
-          </a:xfrm>
-          <a:prstGeom prst="roundRect">
-            <a:avLst>
-              <a:gd name="adj" fmla="val 14000"/>
-            </a:avLst>
-          </a:prstGeom>
-          <a:solidFill>
-            <a:srgbClr val="FFFFFF"/>
-          </a:solidFill>
-          <a:ln>
-            <a:noFill/>
-          </a:ln>
-          <a:effectLst/>
-        </p:spPr>
-        <p:style>
-          <a:lnRef idx="1">
-            <a:schemeClr val="accent1"/>
-          </a:lnRef>
-          <a:fillRef idx="3">
-            <a:schemeClr val="accent1"/>
-          </a:fillRef>
-          <a:effectRef idx="2">
-            <a:schemeClr val="accent1"/>
-          </a:effectRef>
-          <a:fontRef idx="minor">
-            <a:schemeClr val="lt1"/>
-          </a:fontRef>
-        </p:style>
-        <p:txBody>
-          <a:bodyPr rtlCol="0" anchor="ctr" lIns="164592" wrap="square"/>
-          <a:lstStyle/>
-          <a:p>
-            <a:pPr algn="ctr"/>
-            <a:r>
-              <a:rPr sz="1500" b="1" i="0">
-                <a:solidFill>
-                  <a:srgbClr val="1A1A1A"/>
-                </a:solidFill>
-                <a:latin typeface="Arial"/>
-              </a:rPr>
-              <a:t>Application — what supports the work</a:t>
-            </a:r>
-          </a:p>
-        </p:txBody>
-      </p:sp>
-      <p:sp>
-        <p:nvSpPr>
-          <p:cNvPr id="23" name="Rounded Rectangle 22"/>
-          <p:cNvSpPr/>
-          <p:nvPr/>
-        </p:nvSpPr>
-        <p:spPr>
-          <a:xfrm>
-            <a:off x="7452360" y="3758184"/>
-            <a:ext cx="3840480" cy="658368"/>
-          </a:xfrm>
-          <a:prstGeom prst="roundRect">
-            <a:avLst>
-              <a:gd name="adj" fmla="val 14000"/>
-            </a:avLst>
-          </a:prstGeom>
-          <a:solidFill>
-            <a:srgbClr val="006E96"/>
-          </a:solidFill>
-          <a:ln>
-            <a:noFill/>
-          </a:ln>
-          <a:effectLst/>
-        </p:spPr>
-        <p:style>
-          <a:lnRef idx="1">
-            <a:schemeClr val="accent1"/>
-          </a:lnRef>
-          <a:fillRef idx="3">
-            <a:schemeClr val="accent1"/>
-          </a:fillRef>
-          <a:effectRef idx="2">
-            <a:schemeClr val="accent1"/>
-          </a:effectRef>
-          <a:fontRef idx="minor">
-            <a:schemeClr val="lt1"/>
-          </a:fontRef>
-        </p:style>
-        <p:txBody>
-          <a:bodyPr rtlCol="0" anchor="ctr" lIns="164592" wrap="square"/>
-          <a:lstStyle/>
-          <a:p>
-            <a:pPr algn="ctr"/>
-            <a:r>
-              <a:rPr sz="1500" b="1" i="0">
-                <a:solidFill>
-                  <a:srgbClr val="FFFFFF"/>
-                </a:solidFill>
-                <a:latin typeface="Arial"/>
-              </a:rPr>
-              <a:t>Technology — what it all runs on</a:t>
-            </a:r>
-          </a:p>
-        </p:txBody>
-      </p:sp>
-      <p:sp>
-        <p:nvSpPr>
-          <p:cNvPr id="24" name="TextBox 23"/>
-          <p:cNvSpPr txBox="1"/>
-          <p:nvPr/>
-        </p:nvSpPr>
-        <p:spPr>
-          <a:xfrm>
-            <a:off x="7452360" y="5806440"/>
-            <a:ext cx="4297680" cy="731520"/>
-          </a:xfrm>
-          <a:prstGeom prst="rect">
-            <a:avLst/>
-          </a:prstGeom>
-          <a:noFill/>
-        </p:spPr>
-        <p:txBody>
-          <a:bodyPr wrap="square">
-            <a:spAutoFit/>
-          </a:bodyPr>
-          <a:lstStyle/>
-          <a:p>
-            <a:r>
-              <a:rPr sz="1200" b="0" i="0">
-                <a:solidFill>
-                  <a:srgbClr val="FFFFFF"/>
-                </a:solidFill>
-                <a:latin typeface="Arial"/>
-              </a:rPr>
-              <a:t>6 shared entities · 10 principles to adopt · 2 traps to catch at Assess</a:t>
-            </a:r>
-          </a:p>
-        </p:txBody>
-      </p:sp>
-    </p:spTree>
-    <p:extLst>
-      <p:ext uri="{BB962C8B-B14F-4D97-AF65-F5344CB8AC3E}">
-        <p14:creationId xmlns:p14="http://schemas.microsoft.com/office/powerpoint/2010/main" val="1196800265"/>
-      </p:ext>
-    </p:extLst>
-  </p:cSld>
-  <p:clrMapOvr>
-    <a:masterClrMapping/>
-  </p:clrMapOvr>
-</p:sld>
-</file>
-
-<file path=ppt/slides/slide39.xml><?xml version="1.0" encoding="utf-8"?>
-<p:sld xmlns:a="http://schemas.openxmlformats.org/drawingml/2006/main" xmlns:p="http://schemas.openxmlformats.org/presentationml/2006/main" xmlns:r="http://schemas.openxmlformats.org/officeDocument/2006/relationships">
-  <p:cSld>
-    <p:spTree>
-      <p:nvGrpSpPr>
-        <p:cNvPr id="1" name=""/>
-        <p:cNvGrpSpPr/>
-        <p:nvPr/>
-      </p:nvGrpSpPr>
-      <p:grpSpPr/>
-      <p:sp>
-        <p:nvSpPr>
-          <p:cNvPr id="2" name="TextBox 1"/>
-          <p:cNvSpPr txBox="1"/>
-          <p:nvPr/>
-        </p:nvSpPr>
-        <p:spPr>
-          <a:xfrm>
-            <a:off x="822960" y="822960"/>
-            <a:ext cx="7315200" cy="457200"/>
-          </a:xfrm>
-          <a:prstGeom prst="rect">
-            <a:avLst/>
-          </a:prstGeom>
-          <a:noFill/>
-        </p:spPr>
-        <p:txBody>
-          <a:bodyPr wrap="square">
-            <a:spAutoFit/>
-          </a:bodyPr>
-          <a:lstStyle/>
-          <a:p>
-            <a:r>
-              <a:rPr sz="1200" b="1" i="0">
-                <a:solidFill>
-                  <a:srgbClr val="595959"/>
-                </a:solidFill>
-                <a:latin typeface="Arial"/>
-              </a:rPr>
-              <a:t>KP1 · MODULE 2 · VIDEO 2.6</a:t>
-            </a:r>
-          </a:p>
-        </p:txBody>
-      </p:sp>
-      <p:sp>
-        <p:nvSpPr>
-          <p:cNvPr id="3" name="TextBox 2"/>
-          <p:cNvSpPr txBox="1"/>
-          <p:nvPr/>
-        </p:nvSpPr>
-        <p:spPr>
-          <a:xfrm>
-            <a:off x="822960" y="1828800"/>
-            <a:ext cx="2011680" cy="1097280"/>
-          </a:xfrm>
-          <a:prstGeom prst="rect">
-            <a:avLst/>
-          </a:prstGeom>
-          <a:noFill/>
-        </p:spPr>
-        <p:txBody>
-          <a:bodyPr wrap="square">
-            <a:spAutoFit/>
-          </a:bodyPr>
-          <a:lstStyle/>
-          <a:p>
-            <a:r>
-              <a:rPr sz="6000" b="1" i="0">
-                <a:solidFill>
-                  <a:srgbClr val="009CD6"/>
-                </a:solidFill>
-                <a:latin typeface="Arial"/>
-              </a:rPr>
-              <a:t>2.6</a:t>
-            </a:r>
-          </a:p>
-        </p:txBody>
-      </p:sp>
-      <p:sp>
-        <p:nvSpPr>
-          <p:cNvPr id="4" name="TextBox 3"/>
-          <p:cNvSpPr txBox="1"/>
-          <p:nvPr/>
-        </p:nvSpPr>
-        <p:spPr>
-          <a:xfrm>
-            <a:off x="822960" y="2880360"/>
-            <a:ext cx="9601200" cy="1371600"/>
-          </a:xfrm>
-          <a:prstGeom prst="rect">
-            <a:avLst/>
-          </a:prstGeom>
-          <a:noFill/>
-        </p:spPr>
-        <p:txBody>
-          <a:bodyPr wrap="square">
-            <a:spAutoFit/>
-          </a:bodyPr>
-          <a:lstStyle/>
-          <a:p>
-            <a:r>
-              <a:rPr sz="3400" b="1" i="0">
-                <a:solidFill>
-                  <a:srgbClr val="1A1A1A"/>
-                </a:solidFill>
-                <a:latin typeface="Arial"/>
-              </a:rPr>
-              <a:t>Run a Phase 2 Assess</a:t>
-            </a:r>
-          </a:p>
-        </p:txBody>
-      </p:sp>
-      <p:sp>
-        <p:nvSpPr>
-          <p:cNvPr id="5" name="TextBox 4"/>
-          <p:cNvSpPr txBox="1"/>
-          <p:nvPr/>
-        </p:nvSpPr>
-        <p:spPr>
-          <a:xfrm>
-            <a:off x="822960" y="4343400"/>
-            <a:ext cx="9875520" cy="1554480"/>
-          </a:xfrm>
-          <a:prstGeom prst="rect">
-            <a:avLst/>
-          </a:prstGeom>
-          <a:noFill/>
-        </p:spPr>
-        <p:txBody>
-          <a:bodyPr wrap="square">
-            <a:spAutoFit/>
-          </a:bodyPr>
-          <a:lstStyle/>
-          <a:p>
-            <a:r>
-              <a:rPr sz="1700" b="0" i="1">
-                <a:solidFill>
-                  <a:srgbClr val="595959"/>
-                </a:solidFill>
-                <a:latin typeface="Arial"/>
-              </a:rPr>
-              <a:t>A good current-state picture is judged by a few quality tests per layer, not by its length. Learn the tests, learn the gaps you will always find, and you can run a Phase 2 Assess that names the right problems in the right order.</a:t>
-            </a:r>
-          </a:p>
-        </p:txBody>
-      </p:sp>
-      <p:sp>
-        <p:nvSpPr>
-          <p:cNvPr id="6" name="TextBox 5"/>
-          <p:cNvSpPr txBox="1"/>
-          <p:nvPr/>
-        </p:nvSpPr>
-        <p:spPr>
-          <a:xfrm>
-            <a:off x="822960" y="5989320"/>
-            <a:ext cx="7315200" cy="365760"/>
-          </a:xfrm>
-          <a:prstGeom prst="rect">
-            <a:avLst/>
-          </a:prstGeom>
-          <a:noFill/>
-        </p:spPr>
-        <p:txBody>
-          <a:bodyPr wrap="square">
-            <a:spAutoFit/>
-          </a:bodyPr>
-          <a:lstStyle/>
-          <a:p>
-            <a:r>
-              <a:rPr sz="1200" b="0" i="0">
-                <a:solidFill>
-                  <a:srgbClr val="595959"/>
-                </a:solidFill>
-                <a:latin typeface="Arial"/>
-              </a:rPr>
-              <a:t>~5 minutes · standalone video · voice-over on text slides</a:t>
-            </a:r>
-          </a:p>
-        </p:txBody>
-      </p:sp>
-    </p:spTree>
-  </p:cSld>
-  <p:clrMapOvr>
-    <a:masterClrMapping/>
-  </p:clrMapOvr>
-</p:sld>
-</file>
-
-<file path=ppt/slides/slide40.xml><?xml version="1.0" encoding="utf-8"?>
-<p:sld xmlns:a="http://schemas.openxmlformats.org/drawingml/2006/main" xmlns:p="http://schemas.openxmlformats.org/presentationml/2006/main" xmlns:r="http://schemas.openxmlformats.org/officeDocument/2006/relationships">
-  <p:cSld>
-    <p:spTree>
-      <p:nvGrpSpPr>
-        <p:cNvPr id="1" name=""/>
-        <p:cNvGrpSpPr/>
-        <p:nvPr/>
-      </p:nvGrpSpPr>
-      <p:grpSpPr/>
-      <p:sp>
-        <p:nvSpPr>
-          <p:cNvPr id="2" name="Rectangle 1"/>
-          <p:cNvSpPr/>
-          <p:nvPr/>
-        </p:nvSpPr>
-        <p:spPr>
-          <a:xfrm>
-            <a:off x="457200" y="384048"/>
-            <a:ext cx="45720" cy="256032"/>
-          </a:xfrm>
-          <a:prstGeom prst="rect">
-            <a:avLst/>
-          </a:prstGeom>
-          <a:solidFill>
-            <a:srgbClr val="009CD6"/>
-          </a:solidFill>
-          <a:ln>
-            <a:noFill/>
-          </a:ln>
-          <a:effectLst/>
-        </p:spPr>
-        <p:style>
-          <a:lnRef idx="1">
-            <a:schemeClr val="accent1"/>
-          </a:lnRef>
-          <a:fillRef idx="3">
-            <a:schemeClr val="accent1"/>
-          </a:fillRef>
-          <a:effectRef idx="2">
-            <a:schemeClr val="accent1"/>
-          </a:effectRef>
-          <a:fontRef idx="minor">
-            <a:schemeClr val="lt1"/>
-          </a:fontRef>
-        </p:style>
-        <p:txBody>
-          <a:bodyPr rtlCol="0" anchor="ctr"/>
-          <a:lstStyle/>
-          <a:p>
-            <a:pPr algn="ctr"/>
-          </a:p>
-        </p:txBody>
-      </p:sp>
-      <p:sp>
-        <p:nvSpPr>
-          <p:cNvPr id="3" name="TextBox 2"/>
-          <p:cNvSpPr txBox="1"/>
-          <p:nvPr/>
-        </p:nvSpPr>
-        <p:spPr>
-          <a:xfrm>
-            <a:off x="621792" y="274320"/>
-            <a:ext cx="11247120" cy="914400"/>
-          </a:xfrm>
-          <a:prstGeom prst="rect">
-            <a:avLst/>
-          </a:prstGeom>
-          <a:noFill/>
-        </p:spPr>
-        <p:txBody>
-          <a:bodyPr wrap="square">
-            <a:spAutoFit/>
-          </a:bodyPr>
-          <a:lstStyle/>
-          <a:p>
-            <a:r>
-              <a:rPr sz="2800" b="1" i="0">
-                <a:solidFill>
-                  <a:srgbClr val="1A1A1A"/>
-                </a:solidFill>
-                <a:latin typeface="Arial"/>
-              </a:rPr>
-              <a:t>Three tests apply to every layer</a:t>
-            </a:r>
-          </a:p>
-        </p:txBody>
-      </p:sp>
-      <p:sp>
-        <p:nvSpPr>
-          <p:cNvPr id="4" name="Oval 3"/>
-          <p:cNvSpPr/>
-          <p:nvPr/>
-        </p:nvSpPr>
-        <p:spPr>
-          <a:xfrm>
-            <a:off x="621792" y="1463040"/>
-            <a:ext cx="310896" cy="310896"/>
-          </a:xfrm>
-          <a:prstGeom prst="ellipse">
-            <a:avLst/>
-          </a:prstGeom>
-          <a:solidFill>
-            <a:srgbClr val="009CD6"/>
-          </a:solidFill>
-          <a:ln>
-            <a:noFill/>
-          </a:ln>
-          <a:effectLst/>
-        </p:spPr>
-        <p:style>
-          <a:lnRef idx="1">
-            <a:schemeClr val="accent1"/>
-          </a:lnRef>
-          <a:fillRef idx="3">
-            <a:schemeClr val="accent1"/>
-          </a:fillRef>
-          <a:effectRef idx="2">
-            <a:schemeClr val="accent1"/>
-          </a:effectRef>
-          <a:fontRef idx="minor">
-            <a:schemeClr val="lt1"/>
-          </a:fontRef>
-        </p:style>
-        <p:txBody>
-          <a:bodyPr rtlCol="0" anchor="ctr" lIns="0" rIns="0" tIns="0" bIns="0" wrap="square"/>
-          <a:lstStyle/>
-          <a:p>
-            <a:pPr algn="ctr"/>
-            <a:r>
-              <a:rPr sz="1300" b="1" i="0">
-                <a:solidFill>
-                  <a:srgbClr val="FFFFFF"/>
-                </a:solidFill>
-                <a:latin typeface="Arial"/>
-              </a:rPr>
-              <a:t>1</a:t>
-            </a:r>
-          </a:p>
-        </p:txBody>
-      </p:sp>
-      <p:sp>
-        <p:nvSpPr>
-          <p:cNvPr id="5" name="TextBox 4"/>
-          <p:cNvSpPr txBox="1"/>
-          <p:nvPr/>
-        </p:nvSpPr>
-        <p:spPr>
-          <a:xfrm>
-            <a:off x="1115568" y="1417320"/>
-            <a:ext cx="10527487" cy="1432560"/>
-          </a:xfrm>
-          <a:prstGeom prst="rect">
-            <a:avLst/>
-          </a:prstGeom>
-          <a:noFill/>
-        </p:spPr>
-        <p:txBody>
-          <a:bodyPr wrap="square">
-            <a:spAutoFit/>
-          </a:bodyPr>
-          <a:lstStyle/>
-          <a:p>
-            <a:pPr>
-              <a:spcAft>
-                <a:spcPts val="300"/>
-              </a:spcAft>
-            </a:pPr>
-            <a:r>
-              <a:rPr sz="1900" b="1" i="0">
-                <a:solidFill>
-                  <a:srgbClr val="1A1A1A"/>
-                </a:solidFill>
-                <a:latin typeface="Arial"/>
-              </a:rPr>
-              <a:t>Complete enough to decide — not exhaustive</a:t>
-            </a:r>
-          </a:p>
-          <a:p>
-            <a:pPr>
-              <a:spcAft>
-                <a:spcPts val="300"/>
-              </a:spcAft>
-            </a:pPr>
-            <a:r>
-              <a:rPr sz="1550" b="0" i="0">
-                <a:solidFill>
-                  <a:srgbClr val="595959"/>
-                </a:solidFill>
-                <a:latin typeface="Arial"/>
-              </a:rPr>
-              <a:t>A description covering the capabilities and systems that matter, with the rest noted, beats a five-hundred-page audit no one reads.</a:t>
-            </a:r>
-          </a:p>
-        </p:txBody>
-      </p:sp>
-      <p:sp>
-        <p:nvSpPr>
-          <p:cNvPr id="6" name="Rectangle 5"/>
-          <p:cNvSpPr/>
-          <p:nvPr/>
-        </p:nvSpPr>
-        <p:spPr>
-          <a:xfrm>
-            <a:off x="621792" y="2854452"/>
-            <a:ext cx="10881360" cy="12700"/>
-          </a:xfrm>
-          <a:prstGeom prst="rect">
-            <a:avLst/>
-          </a:prstGeom>
-          <a:solidFill>
-            <a:srgbClr val="DDECF4"/>
-          </a:solidFill>
-          <a:ln>
-            <a:noFill/>
-          </a:ln>
-          <a:effectLst/>
-        </p:spPr>
-        <p:style>
-          <a:lnRef idx="1">
-            <a:schemeClr val="accent1"/>
-          </a:lnRef>
-          <a:fillRef idx="3">
-            <a:schemeClr val="accent1"/>
-          </a:fillRef>
-          <a:effectRef idx="2">
-            <a:schemeClr val="accent1"/>
-          </a:effectRef>
-          <a:fontRef idx="minor">
-            <a:schemeClr val="lt1"/>
-          </a:fontRef>
-        </p:style>
-        <p:txBody>
-          <a:bodyPr rtlCol="0" anchor="ctr"/>
-          <a:lstStyle/>
-          <a:p>
-            <a:pPr algn="ctr"/>
-          </a:p>
-        </p:txBody>
-      </p:sp>
-      <p:sp>
-        <p:nvSpPr>
-          <p:cNvPr id="7" name="Oval 6"/>
-          <p:cNvSpPr/>
-          <p:nvPr/>
-        </p:nvSpPr>
-        <p:spPr>
-          <a:xfrm>
-            <a:off x="621792" y="2941320"/>
-            <a:ext cx="310896" cy="310896"/>
-          </a:xfrm>
-          <a:prstGeom prst="ellipse">
-            <a:avLst/>
-          </a:prstGeom>
-          <a:solidFill>
-            <a:srgbClr val="009CD6"/>
-          </a:solidFill>
-          <a:ln>
-            <a:noFill/>
-          </a:ln>
-          <a:effectLst/>
-        </p:spPr>
-        <p:style>
-          <a:lnRef idx="1">
-            <a:schemeClr val="accent1"/>
-          </a:lnRef>
-          <a:fillRef idx="3">
-            <a:schemeClr val="accent1"/>
-          </a:fillRef>
-          <a:effectRef idx="2">
-            <a:schemeClr val="accent1"/>
-          </a:effectRef>
-          <a:fontRef idx="minor">
-            <a:schemeClr val="lt1"/>
-          </a:fontRef>
-        </p:style>
-        <p:txBody>
-          <a:bodyPr rtlCol="0" anchor="ctr" lIns="0" rIns="0" tIns="0" bIns="0" wrap="square"/>
-          <a:lstStyle/>
-          <a:p>
-            <a:pPr algn="ctr"/>
-            <a:r>
-              <a:rPr sz="1300" b="1" i="0">
-                <a:solidFill>
-                  <a:srgbClr val="FFFFFF"/>
-                </a:solidFill>
-                <a:latin typeface="Arial"/>
-              </a:rPr>
-              <a:t>2</a:t>
-            </a:r>
-          </a:p>
-        </p:txBody>
-      </p:sp>
-      <p:sp>
-        <p:nvSpPr>
-          <p:cNvPr id="8" name="TextBox 7"/>
-          <p:cNvSpPr txBox="1"/>
-          <p:nvPr/>
-        </p:nvSpPr>
-        <p:spPr>
-          <a:xfrm>
-            <a:off x="1115568" y="2895600"/>
-            <a:ext cx="10527487" cy="1432560"/>
-          </a:xfrm>
-          <a:prstGeom prst="rect">
-            <a:avLst/>
-          </a:prstGeom>
-          <a:noFill/>
-        </p:spPr>
-        <p:txBody>
-          <a:bodyPr wrap="square">
-            <a:spAutoFit/>
-          </a:bodyPr>
-          <a:lstStyle/>
-          <a:p>
-            <a:pPr>
-              <a:spcAft>
-                <a:spcPts val="300"/>
-              </a:spcAft>
-            </a:pPr>
-            <a:r>
-              <a:rPr sz="1900" b="1" i="0">
-                <a:solidFill>
-                  <a:srgbClr val="1A1A1A"/>
-                </a:solidFill>
-                <a:latin typeface="Arial"/>
-              </a:rPr>
-              <a:t>Owned — every element has a named owner</a:t>
-            </a:r>
-          </a:p>
-          <a:p>
-            <a:pPr>
-              <a:spcAft>
-                <a:spcPts val="300"/>
-              </a:spcAft>
-            </a:pPr>
-            <a:r>
-              <a:rPr sz="1550" b="0" i="0">
-                <a:solidFill>
-                  <a:srgbClr val="595959"/>
-                </a:solidFill>
-                <a:latin typeface="Arial"/>
-              </a:rPr>
-              <a:t>An element with no owner is a finding, not a detail.</a:t>
-            </a:r>
-          </a:p>
-        </p:txBody>
-      </p:sp>
-      <p:sp>
-        <p:nvSpPr>
-          <p:cNvPr id="9" name="Rectangle 8"/>
-          <p:cNvSpPr/>
-          <p:nvPr/>
-        </p:nvSpPr>
-        <p:spPr>
-          <a:xfrm>
-            <a:off x="621792" y="4332732"/>
-            <a:ext cx="10881360" cy="12700"/>
-          </a:xfrm>
-          <a:prstGeom prst="rect">
-            <a:avLst/>
-          </a:prstGeom>
-          <a:solidFill>
-            <a:srgbClr val="DDECF4"/>
-          </a:solidFill>
-          <a:ln>
-            <a:noFill/>
-          </a:ln>
-          <a:effectLst/>
-        </p:spPr>
-        <p:style>
-          <a:lnRef idx="1">
-            <a:schemeClr val="accent1"/>
-          </a:lnRef>
-          <a:fillRef idx="3">
-            <a:schemeClr val="accent1"/>
-          </a:fillRef>
-          <a:effectRef idx="2">
-            <a:schemeClr val="accent1"/>
-          </a:effectRef>
-          <a:fontRef idx="minor">
-            <a:schemeClr val="lt1"/>
-          </a:fontRef>
-        </p:style>
-        <p:txBody>
-          <a:bodyPr rtlCol="0" anchor="ctr"/>
-          <a:lstStyle/>
-          <a:p>
-            <a:pPr algn="ctr"/>
-          </a:p>
-        </p:txBody>
-      </p:sp>
-      <p:sp>
-        <p:nvSpPr>
-          <p:cNvPr id="10" name="Oval 9"/>
-          <p:cNvSpPr/>
-          <p:nvPr/>
-        </p:nvSpPr>
-        <p:spPr>
-          <a:xfrm>
-            <a:off x="621792" y="4419600"/>
-            <a:ext cx="310896" cy="310896"/>
-          </a:xfrm>
-          <a:prstGeom prst="ellipse">
-            <a:avLst/>
-          </a:prstGeom>
-          <a:solidFill>
-            <a:srgbClr val="009CD6"/>
-          </a:solidFill>
-          <a:ln>
-            <a:noFill/>
-          </a:ln>
-          <a:effectLst/>
-        </p:spPr>
-        <p:style>
-          <a:lnRef idx="1">
-            <a:schemeClr val="accent1"/>
-          </a:lnRef>
-          <a:fillRef idx="3">
-            <a:schemeClr val="accent1"/>
-          </a:fillRef>
-          <a:effectRef idx="2">
-            <a:schemeClr val="accent1"/>
-          </a:effectRef>
-          <a:fontRef idx="minor">
-            <a:schemeClr val="lt1"/>
-          </a:fontRef>
-        </p:style>
-        <p:txBody>
-          <a:bodyPr rtlCol="0" anchor="ctr" lIns="0" rIns="0" tIns="0" bIns="0" wrap="square"/>
-          <a:lstStyle/>
-          <a:p>
-            <a:pPr algn="ctr"/>
-            <a:r>
-              <a:rPr sz="1300" b="1" i="0">
-                <a:solidFill>
-                  <a:srgbClr val="FFFFFF"/>
-                </a:solidFill>
-                <a:latin typeface="Arial"/>
-              </a:rPr>
-              <a:t>3</a:t>
-            </a:r>
-          </a:p>
-        </p:txBody>
-      </p:sp>
-      <p:sp>
-        <p:nvSpPr>
-          <p:cNvPr id="11" name="TextBox 10"/>
-          <p:cNvSpPr txBox="1"/>
-          <p:nvPr/>
-        </p:nvSpPr>
-        <p:spPr>
-          <a:xfrm>
-            <a:off x="1115568" y="4373880"/>
-            <a:ext cx="10527487" cy="1432560"/>
-          </a:xfrm>
-          <a:prstGeom prst="rect">
-            <a:avLst/>
-          </a:prstGeom>
-          <a:noFill/>
-        </p:spPr>
-        <p:txBody>
-          <a:bodyPr wrap="square">
-            <a:spAutoFit/>
-          </a:bodyPr>
-          <a:lstStyle/>
-          <a:p>
-            <a:pPr>
-              <a:spcAft>
-                <a:spcPts val="300"/>
-              </a:spcAft>
-            </a:pPr>
-            <a:r>
-              <a:rPr sz="1900" b="1" i="0">
-                <a:solidFill>
-                  <a:srgbClr val="1A1A1A"/>
-                </a:solidFill>
-                <a:latin typeface="Arial"/>
-              </a:rPr>
-              <a:t>Traceable — every element connects up and down</a:t>
-            </a:r>
-          </a:p>
-          <a:p>
-            <a:pPr>
-              <a:spcAft>
-                <a:spcPts val="300"/>
-              </a:spcAft>
-            </a:pPr>
-            <a:r>
-              <a:rPr sz="1550" b="0" i="0">
-                <a:solidFill>
-                  <a:srgbClr val="595959"/>
-                </a:solidFill>
-                <a:latin typeface="Arial"/>
-              </a:rPr>
-              <a:t>A service that traces to no capability, an application that traces to no data, a capability no application supports: each broken link is a gap.</a:t>
-            </a:r>
-          </a:p>
-        </p:txBody>
-      </p:sp>
-      <p:sp>
-        <p:nvSpPr>
-          <p:cNvPr id="12" name="TextBox 11"/>
-          <p:cNvSpPr txBox="1"/>
-          <p:nvPr/>
-        </p:nvSpPr>
-        <p:spPr>
-          <a:xfrm>
-            <a:off x="658368" y="5943600"/>
-            <a:ext cx="10881360" cy="365760"/>
-          </a:xfrm>
-          <a:prstGeom prst="rect">
-            <a:avLst/>
-          </a:prstGeom>
-          <a:noFill/>
-        </p:spPr>
-        <p:txBody>
-          <a:bodyPr wrap="square">
-            <a:spAutoFit/>
-          </a:bodyPr>
-          <a:lstStyle/>
-          <a:p>
-            <a:r>
-              <a:rPr sz="1450" b="0" i="0">
-                <a:solidFill>
-                  <a:srgbClr val="595959"/>
-                </a:solidFill>
-                <a:latin typeface="Arial"/>
-              </a:rPr>
-              <a:t>If your picture fails these three tests, more pages will not fix it.</a:t>
-            </a:r>
-          </a:p>
-        </p:txBody>
-      </p:sp>
-      <p:sp>
-        <p:nvSpPr>
-          <p:cNvPr id="13" name="TextBox 12"/>
-          <p:cNvSpPr txBox="1"/>
-          <p:nvPr/>
-        </p:nvSpPr>
-        <p:spPr>
-          <a:xfrm>
-            <a:off x="457200" y="6473952"/>
-            <a:ext cx="7772400" cy="292608"/>
-          </a:xfrm>
-          <a:prstGeom prst="rect">
-            <a:avLst/>
-          </a:prstGeom>
-          <a:noFill/>
-        </p:spPr>
-        <p:txBody>
-          <a:bodyPr wrap="square">
-            <a:spAutoFit/>
-          </a:bodyPr>
-          <a:lstStyle/>
-          <a:p>
-            <a:r>
-              <a:rPr sz="900" b="0" i="0">
-                <a:solidFill>
-                  <a:srgbClr val="595959"/>
-                </a:solidFill>
-                <a:latin typeface="Arial"/>
-              </a:rPr>
-              <a:t>2.6 · Run a Phase 2 Assess</a:t>
-            </a:r>
-          </a:p>
-        </p:txBody>
-      </p:sp>
-    </p:spTree>
-  </p:cSld>
-  <p:clrMapOvr>
-    <a:masterClrMapping/>
-  </p:clrMapOvr>
-</p:sld>
-</file>
-
-<file path=ppt/slides/slide41.xml><?xml version="1.0" encoding="utf-8"?>
-<p:sld xmlns:a="http://schemas.openxmlformats.org/drawingml/2006/main" xmlns:p="http://schemas.openxmlformats.org/presentationml/2006/main" xmlns:r="http://schemas.openxmlformats.org/officeDocument/2006/relationships">
-  <p:cSld>
-    <p:spTree>
-      <p:nvGrpSpPr>
-        <p:cNvPr id="1" name=""/>
-        <p:cNvGrpSpPr/>
-        <p:nvPr/>
-      </p:nvGrpSpPr>
-      <p:grpSpPr/>
-      <p:sp>
-        <p:nvSpPr>
-          <p:cNvPr id="2" name="Rectangle 1"/>
-          <p:cNvSpPr/>
-          <p:nvPr/>
-        </p:nvSpPr>
-        <p:spPr>
-          <a:xfrm>
-            <a:off x="457200" y="384048"/>
-            <a:ext cx="45720" cy="256032"/>
-          </a:xfrm>
-          <a:prstGeom prst="rect">
-            <a:avLst/>
-          </a:prstGeom>
-          <a:solidFill>
-            <a:srgbClr val="009CD6"/>
-          </a:solidFill>
-          <a:ln>
-            <a:noFill/>
-          </a:ln>
-          <a:effectLst/>
-        </p:spPr>
-        <p:style>
-          <a:lnRef idx="1">
-            <a:schemeClr val="accent1"/>
-          </a:lnRef>
-          <a:fillRef idx="3">
-            <a:schemeClr val="accent1"/>
-          </a:fillRef>
-          <a:effectRef idx="2">
-            <a:schemeClr val="accent1"/>
-          </a:effectRef>
-          <a:fontRef idx="minor">
-            <a:schemeClr val="lt1"/>
-          </a:fontRef>
-        </p:style>
-        <p:txBody>
-          <a:bodyPr rtlCol="0" anchor="ctr"/>
-          <a:lstStyle/>
-          <a:p>
-            <a:pPr algn="ctr"/>
-          </a:p>
-        </p:txBody>
-      </p:sp>
-      <p:sp>
-        <p:nvSpPr>
-          <p:cNvPr id="3" name="TextBox 2"/>
-          <p:cNvSpPr txBox="1"/>
-          <p:nvPr/>
-        </p:nvSpPr>
-        <p:spPr>
-          <a:xfrm>
-            <a:off x="621792" y="274320"/>
-            <a:ext cx="11247120" cy="914400"/>
-          </a:xfrm>
-          <a:prstGeom prst="rect">
-            <a:avLst/>
-          </a:prstGeom>
-          <a:noFill/>
-        </p:spPr>
-        <p:txBody>
-          <a:bodyPr wrap="square">
-            <a:spAutoFit/>
-          </a:bodyPr>
-          <a:lstStyle/>
-          <a:p>
-            <a:r>
-              <a:rPr sz="2800" b="1" i="0">
-                <a:solidFill>
-                  <a:srgbClr val="1A1A1A"/>
-                </a:solidFill>
-                <a:latin typeface="Arial"/>
-              </a:rPr>
-              <a:t>Then hold each layer to its own test</a:t>
-            </a:r>
-          </a:p>
-        </p:txBody>
-      </p:sp>
-      <p:sp>
-        <p:nvSpPr>
-          <p:cNvPr id="4" name="TextBox 3"/>
-          <p:cNvSpPr txBox="1"/>
-          <p:nvPr/>
-        </p:nvSpPr>
-        <p:spPr>
-          <a:xfrm>
-            <a:off x="658368" y="1417320"/>
-            <a:ext cx="10984687" cy="1165860"/>
-          </a:xfrm>
-          <a:prstGeom prst="rect">
-            <a:avLst/>
-          </a:prstGeom>
-          <a:noFill/>
-        </p:spPr>
-        <p:txBody>
-          <a:bodyPr wrap="square">
-            <a:spAutoFit/>
-          </a:bodyPr>
-          <a:lstStyle/>
-          <a:p>
-            <a:pPr>
-              <a:spcAft>
-                <a:spcPts val="300"/>
-              </a:spcAft>
-            </a:pPr>
-            <a:r>
-              <a:rPr sz="1900" b="1" i="0">
-                <a:solidFill>
-                  <a:srgbClr val="1A1A1A"/>
-                </a:solidFill>
-                <a:latin typeface="Arial"/>
-              </a:rPr>
-              <a:t>Business</a:t>
-            </a:r>
-          </a:p>
-          <a:p>
-            <a:pPr>
-              <a:spcAft>
-                <a:spcPts val="300"/>
-              </a:spcAft>
-            </a:pPr>
-            <a:r>
-              <a:rPr sz="1550" b="0" i="0">
-                <a:solidFill>
-                  <a:srgbClr val="595959"/>
-                </a:solidFill>
-                <a:latin typeface="Arial"/>
-              </a:rPr>
-              <a:t>Capabilities, not org boxes.</a:t>
-            </a:r>
-          </a:p>
-        </p:txBody>
-      </p:sp>
-      <p:sp>
-        <p:nvSpPr>
-          <p:cNvPr id="5" name="Rectangle 4"/>
-          <p:cNvSpPr/>
-          <p:nvPr/>
-        </p:nvSpPr>
-        <p:spPr>
-          <a:xfrm>
-            <a:off x="621792" y="2587752"/>
-            <a:ext cx="10881360" cy="12700"/>
-          </a:xfrm>
-          <a:prstGeom prst="rect">
-            <a:avLst/>
-          </a:prstGeom>
-          <a:solidFill>
-            <a:srgbClr val="DDECF4"/>
-          </a:solidFill>
-          <a:ln>
-            <a:noFill/>
-          </a:ln>
-          <a:effectLst/>
-        </p:spPr>
-        <p:style>
-          <a:lnRef idx="1">
-            <a:schemeClr val="accent1"/>
-          </a:lnRef>
-          <a:fillRef idx="3">
-            <a:schemeClr val="accent1"/>
-          </a:fillRef>
-          <a:effectRef idx="2">
-            <a:schemeClr val="accent1"/>
-          </a:effectRef>
-          <a:fontRef idx="minor">
-            <a:schemeClr val="lt1"/>
-          </a:fontRef>
-        </p:style>
-        <p:txBody>
-          <a:bodyPr rtlCol="0" anchor="ctr"/>
-          <a:lstStyle/>
-          <a:p>
-            <a:pPr algn="ctr"/>
-          </a:p>
-        </p:txBody>
-      </p:sp>
-      <p:sp>
-        <p:nvSpPr>
-          <p:cNvPr id="6" name="TextBox 5"/>
-          <p:cNvSpPr txBox="1"/>
-          <p:nvPr/>
-        </p:nvSpPr>
-        <p:spPr>
-          <a:xfrm>
-            <a:off x="658368" y="2628900"/>
-            <a:ext cx="10984687" cy="1165860"/>
-          </a:xfrm>
-          <a:prstGeom prst="rect">
-            <a:avLst/>
-          </a:prstGeom>
-          <a:noFill/>
-        </p:spPr>
-        <p:txBody>
-          <a:bodyPr wrap="square">
-            <a:spAutoFit/>
-          </a:bodyPr>
-          <a:lstStyle/>
-          <a:p>
-            <a:pPr>
-              <a:spcAft>
-                <a:spcPts val="300"/>
-              </a:spcAft>
-            </a:pPr>
-            <a:r>
-              <a:rPr sz="1900" b="1" i="0">
-                <a:solidFill>
-                  <a:srgbClr val="1A1A1A"/>
-                </a:solidFill>
-                <a:latin typeface="Arial"/>
-              </a:rPr>
-              <a:t>Data</a:t>
-            </a:r>
-          </a:p>
-          <a:p>
-            <a:pPr>
-              <a:spcAft>
-                <a:spcPts val="300"/>
-              </a:spcAft>
-            </a:pPr>
-            <a:r>
-              <a:rPr sz="1550" b="0" i="0">
-                <a:solidFill>
-                  <a:srgbClr val="595959"/>
-                </a:solidFill>
-                <a:latin typeface="Arial"/>
-              </a:rPr>
-              <a:t>One owner, one authoritative copy per domain.</a:t>
-            </a:r>
-          </a:p>
-        </p:txBody>
-      </p:sp>
-      <p:sp>
-        <p:nvSpPr>
-          <p:cNvPr id="7" name="Rectangle 6"/>
-          <p:cNvSpPr/>
-          <p:nvPr/>
-        </p:nvSpPr>
-        <p:spPr>
-          <a:xfrm>
-            <a:off x="621792" y="3799332"/>
-            <a:ext cx="10881360" cy="12700"/>
-          </a:xfrm>
-          <a:prstGeom prst="rect">
-            <a:avLst/>
-          </a:prstGeom>
-          <a:solidFill>
-            <a:srgbClr val="DDECF4"/>
-          </a:solidFill>
-          <a:ln>
-            <a:noFill/>
-          </a:ln>
-          <a:effectLst/>
-        </p:spPr>
-        <p:style>
-          <a:lnRef idx="1">
-            <a:schemeClr val="accent1"/>
-          </a:lnRef>
-          <a:fillRef idx="3">
-            <a:schemeClr val="accent1"/>
-          </a:fillRef>
-          <a:effectRef idx="2">
-            <a:schemeClr val="accent1"/>
-          </a:effectRef>
-          <a:fontRef idx="minor">
-            <a:schemeClr val="lt1"/>
-          </a:fontRef>
-        </p:style>
-        <p:txBody>
-          <a:bodyPr rtlCol="0" anchor="ctr"/>
-          <a:lstStyle/>
-          <a:p>
-            <a:pPr algn="ctr"/>
-          </a:p>
-        </p:txBody>
-      </p:sp>
-      <p:sp>
-        <p:nvSpPr>
-          <p:cNvPr id="8" name="TextBox 7"/>
-          <p:cNvSpPr txBox="1"/>
-          <p:nvPr/>
-        </p:nvSpPr>
-        <p:spPr>
-          <a:xfrm>
-            <a:off x="658368" y="3840480"/>
-            <a:ext cx="10984687" cy="1165860"/>
-          </a:xfrm>
-          <a:prstGeom prst="rect">
-            <a:avLst/>
-          </a:prstGeom>
-          <a:noFill/>
-        </p:spPr>
-        <p:txBody>
-          <a:bodyPr wrap="square">
-            <a:spAutoFit/>
-          </a:bodyPr>
-          <a:lstStyle/>
-          <a:p>
-            <a:pPr>
-              <a:spcAft>
-                <a:spcPts val="300"/>
-              </a:spcAft>
-            </a:pPr>
-            <a:r>
-              <a:rPr sz="1900" b="1" i="0">
-                <a:solidFill>
-                  <a:srgbClr val="1A1A1A"/>
-                </a:solidFill>
-                <a:latin typeface="Arial"/>
-              </a:rPr>
-              <a:t>Application</a:t>
-            </a:r>
-          </a:p>
-          <a:p>
-            <a:pPr>
-              <a:spcAft>
-                <a:spcPts val="300"/>
-              </a:spcAft>
-            </a:pPr>
-            <a:r>
-              <a:rPr sz="1550" b="0" i="0">
-                <a:solidFill>
-                  <a:srgbClr val="595959"/>
-                </a:solidFill>
-                <a:latin typeface="Arial"/>
-              </a:rPr>
-              <a:t>Every system maps to a capability and a data domain.</a:t>
-            </a:r>
-          </a:p>
-        </p:txBody>
-      </p:sp>
-      <p:sp>
-        <p:nvSpPr>
-          <p:cNvPr id="9" name="Rectangle 8"/>
-          <p:cNvSpPr/>
-          <p:nvPr/>
-        </p:nvSpPr>
-        <p:spPr>
-          <a:xfrm>
-            <a:off x="621792" y="5010912"/>
-            <a:ext cx="10881360" cy="12700"/>
-          </a:xfrm>
-          <a:prstGeom prst="rect">
-            <a:avLst/>
-          </a:prstGeom>
-          <a:solidFill>
-            <a:srgbClr val="DDECF4"/>
-          </a:solidFill>
-          <a:ln>
-            <a:noFill/>
-          </a:ln>
-          <a:effectLst/>
-        </p:spPr>
-        <p:style>
-          <a:lnRef idx="1">
-            <a:schemeClr val="accent1"/>
-          </a:lnRef>
-          <a:fillRef idx="3">
-            <a:schemeClr val="accent1"/>
-          </a:fillRef>
-          <a:effectRef idx="2">
-            <a:schemeClr val="accent1"/>
-          </a:effectRef>
-          <a:fontRef idx="minor">
-            <a:schemeClr val="lt1"/>
-          </a:fontRef>
-        </p:style>
-        <p:txBody>
-          <a:bodyPr rtlCol="0" anchor="ctr"/>
-          <a:lstStyle/>
-          <a:p>
-            <a:pPr algn="ctr"/>
-          </a:p>
-        </p:txBody>
-      </p:sp>
-      <p:sp>
-        <p:nvSpPr>
-          <p:cNvPr id="10" name="TextBox 9"/>
-          <p:cNvSpPr txBox="1"/>
-          <p:nvPr/>
-        </p:nvSpPr>
-        <p:spPr>
-          <a:xfrm>
-            <a:off x="658368" y="5052059"/>
-            <a:ext cx="10984687" cy="1165860"/>
-          </a:xfrm>
-          <a:prstGeom prst="rect">
-            <a:avLst/>
-          </a:prstGeom>
-          <a:noFill/>
-        </p:spPr>
-        <p:txBody>
-          <a:bodyPr wrap="square">
-            <a:spAutoFit/>
-          </a:bodyPr>
-          <a:lstStyle/>
-          <a:p>
-            <a:pPr>
-              <a:spcAft>
-                <a:spcPts val="300"/>
-              </a:spcAft>
-            </a:pPr>
-            <a:r>
-              <a:rPr sz="1900" b="1" i="0">
-                <a:solidFill>
-                  <a:srgbClr val="1A1A1A"/>
-                </a:solidFill>
-                <a:latin typeface="Arial"/>
-              </a:rPr>
-              <a:t>Technology</a:t>
-            </a:r>
-          </a:p>
-          <a:p>
-            <a:pPr>
-              <a:spcAft>
-                <a:spcPts val="300"/>
-              </a:spcAft>
-            </a:pPr>
-            <a:r>
-              <a:rPr sz="1550" b="0" i="0">
-                <a:solidFill>
-                  <a:srgbClr val="595959"/>
-                </a:solidFill>
-                <a:latin typeface="Arial"/>
-              </a:rPr>
-              <a:t>Standards and single points of failure named.</a:t>
-            </a:r>
-          </a:p>
-        </p:txBody>
-      </p:sp>
-      <p:sp>
-        <p:nvSpPr>
-          <p:cNvPr id="11" name="TextBox 10"/>
-          <p:cNvSpPr txBox="1"/>
-          <p:nvPr/>
-        </p:nvSpPr>
-        <p:spPr>
-          <a:xfrm>
-            <a:off x="457200" y="6473952"/>
-            <a:ext cx="7772400" cy="292608"/>
-          </a:xfrm>
-          <a:prstGeom prst="rect">
-            <a:avLst/>
-          </a:prstGeom>
-          <a:noFill/>
-        </p:spPr>
-        <p:txBody>
-          <a:bodyPr wrap="square">
-            <a:spAutoFit/>
-          </a:bodyPr>
-          <a:lstStyle/>
-          <a:p>
-            <a:r>
-              <a:rPr sz="900" b="0" i="0">
-                <a:solidFill>
-                  <a:srgbClr val="595959"/>
-                </a:solidFill>
-                <a:latin typeface="Arial"/>
-              </a:rPr>
-              <a:t>2.6 · Run a Phase 2 Assess</a:t>
-            </a:r>
-          </a:p>
-        </p:txBody>
-      </p:sp>
-    </p:spTree>
-  </p:cSld>
-  <p:clrMapOvr>
-    <a:masterClrMapping/>
-  </p:clrMapOvr>
-</p:sld>
-</file>
-
-<file path=ppt/slides/slide42.xml><?xml version="1.0" encoding="utf-8"?>
-<p:sld xmlns:a="http://schemas.openxmlformats.org/drawingml/2006/main" xmlns:p="http://schemas.openxmlformats.org/presentationml/2006/main" xmlns:r="http://schemas.openxmlformats.org/officeDocument/2006/relationships">
-  <p:cSld>
-    <p:spTree>
-      <p:nvGrpSpPr>
-        <p:cNvPr id="1" name=""/>
-        <p:cNvGrpSpPr/>
-        <p:nvPr/>
-      </p:nvGrpSpPr>
-      <p:grpSpPr/>
-      <p:sp>
-        <p:nvSpPr>
-          <p:cNvPr id="2" name="Rectangle 1"/>
-          <p:cNvSpPr/>
-          <p:nvPr/>
-        </p:nvSpPr>
-        <p:spPr>
-          <a:xfrm>
-            <a:off x="457200" y="384048"/>
-            <a:ext cx="45720" cy="256032"/>
-          </a:xfrm>
-          <a:prstGeom prst="rect">
-            <a:avLst/>
-          </a:prstGeom>
-          <a:solidFill>
-            <a:srgbClr val="009CD6"/>
-          </a:solidFill>
-          <a:ln>
-            <a:noFill/>
-          </a:ln>
-          <a:effectLst/>
-        </p:spPr>
-        <p:style>
-          <a:lnRef idx="1">
-            <a:schemeClr val="accent1"/>
-          </a:lnRef>
-          <a:fillRef idx="3">
-            <a:schemeClr val="accent1"/>
-          </a:fillRef>
-          <a:effectRef idx="2">
-            <a:schemeClr val="accent1"/>
-          </a:effectRef>
-          <a:fontRef idx="minor">
-            <a:schemeClr val="lt1"/>
-          </a:fontRef>
-        </p:style>
-        <p:txBody>
-          <a:bodyPr rtlCol="0" anchor="ctr"/>
-          <a:lstStyle/>
-          <a:p>
-            <a:pPr algn="ctr"/>
-          </a:p>
-        </p:txBody>
-      </p:sp>
-      <p:sp>
-        <p:nvSpPr>
-          <p:cNvPr id="3" name="TextBox 2"/>
-          <p:cNvSpPr txBox="1"/>
-          <p:nvPr/>
-        </p:nvSpPr>
-        <p:spPr>
-          <a:xfrm>
-            <a:off x="621792" y="274320"/>
-            <a:ext cx="11247120" cy="914400"/>
-          </a:xfrm>
-          <a:prstGeom prst="rect">
-            <a:avLst/>
-          </a:prstGeom>
-          <a:noFill/>
-        </p:spPr>
-        <p:txBody>
-          <a:bodyPr wrap="square">
-            <a:spAutoFit/>
-          </a:bodyPr>
-          <a:lstStyle/>
-          <a:p>
-            <a:r>
-              <a:rPr sz="2800" b="1" i="0">
-                <a:solidFill>
-                  <a:srgbClr val="1A1A1A"/>
-                </a:solidFill>
-                <a:latin typeface="Arial"/>
-              </a:rPr>
-              <a:t>Four gaps show up in almost every first assessment — look for them on purpose</a:t>
-            </a:r>
-          </a:p>
-        </p:txBody>
-      </p:sp>
-      <p:sp>
-        <p:nvSpPr>
-          <p:cNvPr id="4" name="Oval 3"/>
-          <p:cNvSpPr/>
-          <p:nvPr/>
-        </p:nvSpPr>
-        <p:spPr>
-          <a:xfrm>
-            <a:off x="621792" y="1463040"/>
-            <a:ext cx="310896" cy="310896"/>
-          </a:xfrm>
-          <a:prstGeom prst="ellipse">
-            <a:avLst/>
-          </a:prstGeom>
-          <a:solidFill>
-            <a:srgbClr val="009CD6"/>
-          </a:solidFill>
-          <a:ln>
-            <a:noFill/>
-          </a:ln>
-          <a:effectLst/>
-        </p:spPr>
-        <p:style>
-          <a:lnRef idx="1">
-            <a:schemeClr val="accent1"/>
-          </a:lnRef>
-          <a:fillRef idx="3">
-            <a:schemeClr val="accent1"/>
-          </a:fillRef>
-          <a:effectRef idx="2">
-            <a:schemeClr val="accent1"/>
-          </a:effectRef>
-          <a:fontRef idx="minor">
-            <a:schemeClr val="lt1"/>
-          </a:fontRef>
-        </p:style>
-        <p:txBody>
-          <a:bodyPr rtlCol="0" anchor="ctr" lIns="0" rIns="0" tIns="0" bIns="0" wrap="square"/>
-          <a:lstStyle/>
-          <a:p>
-            <a:pPr algn="ctr"/>
-            <a:r>
-              <a:rPr sz="1300" b="1" i="0">
-                <a:solidFill>
-                  <a:srgbClr val="FFFFFF"/>
-                </a:solidFill>
-                <a:latin typeface="Arial"/>
-              </a:rPr>
-              <a:t>1</a:t>
-            </a:r>
-          </a:p>
-        </p:txBody>
-      </p:sp>
-      <p:sp>
-        <p:nvSpPr>
-          <p:cNvPr id="5" name="TextBox 4"/>
-          <p:cNvSpPr txBox="1"/>
-          <p:nvPr/>
-        </p:nvSpPr>
-        <p:spPr>
-          <a:xfrm>
-            <a:off x="1115568" y="1417320"/>
-            <a:ext cx="10527487" cy="1165860"/>
-          </a:xfrm>
-          <a:prstGeom prst="rect">
-            <a:avLst/>
-          </a:prstGeom>
-          <a:noFill/>
-        </p:spPr>
-        <p:txBody>
-          <a:bodyPr wrap="square">
-            <a:spAutoFit/>
-          </a:bodyPr>
-          <a:lstStyle/>
-          <a:p>
-            <a:pPr>
-              <a:spcAft>
-                <a:spcPts val="300"/>
-              </a:spcAft>
-            </a:pPr>
-            <a:r>
-              <a:rPr sz="1900" b="1" i="0">
-                <a:solidFill>
-                  <a:srgbClr val="1A1A1A"/>
-                </a:solidFill>
-                <a:latin typeface="Arial"/>
-              </a:rPr>
-              <a:t>Duplicate registries</a:t>
-            </a:r>
-          </a:p>
-          <a:p>
-            <a:pPr>
-              <a:spcAft>
-                <a:spcPts val="300"/>
-              </a:spcAft>
-            </a:pPr>
-            <a:r>
-              <a:rPr sz="1550" b="0" i="0">
-                <a:solidFill>
-                  <a:srgbClr val="595959"/>
-                </a:solidFill>
-                <a:latin typeface="Arial"/>
-              </a:rPr>
-              <a:t>Several bodies each keeping their own copy of the same domain, none agreeing.</a:t>
-            </a:r>
-          </a:p>
-        </p:txBody>
-      </p:sp>
-      <p:sp>
-        <p:nvSpPr>
-          <p:cNvPr id="6" name="Rectangle 5"/>
-          <p:cNvSpPr/>
-          <p:nvPr/>
-        </p:nvSpPr>
-        <p:spPr>
-          <a:xfrm>
-            <a:off x="621792" y="2587752"/>
-            <a:ext cx="10881360" cy="12700"/>
-          </a:xfrm>
-          <a:prstGeom prst="rect">
-            <a:avLst/>
-          </a:prstGeom>
-          <a:solidFill>
-            <a:srgbClr val="DDECF4"/>
-          </a:solidFill>
-          <a:ln>
-            <a:noFill/>
-          </a:ln>
-          <a:effectLst/>
-        </p:spPr>
-        <p:style>
-          <a:lnRef idx="1">
-            <a:schemeClr val="accent1"/>
-          </a:lnRef>
-          <a:fillRef idx="3">
-            <a:schemeClr val="accent1"/>
-          </a:fillRef>
-          <a:effectRef idx="2">
-            <a:schemeClr val="accent1"/>
-          </a:effectRef>
-          <a:fontRef idx="minor">
-            <a:schemeClr val="lt1"/>
-          </a:fontRef>
-        </p:style>
-        <p:txBody>
-          <a:bodyPr rtlCol="0" anchor="ctr"/>
-          <a:lstStyle/>
-          <a:p>
-            <a:pPr algn="ctr"/>
-          </a:p>
-        </p:txBody>
-      </p:sp>
-      <p:sp>
-        <p:nvSpPr>
-          <p:cNvPr id="7" name="Oval 6"/>
-          <p:cNvSpPr/>
-          <p:nvPr/>
-        </p:nvSpPr>
-        <p:spPr>
-          <a:xfrm>
-            <a:off x="621792" y="2674620"/>
-            <a:ext cx="310896" cy="310896"/>
-          </a:xfrm>
-          <a:prstGeom prst="ellipse">
-            <a:avLst/>
-          </a:prstGeom>
-          <a:solidFill>
-            <a:srgbClr val="009CD6"/>
-          </a:solidFill>
-          <a:ln>
-            <a:noFill/>
-          </a:ln>
-          <a:effectLst/>
-        </p:spPr>
-        <p:style>
-          <a:lnRef idx="1">
-            <a:schemeClr val="accent1"/>
-          </a:lnRef>
-          <a:fillRef idx="3">
-            <a:schemeClr val="accent1"/>
-          </a:fillRef>
-          <a:effectRef idx="2">
-            <a:schemeClr val="accent1"/>
-          </a:effectRef>
-          <a:fontRef idx="minor">
-            <a:schemeClr val="lt1"/>
-          </a:fontRef>
-        </p:style>
-        <p:txBody>
-          <a:bodyPr rtlCol="0" anchor="ctr" lIns="0" rIns="0" tIns="0" bIns="0" wrap="square"/>
-          <a:lstStyle/>
-          <a:p>
-            <a:pPr algn="ctr"/>
-            <a:r>
-              <a:rPr sz="1300" b="1" i="0">
-                <a:solidFill>
-                  <a:srgbClr val="FFFFFF"/>
-                </a:solidFill>
-                <a:latin typeface="Arial"/>
-              </a:rPr>
-              <a:t>2</a:t>
-            </a:r>
-          </a:p>
-        </p:txBody>
-      </p:sp>
-      <p:sp>
-        <p:nvSpPr>
-          <p:cNvPr id="8" name="TextBox 7"/>
-          <p:cNvSpPr txBox="1"/>
-          <p:nvPr/>
-        </p:nvSpPr>
-        <p:spPr>
-          <a:xfrm>
-            <a:off x="1115568" y="2628900"/>
-            <a:ext cx="10527487" cy="1165860"/>
-          </a:xfrm>
-          <a:prstGeom prst="rect">
-            <a:avLst/>
-          </a:prstGeom>
-          <a:noFill/>
-        </p:spPr>
-        <p:txBody>
-          <a:bodyPr wrap="square">
-            <a:spAutoFit/>
-          </a:bodyPr>
-          <a:lstStyle/>
-          <a:p>
-            <a:pPr>
-              <a:spcAft>
-                <a:spcPts val="300"/>
-              </a:spcAft>
-            </a:pPr>
-            <a:r>
-              <a:rPr sz="1900" b="1" i="0">
-                <a:solidFill>
-                  <a:srgbClr val="1A1A1A"/>
-                </a:solidFill>
-                <a:latin typeface="Arial"/>
-              </a:rPr>
-              <a:t>Orphan systems</a:t>
-            </a:r>
-          </a:p>
-          <a:p>
-            <a:pPr>
-              <a:spcAft>
-                <a:spcPts val="300"/>
-              </a:spcAft>
-            </a:pPr>
-            <a:r>
-              <a:rPr sz="1550" b="0" i="0">
-                <a:solidFill>
-                  <a:srgbClr val="595959"/>
-                </a:solidFill>
-                <a:latin typeface="Arial"/>
-              </a:rPr>
-              <a:t>Applications that map to no current capability, often left over from a project that ended.</a:t>
-            </a:r>
-          </a:p>
-        </p:txBody>
-      </p:sp>
-      <p:sp>
-        <p:nvSpPr>
-          <p:cNvPr id="9" name="Rectangle 8"/>
-          <p:cNvSpPr/>
-          <p:nvPr/>
-        </p:nvSpPr>
-        <p:spPr>
-          <a:xfrm>
-            <a:off x="621792" y="3799332"/>
-            <a:ext cx="10881360" cy="12700"/>
-          </a:xfrm>
-          <a:prstGeom prst="rect">
-            <a:avLst/>
-          </a:prstGeom>
-          <a:solidFill>
-            <a:srgbClr val="DDECF4"/>
-          </a:solidFill>
-          <a:ln>
-            <a:noFill/>
-          </a:ln>
-          <a:effectLst/>
-        </p:spPr>
-        <p:style>
-          <a:lnRef idx="1">
-            <a:schemeClr val="accent1"/>
-          </a:lnRef>
-          <a:fillRef idx="3">
-            <a:schemeClr val="accent1"/>
-          </a:fillRef>
-          <a:effectRef idx="2">
-            <a:schemeClr val="accent1"/>
-          </a:effectRef>
-          <a:fontRef idx="minor">
-            <a:schemeClr val="lt1"/>
-          </a:fontRef>
-        </p:style>
-        <p:txBody>
-          <a:bodyPr rtlCol="0" anchor="ctr"/>
-          <a:lstStyle/>
-          <a:p>
-            <a:pPr algn="ctr"/>
-          </a:p>
-        </p:txBody>
-      </p:sp>
-      <p:sp>
-        <p:nvSpPr>
-          <p:cNvPr id="10" name="Oval 9"/>
-          <p:cNvSpPr/>
-          <p:nvPr/>
-        </p:nvSpPr>
-        <p:spPr>
-          <a:xfrm>
-            <a:off x="621792" y="3886200"/>
-            <a:ext cx="310896" cy="310896"/>
-          </a:xfrm>
-          <a:prstGeom prst="ellipse">
-            <a:avLst/>
-          </a:prstGeom>
-          <a:solidFill>
-            <a:srgbClr val="009CD6"/>
-          </a:solidFill>
-          <a:ln>
-            <a:noFill/>
-          </a:ln>
-          <a:effectLst/>
-        </p:spPr>
-        <p:style>
-          <a:lnRef idx="1">
-            <a:schemeClr val="accent1"/>
-          </a:lnRef>
-          <a:fillRef idx="3">
-            <a:schemeClr val="accent1"/>
-          </a:fillRef>
-          <a:effectRef idx="2">
-            <a:schemeClr val="accent1"/>
-          </a:effectRef>
-          <a:fontRef idx="minor">
-            <a:schemeClr val="lt1"/>
-          </a:fontRef>
-        </p:style>
-        <p:txBody>
-          <a:bodyPr rtlCol="0" anchor="ctr" lIns="0" rIns="0" tIns="0" bIns="0" wrap="square"/>
-          <a:lstStyle/>
-          <a:p>
-            <a:pPr algn="ctr"/>
-            <a:r>
-              <a:rPr sz="1300" b="1" i="0">
-                <a:solidFill>
-                  <a:srgbClr val="FFFFFF"/>
-                </a:solidFill>
-                <a:latin typeface="Arial"/>
-              </a:rPr>
-              <a:t>3</a:t>
-            </a:r>
-          </a:p>
-        </p:txBody>
-      </p:sp>
-      <p:sp>
-        <p:nvSpPr>
-          <p:cNvPr id="11" name="TextBox 10"/>
-          <p:cNvSpPr txBox="1"/>
-          <p:nvPr/>
-        </p:nvSpPr>
-        <p:spPr>
-          <a:xfrm>
-            <a:off x="1115568" y="3840480"/>
-            <a:ext cx="10527487" cy="1165860"/>
-          </a:xfrm>
-          <a:prstGeom prst="rect">
-            <a:avLst/>
-          </a:prstGeom>
-          <a:noFill/>
-        </p:spPr>
-        <p:txBody>
-          <a:bodyPr wrap="square">
-            <a:spAutoFit/>
-          </a:bodyPr>
-          <a:lstStyle/>
-          <a:p>
-            <a:pPr>
-              <a:spcAft>
-                <a:spcPts val="300"/>
-              </a:spcAft>
-            </a:pPr>
-            <a:r>
-              <a:rPr sz="1900" b="1" i="0">
-                <a:solidFill>
-                  <a:srgbClr val="1A1A1A"/>
-                </a:solidFill>
-                <a:latin typeface="Arial"/>
-              </a:rPr>
-              <a:t>Point-to-point spaghetti</a:t>
-            </a:r>
-          </a:p>
-          <a:p>
-            <a:pPr>
-              <a:spcAft>
-                <a:spcPts val="300"/>
-              </a:spcAft>
-            </a:pPr>
-            <a:r>
-              <a:rPr sz="1550" b="0" i="0">
-                <a:solidFill>
-                  <a:srgbClr val="595959"/>
-                </a:solidFill>
-                <a:latin typeface="Arial"/>
-              </a:rPr>
-              <a:t>Every system connected to every other by its own custom link, with no shared data exchange.</a:t>
-            </a:r>
-          </a:p>
-        </p:txBody>
-      </p:sp>
-      <p:sp>
-        <p:nvSpPr>
-          <p:cNvPr id="12" name="Rectangle 11"/>
-          <p:cNvSpPr/>
-          <p:nvPr/>
-        </p:nvSpPr>
-        <p:spPr>
-          <a:xfrm>
-            <a:off x="621792" y="5010912"/>
-            <a:ext cx="10881360" cy="12700"/>
-          </a:xfrm>
-          <a:prstGeom prst="rect">
-            <a:avLst/>
-          </a:prstGeom>
-          <a:solidFill>
-            <a:srgbClr val="DDECF4"/>
-          </a:solidFill>
-          <a:ln>
-            <a:noFill/>
-          </a:ln>
-          <a:effectLst/>
-        </p:spPr>
-        <p:style>
-          <a:lnRef idx="1">
-            <a:schemeClr val="accent1"/>
-          </a:lnRef>
-          <a:fillRef idx="3">
-            <a:schemeClr val="accent1"/>
-          </a:fillRef>
-          <a:effectRef idx="2">
-            <a:schemeClr val="accent1"/>
-          </a:effectRef>
-          <a:fontRef idx="minor">
-            <a:schemeClr val="lt1"/>
-          </a:fontRef>
-        </p:style>
-        <p:txBody>
-          <a:bodyPr rtlCol="0" anchor="ctr"/>
-          <a:lstStyle/>
-          <a:p>
-            <a:pPr algn="ctr"/>
-          </a:p>
-        </p:txBody>
-      </p:sp>
-      <p:sp>
-        <p:nvSpPr>
-          <p:cNvPr id="13" name="Oval 12"/>
-          <p:cNvSpPr/>
-          <p:nvPr/>
-        </p:nvSpPr>
-        <p:spPr>
-          <a:xfrm>
-            <a:off x="621792" y="5097779"/>
-            <a:ext cx="310896" cy="310896"/>
-          </a:xfrm>
-          <a:prstGeom prst="ellipse">
-            <a:avLst/>
-          </a:prstGeom>
-          <a:solidFill>
-            <a:srgbClr val="009CD6"/>
-          </a:solidFill>
-          <a:ln>
-            <a:noFill/>
-          </a:ln>
-          <a:effectLst/>
-        </p:spPr>
-        <p:style>
-          <a:lnRef idx="1">
-            <a:schemeClr val="accent1"/>
-          </a:lnRef>
-          <a:fillRef idx="3">
-            <a:schemeClr val="accent1"/>
-          </a:fillRef>
-          <a:effectRef idx="2">
-            <a:schemeClr val="accent1"/>
-          </a:effectRef>
-          <a:fontRef idx="minor">
-            <a:schemeClr val="lt1"/>
-          </a:fontRef>
-        </p:style>
-        <p:txBody>
-          <a:bodyPr rtlCol="0" anchor="ctr" lIns="0" rIns="0" tIns="0" bIns="0" wrap="square"/>
-          <a:lstStyle/>
-          <a:p>
-            <a:pPr algn="ctr"/>
-            <a:r>
-              <a:rPr sz="1300" b="1" i="0">
-                <a:solidFill>
-                  <a:srgbClr val="FFFFFF"/>
-                </a:solidFill>
-                <a:latin typeface="Arial"/>
-              </a:rPr>
-              <a:t>4</a:t>
-            </a:r>
-          </a:p>
-        </p:txBody>
-      </p:sp>
-      <p:sp>
-        <p:nvSpPr>
-          <p:cNvPr id="14" name="TextBox 13"/>
-          <p:cNvSpPr txBox="1"/>
-          <p:nvPr/>
-        </p:nvSpPr>
-        <p:spPr>
-          <a:xfrm>
-            <a:off x="1115568" y="5052059"/>
-            <a:ext cx="10527487" cy="1165860"/>
-          </a:xfrm>
-          <a:prstGeom prst="rect">
-            <a:avLst/>
-          </a:prstGeom>
-          <a:noFill/>
-        </p:spPr>
-        <p:txBody>
-          <a:bodyPr wrap="square">
-            <a:spAutoFit/>
-          </a:bodyPr>
-          <a:lstStyle/>
-          <a:p>
-            <a:pPr>
-              <a:spcAft>
-                <a:spcPts val="300"/>
-              </a:spcAft>
-            </a:pPr>
-            <a:r>
-              <a:rPr sz="1900" b="1" i="0">
-                <a:solidFill>
-                  <a:srgbClr val="1A1A1A"/>
-                </a:solidFill>
-                <a:latin typeface="Arial"/>
-              </a:rPr>
-              <a:t>No clear owner</a:t>
-            </a:r>
-          </a:p>
-          <a:p>
-            <a:pPr>
-              <a:spcAft>
-                <a:spcPts val="300"/>
-              </a:spcAft>
-            </a:pPr>
-            <a:r>
-              <a:rPr sz="1550" b="0" i="0">
-                <a:solidFill>
-                  <a:srgbClr val="595959"/>
-                </a:solidFill>
-                <a:latin typeface="Arial"/>
-              </a:rPr>
-              <a:t>A capability or a domain that everyone uses and no one owns — where accountability quietly disappears.</a:t>
-            </a:r>
-          </a:p>
-        </p:txBody>
-      </p:sp>
-      <p:sp>
-        <p:nvSpPr>
-          <p:cNvPr id="15" name="TextBox 14"/>
-          <p:cNvSpPr txBox="1"/>
-          <p:nvPr/>
-        </p:nvSpPr>
-        <p:spPr>
-          <a:xfrm>
-            <a:off x="457200" y="6473952"/>
-            <a:ext cx="7772400" cy="292608"/>
-          </a:xfrm>
-          <a:prstGeom prst="rect">
-            <a:avLst/>
-          </a:prstGeom>
-          <a:noFill/>
-        </p:spPr>
-        <p:txBody>
-          <a:bodyPr wrap="square">
-            <a:spAutoFit/>
-          </a:bodyPr>
-          <a:lstStyle/>
-          <a:p>
-            <a:r>
-              <a:rPr sz="900" b="0" i="0">
-                <a:solidFill>
-                  <a:srgbClr val="595959"/>
-                </a:solidFill>
-                <a:latin typeface="Arial"/>
-              </a:rPr>
-              <a:t>2.6 · Run a Phase 2 Assess</a:t>
-            </a:r>
-          </a:p>
-        </p:txBody>
-      </p:sp>
-    </p:spTree>
-  </p:cSld>
-  <p:clrMapOvr>
-    <a:masterClrMapping/>
-  </p:clrMapOvr>
-</p:sld>
-</file>
-
-<file path=ppt/slides/slide43.xml><?xml version="1.0" encoding="utf-8"?>
-<p:sld xmlns:a="http://schemas.openxmlformats.org/drawingml/2006/main" xmlns:p="http://schemas.openxmlformats.org/presentationml/2006/main" xmlns:r="http://schemas.openxmlformats.org/officeDocument/2006/relationships">
-  <p:cSld>
-    <p:spTree>
-      <p:nvGrpSpPr>
-        <p:cNvPr id="1" name=""/>
-        <p:cNvGrpSpPr/>
-        <p:nvPr/>
-      </p:nvGrpSpPr>
-      <p:grpSpPr/>
-      <p:sp>
-        <p:nvSpPr>
-          <p:cNvPr id="2" name="Rectangle 1"/>
-          <p:cNvSpPr/>
-          <p:nvPr/>
-        </p:nvSpPr>
-        <p:spPr>
-          <a:xfrm>
-            <a:off x="457200" y="384048"/>
-            <a:ext cx="45720" cy="256032"/>
-          </a:xfrm>
-          <a:prstGeom prst="rect">
-            <a:avLst/>
-          </a:prstGeom>
-          <a:solidFill>
-            <a:srgbClr val="009CD6"/>
-          </a:solidFill>
-          <a:ln>
-            <a:noFill/>
-          </a:ln>
-          <a:effectLst/>
-        </p:spPr>
-        <p:style>
-          <a:lnRef idx="1">
-            <a:schemeClr val="accent1"/>
-          </a:lnRef>
-          <a:fillRef idx="3">
-            <a:schemeClr val="accent1"/>
-          </a:fillRef>
-          <a:effectRef idx="2">
-            <a:schemeClr val="accent1"/>
-          </a:effectRef>
-          <a:fontRef idx="minor">
-            <a:schemeClr val="lt1"/>
-          </a:fontRef>
-        </p:style>
-        <p:txBody>
-          <a:bodyPr rtlCol="0" anchor="ctr"/>
-          <a:lstStyle/>
-          <a:p>
-            <a:pPr algn="ctr"/>
-          </a:p>
-        </p:txBody>
-      </p:sp>
-      <p:sp>
-        <p:nvSpPr>
-          <p:cNvPr id="3" name="TextBox 2"/>
-          <p:cNvSpPr txBox="1"/>
-          <p:nvPr/>
-        </p:nvSpPr>
-        <p:spPr>
-          <a:xfrm>
-            <a:off x="621792" y="274320"/>
-            <a:ext cx="11247120" cy="914400"/>
-          </a:xfrm>
-          <a:prstGeom prst="rect">
-            <a:avLst/>
-          </a:prstGeom>
-          <a:noFill/>
-        </p:spPr>
-        <p:txBody>
-          <a:bodyPr wrap="square">
-            <a:spAutoFit/>
-          </a:bodyPr>
-          <a:lstStyle/>
-          <a:p>
-            <a:r>
-              <a:rPr sz="2800" b="1" i="0">
-                <a:solidFill>
-                  <a:srgbClr val="1A1A1A"/>
-                </a:solidFill>
-                <a:latin typeface="Arial"/>
-              </a:rPr>
-              <a:t>A list of gaps is not an assessment — the priority order is</a:t>
-            </a:r>
-          </a:p>
-        </p:txBody>
-      </p:sp>
-      <p:sp>
-        <p:nvSpPr>
-          <p:cNvPr id="4" name="TextBox 3"/>
-          <p:cNvSpPr txBox="1"/>
-          <p:nvPr/>
-        </p:nvSpPr>
-        <p:spPr>
-          <a:xfrm>
-            <a:off x="658368" y="1463040"/>
-            <a:ext cx="10984687" cy="1325879"/>
-          </a:xfrm>
-          <a:prstGeom prst="rect">
-            <a:avLst/>
-          </a:prstGeom>
-          <a:noFill/>
-        </p:spPr>
-        <p:txBody>
-          <a:bodyPr wrap="square">
-            <a:spAutoFit/>
-          </a:bodyPr>
-          <a:lstStyle/>
-          <a:p>
-            <a:pPr>
-              <a:spcAft>
-                <a:spcPts val="300"/>
-              </a:spcAft>
-            </a:pPr>
-            <a:r>
-              <a:rPr sz="1900" b="1" i="0">
-                <a:solidFill>
-                  <a:srgbClr val="1A1A1A"/>
-                </a:solidFill>
-                <a:latin typeface="Arial"/>
-              </a:rPr>
-              <a:t>For each gap, judge how much it hurts</a:t>
-            </a:r>
-          </a:p>
-          <a:p>
-            <a:pPr>
-              <a:spcAft>
-                <a:spcPts val="300"/>
-              </a:spcAft>
-            </a:pPr>
-            <a:r>
-              <a:rPr sz="1550" b="0" i="0">
-                <a:solidFill>
-                  <a:srgbClr val="595959"/>
-                </a:solidFill>
-                <a:latin typeface="Arial"/>
-              </a:rPr>
-              <a:t>The cost to the country, the burden on the citizen, the risk to the minister’s programme.</a:t>
-            </a:r>
-          </a:p>
-        </p:txBody>
-      </p:sp>
-      <p:sp>
-        <p:nvSpPr>
-          <p:cNvPr id="5" name="Rectangle 4"/>
-          <p:cNvSpPr/>
-          <p:nvPr/>
-        </p:nvSpPr>
-        <p:spPr>
-          <a:xfrm>
-            <a:off x="621792" y="2793491"/>
-            <a:ext cx="10881360" cy="12700"/>
-          </a:xfrm>
-          <a:prstGeom prst="rect">
-            <a:avLst/>
-          </a:prstGeom>
-          <a:solidFill>
-            <a:srgbClr val="DDECF4"/>
-          </a:solidFill>
-          <a:ln>
-            <a:noFill/>
-          </a:ln>
-          <a:effectLst/>
-        </p:spPr>
-        <p:style>
-          <a:lnRef idx="1">
-            <a:schemeClr val="accent1"/>
-          </a:lnRef>
-          <a:fillRef idx="3">
-            <a:schemeClr val="accent1"/>
-          </a:fillRef>
-          <a:effectRef idx="2">
-            <a:schemeClr val="accent1"/>
-          </a:effectRef>
-          <a:fontRef idx="minor">
-            <a:schemeClr val="lt1"/>
-          </a:fontRef>
-        </p:style>
-        <p:txBody>
-          <a:bodyPr rtlCol="0" anchor="ctr"/>
-          <a:lstStyle/>
-          <a:p>
-            <a:pPr algn="ctr"/>
-          </a:p>
-        </p:txBody>
-      </p:sp>
-      <p:sp>
-        <p:nvSpPr>
-          <p:cNvPr id="6" name="TextBox 5"/>
-          <p:cNvSpPr txBox="1"/>
-          <p:nvPr/>
-        </p:nvSpPr>
-        <p:spPr>
-          <a:xfrm>
-            <a:off x="658368" y="2834639"/>
-            <a:ext cx="10984687" cy="1325879"/>
-          </a:xfrm>
-          <a:prstGeom prst="rect">
-            <a:avLst/>
-          </a:prstGeom>
-          <a:noFill/>
-        </p:spPr>
-        <p:txBody>
-          <a:bodyPr wrap="square">
-            <a:spAutoFit/>
-          </a:bodyPr>
-          <a:lstStyle/>
-          <a:p>
-            <a:pPr>
-              <a:spcAft>
-                <a:spcPts val="300"/>
-              </a:spcAft>
-            </a:pPr>
-            <a:r>
-              <a:rPr sz="1900" b="1" i="0">
-                <a:solidFill>
-                  <a:srgbClr val="1A1A1A"/>
-                </a:solidFill>
-                <a:latin typeface="Arial"/>
-              </a:rPr>
-              <a:t>And judge how hard it is to close</a:t>
-            </a:r>
-          </a:p>
-          <a:p>
-            <a:pPr>
-              <a:spcAft>
-                <a:spcPts val="300"/>
-              </a:spcAft>
-            </a:pPr>
-            <a:r>
-              <a:rPr sz="1550" b="0" i="0">
-                <a:solidFill>
-                  <a:srgbClr val="595959"/>
-                </a:solidFill>
-                <a:latin typeface="Arial"/>
-              </a:rPr>
-              <a:t>A per-layer maturity scorecard helps — how far each layer is from where it needs to be.</a:t>
-            </a:r>
-          </a:p>
-        </p:txBody>
-      </p:sp>
-      <p:sp>
-        <p:nvSpPr>
-          <p:cNvPr id="7" name="Rounded Rectangle 6"/>
-          <p:cNvSpPr/>
-          <p:nvPr/>
-        </p:nvSpPr>
-        <p:spPr>
-          <a:xfrm>
-            <a:off x="658368" y="4434840"/>
-            <a:ext cx="10881360" cy="1371600"/>
-          </a:xfrm>
-          <a:prstGeom prst="roundRect">
-            <a:avLst>
-              <a:gd name="adj" fmla="val 4500"/>
-            </a:avLst>
-          </a:prstGeom>
-          <a:solidFill>
-            <a:srgbClr val="E5F5FB"/>
-          </a:solidFill>
-          <a:ln>
-            <a:noFill/>
-          </a:ln>
-          <a:effectLst/>
-        </p:spPr>
-        <p:style>
-          <a:lnRef idx="1">
-            <a:schemeClr val="accent1"/>
-          </a:lnRef>
-          <a:fillRef idx="3">
-            <a:schemeClr val="accent1"/>
-          </a:fillRef>
-          <a:effectRef idx="2">
-            <a:schemeClr val="accent1"/>
-          </a:effectRef>
-          <a:fontRef idx="minor">
-            <a:schemeClr val="lt1"/>
-          </a:fontRef>
-        </p:style>
-        <p:txBody>
-          <a:bodyPr rtlCol="0" anchor="ctr"/>
-          <a:lstStyle/>
-          <a:p>
-            <a:pPr algn="ctr"/>
-          </a:p>
-        </p:txBody>
-      </p:sp>
-      <p:sp>
-        <p:nvSpPr>
-          <p:cNvPr id="8" name="TextBox 7"/>
-          <p:cNvSpPr txBox="1"/>
-          <p:nvPr/>
-        </p:nvSpPr>
-        <p:spPr>
-          <a:xfrm>
-            <a:off x="859536" y="4626864"/>
-            <a:ext cx="10479024" cy="1097280"/>
-          </a:xfrm>
-          <a:prstGeom prst="rect">
-            <a:avLst/>
-          </a:prstGeom>
-          <a:noFill/>
-        </p:spPr>
-        <p:txBody>
-          <a:bodyPr wrap="square">
-            <a:spAutoFit/>
-          </a:bodyPr>
-          <a:lstStyle/>
-          <a:p>
-            <a:pPr>
-              <a:spcAft>
-                <a:spcPts val="700"/>
-              </a:spcAft>
-            </a:pPr>
-            <a:r>
-              <a:rPr sz="2200" b="1" i="0">
-                <a:solidFill>
-                  <a:srgbClr val="006E96"/>
-                </a:solidFill>
-                <a:latin typeface="Arial"/>
-              </a:rPr>
-              <a:t>Priority = high impact, where movement is possible.</a:t>
-            </a:r>
-          </a:p>
-          <a:p>
-            <a:pPr>
-              <a:spcAft>
-                <a:spcPts val="700"/>
-              </a:spcAft>
-            </a:pPr>
-            <a:r>
-              <a:rPr sz="1500" b="0" i="0">
-                <a:solidFill>
-                  <a:srgbClr val="1A1A1A"/>
-                </a:solidFill>
-                <a:latin typeface="Arial"/>
-              </a:rPr>
-              <a:t>What the EA Board signs off is not “here is everything wrong”. It is “here are the right problems, in the right order, with the reasons”.</a:t>
-            </a:r>
-          </a:p>
-        </p:txBody>
-      </p:sp>
-      <p:sp>
-        <p:nvSpPr>
-          <p:cNvPr id="9" name="TextBox 8"/>
-          <p:cNvSpPr txBox="1"/>
-          <p:nvPr/>
-        </p:nvSpPr>
-        <p:spPr>
-          <a:xfrm>
-            <a:off x="457200" y="6473952"/>
-            <a:ext cx="7772400" cy="292608"/>
-          </a:xfrm>
-          <a:prstGeom prst="rect">
-            <a:avLst/>
-          </a:prstGeom>
-          <a:noFill/>
-        </p:spPr>
-        <p:txBody>
-          <a:bodyPr wrap="square">
-            <a:spAutoFit/>
-          </a:bodyPr>
-          <a:lstStyle/>
-          <a:p>
-            <a:r>
-              <a:rPr sz="900" b="0" i="0">
-                <a:solidFill>
-                  <a:srgbClr val="595959"/>
-                </a:solidFill>
-                <a:latin typeface="Arial"/>
-              </a:rPr>
-              <a:t>2.6 · Run a Phase 2 Assess</a:t>
-            </a:r>
-          </a:p>
-        </p:txBody>
-      </p:sp>
-    </p:spTree>
-  </p:cSld>
-  <p:clrMapOvr>
-    <a:masterClrMapping/>
-  </p:clrMapOvr>
-</p:sld>
-</file>
-
 <file path=ppt/slides/slide44.xml><?xml version="1.0" encoding="utf-8"?>
 <p:sld xmlns:a="http://schemas.openxmlformats.org/drawingml/2006/main" xmlns:p="http://schemas.openxmlformats.org/presentationml/2006/main" xmlns:r="http://schemas.openxmlformats.org/officeDocument/2006/relationships">
   <p:cSld>
@@ -14673,58 +11691,14 @@
       <p:grpSpPr/>
       <p:sp>
         <p:nvSpPr>
-          <p:cNvPr id="2" name="Rectangle 1"/>
-          <p:cNvSpPr/>
-          <p:nvPr/>
-        </p:nvSpPr>
-        <p:spPr>
-          <a:xfrm>
-            <a:off x="457200" y="384048"/>
-            <a:ext cx="45720" cy="256032"/>
-          </a:xfrm>
-          <a:prstGeom prst="rect">
-            <a:avLst/>
-          </a:prstGeom>
-          <a:solidFill>
-            <a:srgbClr val="009CD6"/>
-          </a:solidFill>
-          <a:ln>
-            <a:noFill/>
-          </a:ln>
-          <a:effectLst/>
-        </p:spPr>
-        <p:style>
-          <a:lnRef idx="1">
-            <a:schemeClr val="accent1"/>
-          </a:lnRef>
-          <a:fillRef idx="3">
-            <a:schemeClr val="accent1"/>
-          </a:fillRef>
-          <a:effectRef idx="2">
-            <a:schemeClr val="accent1"/>
-          </a:effectRef>
-          <a:fontRef idx="minor">
-            <a:schemeClr val="lt1"/>
-          </a:fontRef>
-        </p:style>
-        <p:txBody>
-          <a:bodyPr rtlCol="0" anchor="ctr"/>
-          <a:lstStyle/>
-          <a:p>
-            <a:pPr algn="ctr"/>
-          </a:p>
-        </p:txBody>
-      </p:sp>
-      <p:sp>
-        <p:nvSpPr>
-          <p:cNvPr id="3" name="TextBox 2"/>
+          <p:cNvPr id="2" name="TextBox 1"/>
           <p:cNvSpPr txBox="1"/>
           <p:nvPr/>
         </p:nvSpPr>
         <p:spPr>
           <a:xfrm>
-            <a:off x="621792" y="274320"/>
-            <a:ext cx="11247120" cy="914400"/>
+            <a:off x="822960" y="822960"/>
+            <a:ext cx="7315200" cy="457200"/>
           </a:xfrm>
           <a:prstGeom prst="rect">
             <a:avLst/>
@@ -14738,27 +11712,95 @@
           <a:lstStyle/>
           <a:p>
             <a:r>
-              <a:rPr sz="2800" b="1" i="0">
+              <a:rPr sz="1200" b="1" i="0">
+                <a:solidFill>
+                  <a:srgbClr val="595959"/>
+                </a:solidFill>
+                <a:latin typeface="Arial"/>
+              </a:rPr>
+              <a:t>KP1 · MODULE 2 · VIDEO 2.6</a:t>
+            </a:r>
+          </a:p>
+        </p:txBody>
+      </p:sp>
+      <p:sp>
+        <p:nvSpPr>
+          <p:cNvPr id="3" name="TextBox 2"/>
+          <p:cNvSpPr txBox="1"/>
+          <p:nvPr/>
+        </p:nvSpPr>
+        <p:spPr>
+          <a:xfrm>
+            <a:off x="822960" y="1828800"/>
+            <a:ext cx="2011680" cy="1097280"/>
+          </a:xfrm>
+          <a:prstGeom prst="rect">
+            <a:avLst/>
+          </a:prstGeom>
+          <a:noFill/>
+        </p:spPr>
+        <p:txBody>
+          <a:bodyPr wrap="square">
+            <a:spAutoFit/>
+          </a:bodyPr>
+          <a:lstStyle/>
+          <a:p>
+            <a:r>
+              <a:rPr sz="6000" b="1" i="0">
+                <a:solidFill>
+                  <a:srgbClr val="009CD6"/>
+                </a:solidFill>
+                <a:latin typeface="Arial"/>
+              </a:rPr>
+              <a:t>2.6</a:t>
+            </a:r>
+          </a:p>
+        </p:txBody>
+      </p:sp>
+      <p:sp>
+        <p:nvSpPr>
+          <p:cNvPr id="4" name="TextBox 3"/>
+          <p:cNvSpPr txBox="1"/>
+          <p:nvPr/>
+        </p:nvSpPr>
+        <p:spPr>
+          <a:xfrm>
+            <a:off x="822960" y="2880360"/>
+            <a:ext cx="9601200" cy="1371600"/>
+          </a:xfrm>
+          <a:prstGeom prst="rect">
+            <a:avLst/>
+          </a:prstGeom>
+          <a:noFill/>
+        </p:spPr>
+        <p:txBody>
+          <a:bodyPr wrap="square">
+            <a:spAutoFit/>
+          </a:bodyPr>
+          <a:lstStyle/>
+          <a:p>
+            <a:r>
+              <a:rPr sz="3400" b="1" i="0">
                 <a:solidFill>
                   <a:srgbClr val="1A1A1A"/>
                 </a:solidFill>
                 <a:latin typeface="Arial"/>
               </a:rPr>
-              <a:t>The sign-off has one quality test of its own — honesty</a:t>
-            </a:r>
-          </a:p>
-        </p:txBody>
-      </p:sp>
-      <p:sp>
-        <p:nvSpPr>
-          <p:cNvPr id="4" name="TextBox 3"/>
+              <a:t>Run a Phase 2 Assess</a:t>
+            </a:r>
+          </a:p>
+        </p:txBody>
+      </p:sp>
+      <p:sp>
+        <p:nvSpPr>
+          <p:cNvPr id="5" name="TextBox 4"/>
           <p:cNvSpPr txBox="1"/>
           <p:nvPr/>
         </p:nvSpPr>
         <p:spPr>
           <a:xfrm>
-            <a:off x="658368" y="1600200"/>
-            <a:ext cx="10881360" cy="2651760"/>
+            <a:off x="822960" y="4343400"/>
+            <a:ext cx="9875520" cy="1554480"/>
           </a:xfrm>
           <a:prstGeom prst="rect">
             <a:avLst/>
@@ -14771,138 +11813,48 @@
           </a:bodyPr>
           <a:lstStyle/>
           <a:p>
-            <a:pPr>
-              <a:spcAft>
-                <a:spcPts val="1200"/>
-              </a:spcAft>
-            </a:pPr>
-            <a:r>
-              <a:rPr sz="2100" b="0" i="0">
-                <a:solidFill>
-                  <a:srgbClr val="1A1A1A"/>
-                </a:solidFill>
-                <a:latin typeface="Arial"/>
-              </a:rPr>
-              <a:t>Assess ends when the senior decision-maker confirms the gap analysis reflects ground truth. Your job is to name the right problems in the right order — including the politically uncomfortable ones — in language the decision-maker can act on.</a:t>
-            </a:r>
-          </a:p>
-        </p:txBody>
-      </p:sp>
-      <p:sp>
-        <p:nvSpPr>
-          <p:cNvPr id="5" name="Rounded Rectangle 4"/>
-          <p:cNvSpPr/>
-          <p:nvPr/>
-        </p:nvSpPr>
-        <p:spPr>
-          <a:xfrm>
-            <a:off x="658368" y="4434840"/>
-            <a:ext cx="10881360" cy="1325880"/>
-          </a:xfrm>
-          <a:prstGeom prst="roundRect">
-            <a:avLst>
-              <a:gd name="adj" fmla="val 4500"/>
-            </a:avLst>
-          </a:prstGeom>
-          <a:solidFill>
-            <a:srgbClr val="009CD6"/>
-          </a:solidFill>
-          <a:ln>
-            <a:noFill/>
-          </a:ln>
-          <a:effectLst/>
-        </p:spPr>
-        <p:style>
-          <a:lnRef idx="1">
-            <a:schemeClr val="accent1"/>
-          </a:lnRef>
-          <a:fillRef idx="3">
-            <a:schemeClr val="accent1"/>
-          </a:fillRef>
-          <a:effectRef idx="2">
-            <a:schemeClr val="accent1"/>
-          </a:effectRef>
-          <a:fontRef idx="minor">
-            <a:schemeClr val="lt1"/>
-          </a:fontRef>
-        </p:style>
-        <p:txBody>
-          <a:bodyPr rtlCol="0" anchor="ctr"/>
-          <a:lstStyle/>
-          <a:p>
-            <a:pPr algn="ctr"/>
-          </a:p>
-        </p:txBody>
-      </p:sp>
-      <p:sp>
-        <p:nvSpPr>
-          <p:cNvPr id="6" name="TextBox 5"/>
-          <p:cNvSpPr txBox="1"/>
-          <p:nvPr/>
-        </p:nvSpPr>
-        <p:spPr>
-          <a:xfrm>
-            <a:off x="859536" y="4626864"/>
-            <a:ext cx="10479024" cy="1051560"/>
-          </a:xfrm>
-          <a:prstGeom prst="rect">
-            <a:avLst/>
-          </a:prstGeom>
-          <a:noFill/>
-        </p:spPr>
-        <p:txBody>
-          <a:bodyPr wrap="square">
-            <a:spAutoFit/>
-          </a:bodyPr>
-          <a:lstStyle/>
-          <a:p>
-            <a:pPr>
-              <a:spcAft>
-                <a:spcPts val="700"/>
-              </a:spcAft>
-            </a:pPr>
-            <a:r>
-              <a:rPr sz="2300" b="1" i="0">
-                <a:solidFill>
-                  <a:srgbClr val="FFFFFF"/>
-                </a:solidFill>
-                <a:latin typeface="Arial"/>
-              </a:rPr>
-              <a:t>An assessment that softens a problem because a powerful ministry owns one of the copies fails quietly, a year later.</a:t>
-            </a:r>
-          </a:p>
-        </p:txBody>
-      </p:sp>
-      <p:sp>
-        <p:nvSpPr>
-          <p:cNvPr id="7" name="TextBox 6"/>
-          <p:cNvSpPr txBox="1"/>
-          <p:nvPr/>
-        </p:nvSpPr>
-        <p:spPr>
-          <a:xfrm>
-            <a:off x="457200" y="6473952"/>
-            <a:ext cx="7772400" cy="292608"/>
-          </a:xfrm>
-          <a:prstGeom prst="rect">
-            <a:avLst/>
-          </a:prstGeom>
-          <a:noFill/>
-        </p:spPr>
-        <p:txBody>
-          <a:bodyPr wrap="square">
-            <a:spAutoFit/>
-          </a:bodyPr>
-          <a:lstStyle/>
-          <a:p>
-            <a:r>
-              <a:rPr sz="900" b="0" i="0">
+            <a:r>
+              <a:rPr sz="1700" b="0" i="1">
                 <a:solidFill>
                   <a:srgbClr val="595959"/>
                 </a:solidFill>
                 <a:latin typeface="Arial"/>
               </a:rPr>
-              <a:t>2.6 · Run a Phase 2 Assess</a:t>
+              <a:t>A good current-state picture is judged by a few quality tests per layer, not by its length. Learn the tests, learn the gaps you will always find, and you can run a Phase 2 Assess that names the right problems in the right order.</a:t>
+            </a:r>
+          </a:p>
+        </p:txBody>
+      </p:sp>
+      <p:sp>
+        <p:nvSpPr>
+          <p:cNvPr id="6" name="TextBox 5"/>
+          <p:cNvSpPr txBox="1"/>
+          <p:nvPr/>
+        </p:nvSpPr>
+        <p:spPr>
+          <a:xfrm>
+            <a:off x="822960" y="5989320"/>
+            <a:ext cx="7315200" cy="365760"/>
+          </a:xfrm>
+          <a:prstGeom prst="rect">
+            <a:avLst/>
+          </a:prstGeom>
+          <a:noFill/>
+        </p:spPr>
+        <p:txBody>
+          <a:bodyPr wrap="square">
+            <a:spAutoFit/>
+          </a:bodyPr>
+          <a:lstStyle/>
+          <a:p>
+            <a:r>
+              <a:rPr sz="1200" b="0" i="0">
+                <a:solidFill>
+                  <a:srgbClr val="595959"/>
+                </a:solidFill>
+                <a:latin typeface="Arial"/>
+              </a:rPr>
+              <a:t>~5 minutes · standalone video · voice-over on text slides</a:t>
             </a:r>
           </a:p>
         </p:txBody>
@@ -14933,6 +11885,2623 @@
         </p:nvSpPr>
         <p:spPr>
           <a:xfrm>
+            <a:off x="1005840" y="1325880"/>
+            <a:ext cx="5486400" cy="365760"/>
+          </a:xfrm>
+          <a:prstGeom prst="rect">
+            <a:avLst/>
+          </a:prstGeom>
+          <a:noFill/>
+        </p:spPr>
+        <p:txBody>
+          <a:bodyPr wrap="square">
+            <a:spAutoFit/>
+          </a:bodyPr>
+          <a:lstStyle/>
+          <a:p>
+            <a:r>
+              <a:rPr sz="1200" b="1" i="0">
+                <a:solidFill>
+                  <a:srgbClr val="006E96"/>
+                </a:solidFill>
+                <a:latin typeface="Arial"/>
+              </a:rPr>
+              <a:t>WHERE WE START</a:t>
+            </a:r>
+          </a:p>
+        </p:txBody>
+      </p:sp>
+      <p:sp>
+        <p:nvSpPr>
+          <p:cNvPr id="3" name="TextBox 2"/>
+          <p:cNvSpPr txBox="1"/>
+          <p:nvPr/>
+        </p:nvSpPr>
+        <p:spPr>
+          <a:xfrm>
+            <a:off x="1005840" y="1783080"/>
+            <a:ext cx="10149840" cy="1737360"/>
+          </a:xfrm>
+          <a:prstGeom prst="rect">
+            <a:avLst/>
+          </a:prstGeom>
+          <a:noFill/>
+        </p:spPr>
+        <p:txBody>
+          <a:bodyPr wrap="square">
+            <a:spAutoFit/>
+          </a:bodyPr>
+          <a:lstStyle/>
+          <a:p>
+            <a:r>
+              <a:rPr sz="3000" b="1" i="0">
+                <a:solidFill>
+                  <a:srgbClr val="1A1A1A"/>
+                </a:solidFill>
+                <a:latin typeface="Arial"/>
+              </a:rPr>
+              <a:t>Assess: a description good enough to decide from.</a:t>
+            </a:r>
+          </a:p>
+        </p:txBody>
+      </p:sp>
+      <p:sp>
+        <p:nvSpPr>
+          <p:cNvPr id="4" name="TextBox 3"/>
+          <p:cNvSpPr txBox="1"/>
+          <p:nvPr/>
+        </p:nvSpPr>
+        <p:spPr>
+          <a:xfrm>
+            <a:off x="1005840" y="3611880"/>
+            <a:ext cx="10149840" cy="2377440"/>
+          </a:xfrm>
+          <a:prstGeom prst="rect">
+            <a:avLst/>
+          </a:prstGeom>
+          <a:noFill/>
+        </p:spPr>
+        <p:txBody>
+          <a:bodyPr wrap="square">
+            <a:spAutoFit/>
+          </a:bodyPr>
+          <a:lstStyle/>
+          <a:p>
+            <a:pPr>
+              <a:spcAft>
+                <a:spcPts val="800"/>
+              </a:spcAft>
+            </a:pPr>
+            <a:r>
+              <a:rPr sz="1700" b="0" i="0">
+                <a:solidFill>
+                  <a:srgbClr val="595959"/>
+                </a:solidFill>
+                <a:latin typeface="Arial"/>
+              </a:rPr>
+              <a:t>The current-state picture and the gap analysis the roadmap is built on.</a:t>
+            </a:r>
+          </a:p>
+          <a:p>
+            <a:pPr>
+              <a:spcAft>
+                <a:spcPts val="800"/>
+              </a:spcAft>
+            </a:pPr>
+            <a:r>
+              <a:rPr sz="1700" b="0" i="0">
+                <a:solidFill>
+                  <a:srgbClr val="595959"/>
+                </a:solidFill>
+                <a:latin typeface="Arial"/>
+              </a:rPr>
+              <a:t>The quality tests, layer by layer.</a:t>
+            </a:r>
+          </a:p>
+          <a:p>
+            <a:pPr>
+              <a:spcAft>
+                <a:spcPts val="800"/>
+              </a:spcAft>
+            </a:pPr>
+            <a:r>
+              <a:rPr sz="1700" b="0" i="0">
+                <a:solidFill>
+                  <a:srgbClr val="595959"/>
+                </a:solidFill>
+                <a:latin typeface="Arial"/>
+              </a:rPr>
+              <a:t>The gaps you will almost always find.</a:t>
+            </a:r>
+          </a:p>
+        </p:txBody>
+      </p:sp>
+      <p:sp>
+        <p:nvSpPr>
+          <p:cNvPr id="5" name="TextBox 4"/>
+          <p:cNvSpPr txBox="1"/>
+          <p:nvPr/>
+        </p:nvSpPr>
+        <p:spPr>
+          <a:xfrm>
+            <a:off x="457200" y="6473952"/>
+            <a:ext cx="7772400" cy="292608"/>
+          </a:xfrm>
+          <a:prstGeom prst="rect">
+            <a:avLst/>
+          </a:prstGeom>
+          <a:noFill/>
+        </p:spPr>
+        <p:txBody>
+          <a:bodyPr wrap="square">
+            <a:spAutoFit/>
+          </a:bodyPr>
+          <a:lstStyle/>
+          <a:p>
+            <a:r>
+              <a:rPr sz="900" b="0" i="0">
+                <a:solidFill>
+                  <a:srgbClr val="595959"/>
+                </a:solidFill>
+                <a:latin typeface="Arial"/>
+              </a:rPr>
+              <a:t>2.6 · Run a Phase 2 Assess</a:t>
+            </a:r>
+          </a:p>
+        </p:txBody>
+      </p:sp>
+      <p:sp>
+        <p:nvSpPr>
+          <p:cNvPr id="6" name="TextBox 5"/>
+          <p:cNvSpPr txBox="1"/>
+          <p:nvPr/>
+        </p:nvSpPr>
+        <p:spPr>
+          <a:xfrm>
+            <a:off x="10058400" y="6473952"/>
+            <a:ext cx="1673352" cy="292608"/>
+          </a:xfrm>
+          <a:prstGeom prst="rect">
+            <a:avLst/>
+          </a:prstGeom>
+          <a:noFill/>
+        </p:spPr>
+        <p:txBody>
+          <a:bodyPr wrap="square">
+            <a:spAutoFit/>
+          </a:bodyPr>
+          <a:lstStyle/>
+          <a:p>
+            <a:pPr algn="r"/>
+            <a:r>
+              <a:rPr sz="900" b="0" i="0">
+                <a:solidFill>
+                  <a:srgbClr val="595959"/>
+                </a:solidFill>
+                <a:latin typeface="Arial"/>
+              </a:rPr>
+              <a:t>www.itu.int</a:t>
+            </a:r>
+          </a:p>
+        </p:txBody>
+      </p:sp>
+    </p:spTree>
+  </p:cSld>
+  <p:clrMapOvr>
+    <a:masterClrMapping/>
+  </p:clrMapOvr>
+</p:sld>
+</file>
+
+<file path=ppt/slides/slide46.xml><?xml version="1.0" encoding="utf-8"?>
+<p:sld xmlns:a="http://schemas.openxmlformats.org/drawingml/2006/main" xmlns:p="http://schemas.openxmlformats.org/presentationml/2006/main" xmlns:r="http://schemas.openxmlformats.org/officeDocument/2006/relationships">
+  <p:cSld>
+    <p:spTree>
+      <p:nvGrpSpPr>
+        <p:cNvPr id="1" name=""/>
+        <p:cNvGrpSpPr/>
+        <p:nvPr/>
+      </p:nvGrpSpPr>
+      <p:grpSpPr/>
+      <p:sp>
+        <p:nvSpPr>
+          <p:cNvPr id="2" name="Rectangle 1"/>
+          <p:cNvSpPr/>
+          <p:nvPr/>
+        </p:nvSpPr>
+        <p:spPr>
+          <a:xfrm>
+            <a:off x="457200" y="384048"/>
+            <a:ext cx="45720" cy="256032"/>
+          </a:xfrm>
+          <a:prstGeom prst="rect">
+            <a:avLst/>
+          </a:prstGeom>
+          <a:solidFill>
+            <a:srgbClr val="009CD6"/>
+          </a:solidFill>
+          <a:ln>
+            <a:noFill/>
+          </a:ln>
+          <a:effectLst/>
+        </p:spPr>
+        <p:style>
+          <a:lnRef idx="1">
+            <a:schemeClr val="accent1"/>
+          </a:lnRef>
+          <a:fillRef idx="3">
+            <a:schemeClr val="accent1"/>
+          </a:fillRef>
+          <a:effectRef idx="2">
+            <a:schemeClr val="accent1"/>
+          </a:effectRef>
+          <a:fontRef idx="minor">
+            <a:schemeClr val="lt1"/>
+          </a:fontRef>
+        </p:style>
+        <p:txBody>
+          <a:bodyPr rtlCol="0" anchor="ctr"/>
+          <a:lstStyle/>
+          <a:p>
+            <a:pPr algn="ctr"/>
+          </a:p>
+        </p:txBody>
+      </p:sp>
+      <p:sp>
+        <p:nvSpPr>
+          <p:cNvPr id="3" name="TextBox 2"/>
+          <p:cNvSpPr txBox="1"/>
+          <p:nvPr/>
+        </p:nvSpPr>
+        <p:spPr>
+          <a:xfrm>
+            <a:off x="621792" y="274320"/>
+            <a:ext cx="11247120" cy="914400"/>
+          </a:xfrm>
+          <a:prstGeom prst="rect">
+            <a:avLst/>
+          </a:prstGeom>
+          <a:noFill/>
+        </p:spPr>
+        <p:txBody>
+          <a:bodyPr wrap="square">
+            <a:spAutoFit/>
+          </a:bodyPr>
+          <a:lstStyle/>
+          <a:p>
+            <a:r>
+              <a:rPr sz="2800" b="1" i="0">
+                <a:solidFill>
+                  <a:srgbClr val="1A1A1A"/>
+                </a:solidFill>
+                <a:latin typeface="Arial"/>
+              </a:rPr>
+              <a:t>Three tests apply to every layer</a:t>
+            </a:r>
+          </a:p>
+        </p:txBody>
+      </p:sp>
+      <p:sp>
+        <p:nvSpPr>
+          <p:cNvPr id="4" name="Oval 3"/>
+          <p:cNvSpPr/>
+          <p:nvPr/>
+        </p:nvSpPr>
+        <p:spPr>
+          <a:xfrm>
+            <a:off x="621792" y="1463040"/>
+            <a:ext cx="310896" cy="310896"/>
+          </a:xfrm>
+          <a:prstGeom prst="ellipse">
+            <a:avLst/>
+          </a:prstGeom>
+          <a:solidFill>
+            <a:srgbClr val="009CD6"/>
+          </a:solidFill>
+          <a:ln>
+            <a:noFill/>
+          </a:ln>
+          <a:effectLst/>
+        </p:spPr>
+        <p:style>
+          <a:lnRef idx="1">
+            <a:schemeClr val="accent1"/>
+          </a:lnRef>
+          <a:fillRef idx="3">
+            <a:schemeClr val="accent1"/>
+          </a:fillRef>
+          <a:effectRef idx="2">
+            <a:schemeClr val="accent1"/>
+          </a:effectRef>
+          <a:fontRef idx="minor">
+            <a:schemeClr val="lt1"/>
+          </a:fontRef>
+        </p:style>
+        <p:txBody>
+          <a:bodyPr rtlCol="0" anchor="ctr" lIns="0" rIns="0" tIns="0" bIns="0" wrap="square"/>
+          <a:lstStyle/>
+          <a:p>
+            <a:pPr algn="ctr"/>
+            <a:r>
+              <a:rPr sz="1300" b="1" i="0">
+                <a:solidFill>
+                  <a:srgbClr val="FFFFFF"/>
+                </a:solidFill>
+                <a:latin typeface="Arial"/>
+              </a:rPr>
+              <a:t>1</a:t>
+            </a:r>
+          </a:p>
+        </p:txBody>
+      </p:sp>
+      <p:sp>
+        <p:nvSpPr>
+          <p:cNvPr id="5" name="TextBox 4"/>
+          <p:cNvSpPr txBox="1"/>
+          <p:nvPr/>
+        </p:nvSpPr>
+        <p:spPr>
+          <a:xfrm>
+            <a:off x="1115568" y="1417320"/>
+            <a:ext cx="10527487" cy="1432560"/>
+          </a:xfrm>
+          <a:prstGeom prst="rect">
+            <a:avLst/>
+          </a:prstGeom>
+          <a:noFill/>
+        </p:spPr>
+        <p:txBody>
+          <a:bodyPr wrap="square">
+            <a:spAutoFit/>
+          </a:bodyPr>
+          <a:lstStyle/>
+          <a:p>
+            <a:pPr>
+              <a:spcAft>
+                <a:spcPts val="300"/>
+              </a:spcAft>
+            </a:pPr>
+            <a:r>
+              <a:rPr sz="1900" b="1" i="0">
+                <a:solidFill>
+                  <a:srgbClr val="1A1A1A"/>
+                </a:solidFill>
+                <a:latin typeface="Arial"/>
+              </a:rPr>
+              <a:t>Complete enough to decide — not exhaustive</a:t>
+            </a:r>
+          </a:p>
+          <a:p>
+            <a:pPr>
+              <a:spcAft>
+                <a:spcPts val="300"/>
+              </a:spcAft>
+            </a:pPr>
+            <a:r>
+              <a:rPr sz="1550" b="0" i="0">
+                <a:solidFill>
+                  <a:srgbClr val="595959"/>
+                </a:solidFill>
+                <a:latin typeface="Arial"/>
+              </a:rPr>
+              <a:t>A description covering the capabilities and systems that matter, with the rest noted, beats a five-hundred-page audit no one reads.</a:t>
+            </a:r>
+          </a:p>
+        </p:txBody>
+      </p:sp>
+      <p:sp>
+        <p:nvSpPr>
+          <p:cNvPr id="6" name="Rectangle 5"/>
+          <p:cNvSpPr/>
+          <p:nvPr/>
+        </p:nvSpPr>
+        <p:spPr>
+          <a:xfrm>
+            <a:off x="621792" y="2854452"/>
+            <a:ext cx="10881360" cy="12700"/>
+          </a:xfrm>
+          <a:prstGeom prst="rect">
+            <a:avLst/>
+          </a:prstGeom>
+          <a:solidFill>
+            <a:srgbClr val="DDECF4"/>
+          </a:solidFill>
+          <a:ln>
+            <a:noFill/>
+          </a:ln>
+          <a:effectLst/>
+        </p:spPr>
+        <p:style>
+          <a:lnRef idx="1">
+            <a:schemeClr val="accent1"/>
+          </a:lnRef>
+          <a:fillRef idx="3">
+            <a:schemeClr val="accent1"/>
+          </a:fillRef>
+          <a:effectRef idx="2">
+            <a:schemeClr val="accent1"/>
+          </a:effectRef>
+          <a:fontRef idx="minor">
+            <a:schemeClr val="lt1"/>
+          </a:fontRef>
+        </p:style>
+        <p:txBody>
+          <a:bodyPr rtlCol="0" anchor="ctr"/>
+          <a:lstStyle/>
+          <a:p>
+            <a:pPr algn="ctr"/>
+          </a:p>
+        </p:txBody>
+      </p:sp>
+      <p:sp>
+        <p:nvSpPr>
+          <p:cNvPr id="7" name="Oval 6"/>
+          <p:cNvSpPr/>
+          <p:nvPr/>
+        </p:nvSpPr>
+        <p:spPr>
+          <a:xfrm>
+            <a:off x="621792" y="2941320"/>
+            <a:ext cx="310896" cy="310896"/>
+          </a:xfrm>
+          <a:prstGeom prst="ellipse">
+            <a:avLst/>
+          </a:prstGeom>
+          <a:solidFill>
+            <a:srgbClr val="009CD6"/>
+          </a:solidFill>
+          <a:ln>
+            <a:noFill/>
+          </a:ln>
+          <a:effectLst/>
+        </p:spPr>
+        <p:style>
+          <a:lnRef idx="1">
+            <a:schemeClr val="accent1"/>
+          </a:lnRef>
+          <a:fillRef idx="3">
+            <a:schemeClr val="accent1"/>
+          </a:fillRef>
+          <a:effectRef idx="2">
+            <a:schemeClr val="accent1"/>
+          </a:effectRef>
+          <a:fontRef idx="minor">
+            <a:schemeClr val="lt1"/>
+          </a:fontRef>
+        </p:style>
+        <p:txBody>
+          <a:bodyPr rtlCol="0" anchor="ctr" lIns="0" rIns="0" tIns="0" bIns="0" wrap="square"/>
+          <a:lstStyle/>
+          <a:p>
+            <a:pPr algn="ctr"/>
+            <a:r>
+              <a:rPr sz="1300" b="1" i="0">
+                <a:solidFill>
+                  <a:srgbClr val="FFFFFF"/>
+                </a:solidFill>
+                <a:latin typeface="Arial"/>
+              </a:rPr>
+              <a:t>2</a:t>
+            </a:r>
+          </a:p>
+        </p:txBody>
+      </p:sp>
+      <p:sp>
+        <p:nvSpPr>
+          <p:cNvPr id="8" name="TextBox 7"/>
+          <p:cNvSpPr txBox="1"/>
+          <p:nvPr/>
+        </p:nvSpPr>
+        <p:spPr>
+          <a:xfrm>
+            <a:off x="1115568" y="2895600"/>
+            <a:ext cx="10527487" cy="1432560"/>
+          </a:xfrm>
+          <a:prstGeom prst="rect">
+            <a:avLst/>
+          </a:prstGeom>
+          <a:noFill/>
+        </p:spPr>
+        <p:txBody>
+          <a:bodyPr wrap="square">
+            <a:spAutoFit/>
+          </a:bodyPr>
+          <a:lstStyle/>
+          <a:p>
+            <a:pPr>
+              <a:spcAft>
+                <a:spcPts val="300"/>
+              </a:spcAft>
+            </a:pPr>
+            <a:r>
+              <a:rPr sz="1900" b="1" i="0">
+                <a:solidFill>
+                  <a:srgbClr val="1A1A1A"/>
+                </a:solidFill>
+                <a:latin typeface="Arial"/>
+              </a:rPr>
+              <a:t>Owned — every element has a named owner</a:t>
+            </a:r>
+          </a:p>
+          <a:p>
+            <a:pPr>
+              <a:spcAft>
+                <a:spcPts val="300"/>
+              </a:spcAft>
+            </a:pPr>
+            <a:r>
+              <a:rPr sz="1550" b="0" i="0">
+                <a:solidFill>
+                  <a:srgbClr val="595959"/>
+                </a:solidFill>
+                <a:latin typeface="Arial"/>
+              </a:rPr>
+              <a:t>An element with no owner is a finding, not a detail.</a:t>
+            </a:r>
+          </a:p>
+        </p:txBody>
+      </p:sp>
+      <p:sp>
+        <p:nvSpPr>
+          <p:cNvPr id="9" name="Rectangle 8"/>
+          <p:cNvSpPr/>
+          <p:nvPr/>
+        </p:nvSpPr>
+        <p:spPr>
+          <a:xfrm>
+            <a:off x="621792" y="4332732"/>
+            <a:ext cx="10881360" cy="12700"/>
+          </a:xfrm>
+          <a:prstGeom prst="rect">
+            <a:avLst/>
+          </a:prstGeom>
+          <a:solidFill>
+            <a:srgbClr val="DDECF4"/>
+          </a:solidFill>
+          <a:ln>
+            <a:noFill/>
+          </a:ln>
+          <a:effectLst/>
+        </p:spPr>
+        <p:style>
+          <a:lnRef idx="1">
+            <a:schemeClr val="accent1"/>
+          </a:lnRef>
+          <a:fillRef idx="3">
+            <a:schemeClr val="accent1"/>
+          </a:fillRef>
+          <a:effectRef idx="2">
+            <a:schemeClr val="accent1"/>
+          </a:effectRef>
+          <a:fontRef idx="minor">
+            <a:schemeClr val="lt1"/>
+          </a:fontRef>
+        </p:style>
+        <p:txBody>
+          <a:bodyPr rtlCol="0" anchor="ctr"/>
+          <a:lstStyle/>
+          <a:p>
+            <a:pPr algn="ctr"/>
+          </a:p>
+        </p:txBody>
+      </p:sp>
+      <p:sp>
+        <p:nvSpPr>
+          <p:cNvPr id="10" name="Oval 9"/>
+          <p:cNvSpPr/>
+          <p:nvPr/>
+        </p:nvSpPr>
+        <p:spPr>
+          <a:xfrm>
+            <a:off x="621792" y="4419600"/>
+            <a:ext cx="310896" cy="310896"/>
+          </a:xfrm>
+          <a:prstGeom prst="ellipse">
+            <a:avLst/>
+          </a:prstGeom>
+          <a:solidFill>
+            <a:srgbClr val="009CD6"/>
+          </a:solidFill>
+          <a:ln>
+            <a:noFill/>
+          </a:ln>
+          <a:effectLst/>
+        </p:spPr>
+        <p:style>
+          <a:lnRef idx="1">
+            <a:schemeClr val="accent1"/>
+          </a:lnRef>
+          <a:fillRef idx="3">
+            <a:schemeClr val="accent1"/>
+          </a:fillRef>
+          <a:effectRef idx="2">
+            <a:schemeClr val="accent1"/>
+          </a:effectRef>
+          <a:fontRef idx="minor">
+            <a:schemeClr val="lt1"/>
+          </a:fontRef>
+        </p:style>
+        <p:txBody>
+          <a:bodyPr rtlCol="0" anchor="ctr" lIns="0" rIns="0" tIns="0" bIns="0" wrap="square"/>
+          <a:lstStyle/>
+          <a:p>
+            <a:pPr algn="ctr"/>
+            <a:r>
+              <a:rPr sz="1300" b="1" i="0">
+                <a:solidFill>
+                  <a:srgbClr val="FFFFFF"/>
+                </a:solidFill>
+                <a:latin typeface="Arial"/>
+              </a:rPr>
+              <a:t>3</a:t>
+            </a:r>
+          </a:p>
+        </p:txBody>
+      </p:sp>
+      <p:sp>
+        <p:nvSpPr>
+          <p:cNvPr id="11" name="TextBox 10"/>
+          <p:cNvSpPr txBox="1"/>
+          <p:nvPr/>
+        </p:nvSpPr>
+        <p:spPr>
+          <a:xfrm>
+            <a:off x="1115568" y="4373880"/>
+            <a:ext cx="10527487" cy="1432560"/>
+          </a:xfrm>
+          <a:prstGeom prst="rect">
+            <a:avLst/>
+          </a:prstGeom>
+          <a:noFill/>
+        </p:spPr>
+        <p:txBody>
+          <a:bodyPr wrap="square">
+            <a:spAutoFit/>
+          </a:bodyPr>
+          <a:lstStyle/>
+          <a:p>
+            <a:pPr>
+              <a:spcAft>
+                <a:spcPts val="300"/>
+              </a:spcAft>
+            </a:pPr>
+            <a:r>
+              <a:rPr sz="1900" b="1" i="0">
+                <a:solidFill>
+                  <a:srgbClr val="1A1A1A"/>
+                </a:solidFill>
+                <a:latin typeface="Arial"/>
+              </a:rPr>
+              <a:t>Traceable — every element connects up and down</a:t>
+            </a:r>
+          </a:p>
+          <a:p>
+            <a:pPr>
+              <a:spcAft>
+                <a:spcPts val="300"/>
+              </a:spcAft>
+            </a:pPr>
+            <a:r>
+              <a:rPr sz="1550" b="0" i="0">
+                <a:solidFill>
+                  <a:srgbClr val="595959"/>
+                </a:solidFill>
+                <a:latin typeface="Arial"/>
+              </a:rPr>
+              <a:t>A service that traces to no capability, an application that traces to no data, a capability no application supports: each broken link is a gap.</a:t>
+            </a:r>
+          </a:p>
+        </p:txBody>
+      </p:sp>
+      <p:sp>
+        <p:nvSpPr>
+          <p:cNvPr id="12" name="TextBox 11"/>
+          <p:cNvSpPr txBox="1"/>
+          <p:nvPr/>
+        </p:nvSpPr>
+        <p:spPr>
+          <a:xfrm>
+            <a:off x="658368" y="5943600"/>
+            <a:ext cx="10881360" cy="365760"/>
+          </a:xfrm>
+          <a:prstGeom prst="rect">
+            <a:avLst/>
+          </a:prstGeom>
+          <a:noFill/>
+        </p:spPr>
+        <p:txBody>
+          <a:bodyPr wrap="square">
+            <a:spAutoFit/>
+          </a:bodyPr>
+          <a:lstStyle/>
+          <a:p>
+            <a:r>
+              <a:rPr sz="1450" b="0" i="0">
+                <a:solidFill>
+                  <a:srgbClr val="595959"/>
+                </a:solidFill>
+                <a:latin typeface="Arial"/>
+              </a:rPr>
+              <a:t>If your picture fails these three tests, more pages will not fix it.</a:t>
+            </a:r>
+          </a:p>
+        </p:txBody>
+      </p:sp>
+      <p:sp>
+        <p:nvSpPr>
+          <p:cNvPr id="13" name="TextBox 12"/>
+          <p:cNvSpPr txBox="1"/>
+          <p:nvPr/>
+        </p:nvSpPr>
+        <p:spPr>
+          <a:xfrm>
+            <a:off x="457200" y="6473952"/>
+            <a:ext cx="7772400" cy="292608"/>
+          </a:xfrm>
+          <a:prstGeom prst="rect">
+            <a:avLst/>
+          </a:prstGeom>
+          <a:noFill/>
+        </p:spPr>
+        <p:txBody>
+          <a:bodyPr wrap="square">
+            <a:spAutoFit/>
+          </a:bodyPr>
+          <a:lstStyle/>
+          <a:p>
+            <a:r>
+              <a:rPr sz="900" b="0" i="0">
+                <a:solidFill>
+                  <a:srgbClr val="595959"/>
+                </a:solidFill>
+                <a:latin typeface="Arial"/>
+              </a:rPr>
+              <a:t>2.6 · Run a Phase 2 Assess</a:t>
+            </a:r>
+          </a:p>
+        </p:txBody>
+      </p:sp>
+    </p:spTree>
+  </p:cSld>
+  <p:clrMapOvr>
+    <a:masterClrMapping/>
+  </p:clrMapOvr>
+</p:sld>
+</file>
+
+<file path=ppt/slides/slide47.xml><?xml version="1.0" encoding="utf-8"?>
+<p:sld xmlns:a="http://schemas.openxmlformats.org/drawingml/2006/main" xmlns:p="http://schemas.openxmlformats.org/presentationml/2006/main" xmlns:r="http://schemas.openxmlformats.org/officeDocument/2006/relationships">
+  <p:cSld>
+    <p:spTree>
+      <p:nvGrpSpPr>
+        <p:cNvPr id="1" name=""/>
+        <p:cNvGrpSpPr/>
+        <p:nvPr/>
+      </p:nvGrpSpPr>
+      <p:grpSpPr/>
+      <p:sp>
+        <p:nvSpPr>
+          <p:cNvPr id="2" name="Rectangle 1"/>
+          <p:cNvSpPr/>
+          <p:nvPr/>
+        </p:nvSpPr>
+        <p:spPr>
+          <a:xfrm>
+            <a:off x="457200" y="384048"/>
+            <a:ext cx="45720" cy="256032"/>
+          </a:xfrm>
+          <a:prstGeom prst="rect">
+            <a:avLst/>
+          </a:prstGeom>
+          <a:solidFill>
+            <a:srgbClr val="009CD6"/>
+          </a:solidFill>
+          <a:ln>
+            <a:noFill/>
+          </a:ln>
+          <a:effectLst/>
+        </p:spPr>
+        <p:style>
+          <a:lnRef idx="1">
+            <a:schemeClr val="accent1"/>
+          </a:lnRef>
+          <a:fillRef idx="3">
+            <a:schemeClr val="accent1"/>
+          </a:fillRef>
+          <a:effectRef idx="2">
+            <a:schemeClr val="accent1"/>
+          </a:effectRef>
+          <a:fontRef idx="minor">
+            <a:schemeClr val="lt1"/>
+          </a:fontRef>
+        </p:style>
+        <p:txBody>
+          <a:bodyPr rtlCol="0" anchor="ctr"/>
+          <a:lstStyle/>
+          <a:p>
+            <a:pPr algn="ctr"/>
+          </a:p>
+        </p:txBody>
+      </p:sp>
+      <p:sp>
+        <p:nvSpPr>
+          <p:cNvPr id="3" name="TextBox 2"/>
+          <p:cNvSpPr txBox="1"/>
+          <p:nvPr/>
+        </p:nvSpPr>
+        <p:spPr>
+          <a:xfrm>
+            <a:off x="621792" y="274320"/>
+            <a:ext cx="11247120" cy="914400"/>
+          </a:xfrm>
+          <a:prstGeom prst="rect">
+            <a:avLst/>
+          </a:prstGeom>
+          <a:noFill/>
+        </p:spPr>
+        <p:txBody>
+          <a:bodyPr wrap="square">
+            <a:spAutoFit/>
+          </a:bodyPr>
+          <a:lstStyle/>
+          <a:p>
+            <a:r>
+              <a:rPr sz="2800" b="1" i="0">
+                <a:solidFill>
+                  <a:srgbClr val="1A1A1A"/>
+                </a:solidFill>
+                <a:latin typeface="Arial"/>
+              </a:rPr>
+              <a:t>Then hold each layer to its own test</a:t>
+            </a:r>
+          </a:p>
+        </p:txBody>
+      </p:sp>
+      <p:sp>
+        <p:nvSpPr>
+          <p:cNvPr id="4" name="TextBox 3"/>
+          <p:cNvSpPr txBox="1"/>
+          <p:nvPr/>
+        </p:nvSpPr>
+        <p:spPr>
+          <a:xfrm>
+            <a:off x="658368" y="1417320"/>
+            <a:ext cx="10984687" cy="1165860"/>
+          </a:xfrm>
+          <a:prstGeom prst="rect">
+            <a:avLst/>
+          </a:prstGeom>
+          <a:noFill/>
+        </p:spPr>
+        <p:txBody>
+          <a:bodyPr wrap="square">
+            <a:spAutoFit/>
+          </a:bodyPr>
+          <a:lstStyle/>
+          <a:p>
+            <a:pPr>
+              <a:spcAft>
+                <a:spcPts val="300"/>
+              </a:spcAft>
+            </a:pPr>
+            <a:r>
+              <a:rPr sz="1900" b="1" i="0">
+                <a:solidFill>
+                  <a:srgbClr val="1A1A1A"/>
+                </a:solidFill>
+                <a:latin typeface="Arial"/>
+              </a:rPr>
+              <a:t>Business</a:t>
+            </a:r>
+          </a:p>
+          <a:p>
+            <a:pPr>
+              <a:spcAft>
+                <a:spcPts val="300"/>
+              </a:spcAft>
+            </a:pPr>
+            <a:r>
+              <a:rPr sz="1550" b="0" i="0">
+                <a:solidFill>
+                  <a:srgbClr val="595959"/>
+                </a:solidFill>
+                <a:latin typeface="Arial"/>
+              </a:rPr>
+              <a:t>Capabilities, not org boxes.</a:t>
+            </a:r>
+          </a:p>
+        </p:txBody>
+      </p:sp>
+      <p:sp>
+        <p:nvSpPr>
+          <p:cNvPr id="5" name="Rectangle 4"/>
+          <p:cNvSpPr/>
+          <p:nvPr/>
+        </p:nvSpPr>
+        <p:spPr>
+          <a:xfrm>
+            <a:off x="621792" y="2587752"/>
+            <a:ext cx="10881360" cy="12700"/>
+          </a:xfrm>
+          <a:prstGeom prst="rect">
+            <a:avLst/>
+          </a:prstGeom>
+          <a:solidFill>
+            <a:srgbClr val="DDECF4"/>
+          </a:solidFill>
+          <a:ln>
+            <a:noFill/>
+          </a:ln>
+          <a:effectLst/>
+        </p:spPr>
+        <p:style>
+          <a:lnRef idx="1">
+            <a:schemeClr val="accent1"/>
+          </a:lnRef>
+          <a:fillRef idx="3">
+            <a:schemeClr val="accent1"/>
+          </a:fillRef>
+          <a:effectRef idx="2">
+            <a:schemeClr val="accent1"/>
+          </a:effectRef>
+          <a:fontRef idx="minor">
+            <a:schemeClr val="lt1"/>
+          </a:fontRef>
+        </p:style>
+        <p:txBody>
+          <a:bodyPr rtlCol="0" anchor="ctr"/>
+          <a:lstStyle/>
+          <a:p>
+            <a:pPr algn="ctr"/>
+          </a:p>
+        </p:txBody>
+      </p:sp>
+      <p:sp>
+        <p:nvSpPr>
+          <p:cNvPr id="6" name="TextBox 5"/>
+          <p:cNvSpPr txBox="1"/>
+          <p:nvPr/>
+        </p:nvSpPr>
+        <p:spPr>
+          <a:xfrm>
+            <a:off x="658368" y="2628900"/>
+            <a:ext cx="10984687" cy="1165860"/>
+          </a:xfrm>
+          <a:prstGeom prst="rect">
+            <a:avLst/>
+          </a:prstGeom>
+          <a:noFill/>
+        </p:spPr>
+        <p:txBody>
+          <a:bodyPr wrap="square">
+            <a:spAutoFit/>
+          </a:bodyPr>
+          <a:lstStyle/>
+          <a:p>
+            <a:pPr>
+              <a:spcAft>
+                <a:spcPts val="300"/>
+              </a:spcAft>
+            </a:pPr>
+            <a:r>
+              <a:rPr sz="1900" b="1" i="0">
+                <a:solidFill>
+                  <a:srgbClr val="1A1A1A"/>
+                </a:solidFill>
+                <a:latin typeface="Arial"/>
+              </a:rPr>
+              <a:t>Data</a:t>
+            </a:r>
+          </a:p>
+          <a:p>
+            <a:pPr>
+              <a:spcAft>
+                <a:spcPts val="300"/>
+              </a:spcAft>
+            </a:pPr>
+            <a:r>
+              <a:rPr sz="1550" b="0" i="0">
+                <a:solidFill>
+                  <a:srgbClr val="595959"/>
+                </a:solidFill>
+                <a:latin typeface="Arial"/>
+              </a:rPr>
+              <a:t>One owner, one authoritative copy per domain.</a:t>
+            </a:r>
+          </a:p>
+        </p:txBody>
+      </p:sp>
+      <p:sp>
+        <p:nvSpPr>
+          <p:cNvPr id="7" name="Rectangle 6"/>
+          <p:cNvSpPr/>
+          <p:nvPr/>
+        </p:nvSpPr>
+        <p:spPr>
+          <a:xfrm>
+            <a:off x="621792" y="3799332"/>
+            <a:ext cx="10881360" cy="12700"/>
+          </a:xfrm>
+          <a:prstGeom prst="rect">
+            <a:avLst/>
+          </a:prstGeom>
+          <a:solidFill>
+            <a:srgbClr val="DDECF4"/>
+          </a:solidFill>
+          <a:ln>
+            <a:noFill/>
+          </a:ln>
+          <a:effectLst/>
+        </p:spPr>
+        <p:style>
+          <a:lnRef idx="1">
+            <a:schemeClr val="accent1"/>
+          </a:lnRef>
+          <a:fillRef idx="3">
+            <a:schemeClr val="accent1"/>
+          </a:fillRef>
+          <a:effectRef idx="2">
+            <a:schemeClr val="accent1"/>
+          </a:effectRef>
+          <a:fontRef idx="minor">
+            <a:schemeClr val="lt1"/>
+          </a:fontRef>
+        </p:style>
+        <p:txBody>
+          <a:bodyPr rtlCol="0" anchor="ctr"/>
+          <a:lstStyle/>
+          <a:p>
+            <a:pPr algn="ctr"/>
+          </a:p>
+        </p:txBody>
+      </p:sp>
+      <p:sp>
+        <p:nvSpPr>
+          <p:cNvPr id="8" name="TextBox 7"/>
+          <p:cNvSpPr txBox="1"/>
+          <p:nvPr/>
+        </p:nvSpPr>
+        <p:spPr>
+          <a:xfrm>
+            <a:off x="658368" y="3840480"/>
+            <a:ext cx="10984687" cy="1165860"/>
+          </a:xfrm>
+          <a:prstGeom prst="rect">
+            <a:avLst/>
+          </a:prstGeom>
+          <a:noFill/>
+        </p:spPr>
+        <p:txBody>
+          <a:bodyPr wrap="square">
+            <a:spAutoFit/>
+          </a:bodyPr>
+          <a:lstStyle/>
+          <a:p>
+            <a:pPr>
+              <a:spcAft>
+                <a:spcPts val="300"/>
+              </a:spcAft>
+            </a:pPr>
+            <a:r>
+              <a:rPr sz="1900" b="1" i="0">
+                <a:solidFill>
+                  <a:srgbClr val="1A1A1A"/>
+                </a:solidFill>
+                <a:latin typeface="Arial"/>
+              </a:rPr>
+              <a:t>Application</a:t>
+            </a:r>
+          </a:p>
+          <a:p>
+            <a:pPr>
+              <a:spcAft>
+                <a:spcPts val="300"/>
+              </a:spcAft>
+            </a:pPr>
+            <a:r>
+              <a:rPr sz="1550" b="0" i="0">
+                <a:solidFill>
+                  <a:srgbClr val="595959"/>
+                </a:solidFill>
+                <a:latin typeface="Arial"/>
+              </a:rPr>
+              <a:t>Every system maps to a capability and a data domain.</a:t>
+            </a:r>
+          </a:p>
+        </p:txBody>
+      </p:sp>
+      <p:sp>
+        <p:nvSpPr>
+          <p:cNvPr id="9" name="Rectangle 8"/>
+          <p:cNvSpPr/>
+          <p:nvPr/>
+        </p:nvSpPr>
+        <p:spPr>
+          <a:xfrm>
+            <a:off x="621792" y="5010912"/>
+            <a:ext cx="10881360" cy="12700"/>
+          </a:xfrm>
+          <a:prstGeom prst="rect">
+            <a:avLst/>
+          </a:prstGeom>
+          <a:solidFill>
+            <a:srgbClr val="DDECF4"/>
+          </a:solidFill>
+          <a:ln>
+            <a:noFill/>
+          </a:ln>
+          <a:effectLst/>
+        </p:spPr>
+        <p:style>
+          <a:lnRef idx="1">
+            <a:schemeClr val="accent1"/>
+          </a:lnRef>
+          <a:fillRef idx="3">
+            <a:schemeClr val="accent1"/>
+          </a:fillRef>
+          <a:effectRef idx="2">
+            <a:schemeClr val="accent1"/>
+          </a:effectRef>
+          <a:fontRef idx="minor">
+            <a:schemeClr val="lt1"/>
+          </a:fontRef>
+        </p:style>
+        <p:txBody>
+          <a:bodyPr rtlCol="0" anchor="ctr"/>
+          <a:lstStyle/>
+          <a:p>
+            <a:pPr algn="ctr"/>
+          </a:p>
+        </p:txBody>
+      </p:sp>
+      <p:sp>
+        <p:nvSpPr>
+          <p:cNvPr id="10" name="TextBox 9"/>
+          <p:cNvSpPr txBox="1"/>
+          <p:nvPr/>
+        </p:nvSpPr>
+        <p:spPr>
+          <a:xfrm>
+            <a:off x="658368" y="5052059"/>
+            <a:ext cx="10984687" cy="1165860"/>
+          </a:xfrm>
+          <a:prstGeom prst="rect">
+            <a:avLst/>
+          </a:prstGeom>
+          <a:noFill/>
+        </p:spPr>
+        <p:txBody>
+          <a:bodyPr wrap="square">
+            <a:spAutoFit/>
+          </a:bodyPr>
+          <a:lstStyle/>
+          <a:p>
+            <a:pPr>
+              <a:spcAft>
+                <a:spcPts val="300"/>
+              </a:spcAft>
+            </a:pPr>
+            <a:r>
+              <a:rPr sz="1900" b="1" i="0">
+                <a:solidFill>
+                  <a:srgbClr val="1A1A1A"/>
+                </a:solidFill>
+                <a:latin typeface="Arial"/>
+              </a:rPr>
+              <a:t>Technology</a:t>
+            </a:r>
+          </a:p>
+          <a:p>
+            <a:pPr>
+              <a:spcAft>
+                <a:spcPts val="300"/>
+              </a:spcAft>
+            </a:pPr>
+            <a:r>
+              <a:rPr sz="1550" b="0" i="0">
+                <a:solidFill>
+                  <a:srgbClr val="595959"/>
+                </a:solidFill>
+                <a:latin typeface="Arial"/>
+              </a:rPr>
+              <a:t>Standards and single points of failure named.</a:t>
+            </a:r>
+          </a:p>
+        </p:txBody>
+      </p:sp>
+      <p:sp>
+        <p:nvSpPr>
+          <p:cNvPr id="11" name="TextBox 10"/>
+          <p:cNvSpPr txBox="1"/>
+          <p:nvPr/>
+        </p:nvSpPr>
+        <p:spPr>
+          <a:xfrm>
+            <a:off x="457200" y="6473952"/>
+            <a:ext cx="7772400" cy="292608"/>
+          </a:xfrm>
+          <a:prstGeom prst="rect">
+            <a:avLst/>
+          </a:prstGeom>
+          <a:noFill/>
+        </p:spPr>
+        <p:txBody>
+          <a:bodyPr wrap="square">
+            <a:spAutoFit/>
+          </a:bodyPr>
+          <a:lstStyle/>
+          <a:p>
+            <a:r>
+              <a:rPr sz="900" b="0" i="0">
+                <a:solidFill>
+                  <a:srgbClr val="595959"/>
+                </a:solidFill>
+                <a:latin typeface="Arial"/>
+              </a:rPr>
+              <a:t>2.6 · Run a Phase 2 Assess</a:t>
+            </a:r>
+          </a:p>
+        </p:txBody>
+      </p:sp>
+    </p:spTree>
+  </p:cSld>
+  <p:clrMapOvr>
+    <a:masterClrMapping/>
+  </p:clrMapOvr>
+</p:sld>
+</file>
+
+<file path=ppt/slides/slide48.xml><?xml version="1.0" encoding="utf-8"?>
+<p:sld xmlns:a="http://schemas.openxmlformats.org/drawingml/2006/main" xmlns:p="http://schemas.openxmlformats.org/presentationml/2006/main" xmlns:r="http://schemas.openxmlformats.org/officeDocument/2006/relationships">
+  <p:cSld>
+    <p:spTree>
+      <p:nvGrpSpPr>
+        <p:cNvPr id="1" name=""/>
+        <p:cNvGrpSpPr/>
+        <p:nvPr/>
+      </p:nvGrpSpPr>
+      <p:grpSpPr/>
+      <p:sp>
+        <p:nvSpPr>
+          <p:cNvPr id="2" name="Rectangle 1"/>
+          <p:cNvSpPr/>
+          <p:nvPr/>
+        </p:nvSpPr>
+        <p:spPr>
+          <a:xfrm>
+            <a:off x="457200" y="384048"/>
+            <a:ext cx="45720" cy="256032"/>
+          </a:xfrm>
+          <a:prstGeom prst="rect">
+            <a:avLst/>
+          </a:prstGeom>
+          <a:solidFill>
+            <a:srgbClr val="009CD6"/>
+          </a:solidFill>
+          <a:ln>
+            <a:noFill/>
+          </a:ln>
+          <a:effectLst/>
+        </p:spPr>
+        <p:style>
+          <a:lnRef idx="1">
+            <a:schemeClr val="accent1"/>
+          </a:lnRef>
+          <a:fillRef idx="3">
+            <a:schemeClr val="accent1"/>
+          </a:fillRef>
+          <a:effectRef idx="2">
+            <a:schemeClr val="accent1"/>
+          </a:effectRef>
+          <a:fontRef idx="minor">
+            <a:schemeClr val="lt1"/>
+          </a:fontRef>
+        </p:style>
+        <p:txBody>
+          <a:bodyPr rtlCol="0" anchor="ctr"/>
+          <a:lstStyle/>
+          <a:p>
+            <a:pPr algn="ctr"/>
+          </a:p>
+        </p:txBody>
+      </p:sp>
+      <p:sp>
+        <p:nvSpPr>
+          <p:cNvPr id="3" name="TextBox 2"/>
+          <p:cNvSpPr txBox="1"/>
+          <p:nvPr/>
+        </p:nvSpPr>
+        <p:spPr>
+          <a:xfrm>
+            <a:off x="621792" y="274320"/>
+            <a:ext cx="11247120" cy="914400"/>
+          </a:xfrm>
+          <a:prstGeom prst="rect">
+            <a:avLst/>
+          </a:prstGeom>
+          <a:noFill/>
+        </p:spPr>
+        <p:txBody>
+          <a:bodyPr wrap="square">
+            <a:spAutoFit/>
+          </a:bodyPr>
+          <a:lstStyle/>
+          <a:p>
+            <a:r>
+              <a:rPr sz="2800" b="1" i="0">
+                <a:solidFill>
+                  <a:srgbClr val="1A1A1A"/>
+                </a:solidFill>
+                <a:latin typeface="Arial"/>
+              </a:rPr>
+              <a:t>Four gaps show up in almost every first assessment — look for them on purpose</a:t>
+            </a:r>
+          </a:p>
+        </p:txBody>
+      </p:sp>
+      <p:sp>
+        <p:nvSpPr>
+          <p:cNvPr id="4" name="Oval 3"/>
+          <p:cNvSpPr/>
+          <p:nvPr/>
+        </p:nvSpPr>
+        <p:spPr>
+          <a:xfrm>
+            <a:off x="621792" y="1463040"/>
+            <a:ext cx="310896" cy="310896"/>
+          </a:xfrm>
+          <a:prstGeom prst="ellipse">
+            <a:avLst/>
+          </a:prstGeom>
+          <a:solidFill>
+            <a:srgbClr val="009CD6"/>
+          </a:solidFill>
+          <a:ln>
+            <a:noFill/>
+          </a:ln>
+          <a:effectLst/>
+        </p:spPr>
+        <p:style>
+          <a:lnRef idx="1">
+            <a:schemeClr val="accent1"/>
+          </a:lnRef>
+          <a:fillRef idx="3">
+            <a:schemeClr val="accent1"/>
+          </a:fillRef>
+          <a:effectRef idx="2">
+            <a:schemeClr val="accent1"/>
+          </a:effectRef>
+          <a:fontRef idx="minor">
+            <a:schemeClr val="lt1"/>
+          </a:fontRef>
+        </p:style>
+        <p:txBody>
+          <a:bodyPr rtlCol="0" anchor="ctr" lIns="0" rIns="0" tIns="0" bIns="0" wrap="square"/>
+          <a:lstStyle/>
+          <a:p>
+            <a:pPr algn="ctr"/>
+            <a:r>
+              <a:rPr sz="1300" b="1" i="0">
+                <a:solidFill>
+                  <a:srgbClr val="FFFFFF"/>
+                </a:solidFill>
+                <a:latin typeface="Arial"/>
+              </a:rPr>
+              <a:t>1</a:t>
+            </a:r>
+          </a:p>
+        </p:txBody>
+      </p:sp>
+      <p:sp>
+        <p:nvSpPr>
+          <p:cNvPr id="5" name="TextBox 4"/>
+          <p:cNvSpPr txBox="1"/>
+          <p:nvPr/>
+        </p:nvSpPr>
+        <p:spPr>
+          <a:xfrm>
+            <a:off x="1115568" y="1417320"/>
+            <a:ext cx="10527487" cy="1165860"/>
+          </a:xfrm>
+          <a:prstGeom prst="rect">
+            <a:avLst/>
+          </a:prstGeom>
+          <a:noFill/>
+        </p:spPr>
+        <p:txBody>
+          <a:bodyPr wrap="square">
+            <a:spAutoFit/>
+          </a:bodyPr>
+          <a:lstStyle/>
+          <a:p>
+            <a:pPr>
+              <a:spcAft>
+                <a:spcPts val="300"/>
+              </a:spcAft>
+            </a:pPr>
+            <a:r>
+              <a:rPr sz="1900" b="1" i="0">
+                <a:solidFill>
+                  <a:srgbClr val="1A1A1A"/>
+                </a:solidFill>
+                <a:latin typeface="Arial"/>
+              </a:rPr>
+              <a:t>Duplicate registries</a:t>
+            </a:r>
+          </a:p>
+          <a:p>
+            <a:pPr>
+              <a:spcAft>
+                <a:spcPts val="300"/>
+              </a:spcAft>
+            </a:pPr>
+            <a:r>
+              <a:rPr sz="1550" b="0" i="0">
+                <a:solidFill>
+                  <a:srgbClr val="595959"/>
+                </a:solidFill>
+                <a:latin typeface="Arial"/>
+              </a:rPr>
+              <a:t>Several bodies each keeping their own copy of the same domain, none agreeing.</a:t>
+            </a:r>
+          </a:p>
+        </p:txBody>
+      </p:sp>
+      <p:sp>
+        <p:nvSpPr>
+          <p:cNvPr id="6" name="Rectangle 5"/>
+          <p:cNvSpPr/>
+          <p:nvPr/>
+        </p:nvSpPr>
+        <p:spPr>
+          <a:xfrm>
+            <a:off x="621792" y="2587752"/>
+            <a:ext cx="10881360" cy="12700"/>
+          </a:xfrm>
+          <a:prstGeom prst="rect">
+            <a:avLst/>
+          </a:prstGeom>
+          <a:solidFill>
+            <a:srgbClr val="DDECF4"/>
+          </a:solidFill>
+          <a:ln>
+            <a:noFill/>
+          </a:ln>
+          <a:effectLst/>
+        </p:spPr>
+        <p:style>
+          <a:lnRef idx="1">
+            <a:schemeClr val="accent1"/>
+          </a:lnRef>
+          <a:fillRef idx="3">
+            <a:schemeClr val="accent1"/>
+          </a:fillRef>
+          <a:effectRef idx="2">
+            <a:schemeClr val="accent1"/>
+          </a:effectRef>
+          <a:fontRef idx="minor">
+            <a:schemeClr val="lt1"/>
+          </a:fontRef>
+        </p:style>
+        <p:txBody>
+          <a:bodyPr rtlCol="0" anchor="ctr"/>
+          <a:lstStyle/>
+          <a:p>
+            <a:pPr algn="ctr"/>
+          </a:p>
+        </p:txBody>
+      </p:sp>
+      <p:sp>
+        <p:nvSpPr>
+          <p:cNvPr id="7" name="Oval 6"/>
+          <p:cNvSpPr/>
+          <p:nvPr/>
+        </p:nvSpPr>
+        <p:spPr>
+          <a:xfrm>
+            <a:off x="621792" y="2674620"/>
+            <a:ext cx="310896" cy="310896"/>
+          </a:xfrm>
+          <a:prstGeom prst="ellipse">
+            <a:avLst/>
+          </a:prstGeom>
+          <a:solidFill>
+            <a:srgbClr val="009CD6"/>
+          </a:solidFill>
+          <a:ln>
+            <a:noFill/>
+          </a:ln>
+          <a:effectLst/>
+        </p:spPr>
+        <p:style>
+          <a:lnRef idx="1">
+            <a:schemeClr val="accent1"/>
+          </a:lnRef>
+          <a:fillRef idx="3">
+            <a:schemeClr val="accent1"/>
+          </a:fillRef>
+          <a:effectRef idx="2">
+            <a:schemeClr val="accent1"/>
+          </a:effectRef>
+          <a:fontRef idx="minor">
+            <a:schemeClr val="lt1"/>
+          </a:fontRef>
+        </p:style>
+        <p:txBody>
+          <a:bodyPr rtlCol="0" anchor="ctr" lIns="0" rIns="0" tIns="0" bIns="0" wrap="square"/>
+          <a:lstStyle/>
+          <a:p>
+            <a:pPr algn="ctr"/>
+            <a:r>
+              <a:rPr sz="1300" b="1" i="0">
+                <a:solidFill>
+                  <a:srgbClr val="FFFFFF"/>
+                </a:solidFill>
+                <a:latin typeface="Arial"/>
+              </a:rPr>
+              <a:t>2</a:t>
+            </a:r>
+          </a:p>
+        </p:txBody>
+      </p:sp>
+      <p:sp>
+        <p:nvSpPr>
+          <p:cNvPr id="8" name="TextBox 7"/>
+          <p:cNvSpPr txBox="1"/>
+          <p:nvPr/>
+        </p:nvSpPr>
+        <p:spPr>
+          <a:xfrm>
+            <a:off x="1115568" y="2628900"/>
+            <a:ext cx="10527487" cy="1165860"/>
+          </a:xfrm>
+          <a:prstGeom prst="rect">
+            <a:avLst/>
+          </a:prstGeom>
+          <a:noFill/>
+        </p:spPr>
+        <p:txBody>
+          <a:bodyPr wrap="square">
+            <a:spAutoFit/>
+          </a:bodyPr>
+          <a:lstStyle/>
+          <a:p>
+            <a:pPr>
+              <a:spcAft>
+                <a:spcPts val="300"/>
+              </a:spcAft>
+            </a:pPr>
+            <a:r>
+              <a:rPr sz="1900" b="1" i="0">
+                <a:solidFill>
+                  <a:srgbClr val="1A1A1A"/>
+                </a:solidFill>
+                <a:latin typeface="Arial"/>
+              </a:rPr>
+              <a:t>Orphan systems</a:t>
+            </a:r>
+          </a:p>
+          <a:p>
+            <a:pPr>
+              <a:spcAft>
+                <a:spcPts val="300"/>
+              </a:spcAft>
+            </a:pPr>
+            <a:r>
+              <a:rPr sz="1550" b="0" i="0">
+                <a:solidFill>
+                  <a:srgbClr val="595959"/>
+                </a:solidFill>
+                <a:latin typeface="Arial"/>
+              </a:rPr>
+              <a:t>Applications that map to no current capability, often left over from a project that ended.</a:t>
+            </a:r>
+          </a:p>
+        </p:txBody>
+      </p:sp>
+      <p:sp>
+        <p:nvSpPr>
+          <p:cNvPr id="9" name="Rectangle 8"/>
+          <p:cNvSpPr/>
+          <p:nvPr/>
+        </p:nvSpPr>
+        <p:spPr>
+          <a:xfrm>
+            <a:off x="621792" y="3799332"/>
+            <a:ext cx="10881360" cy="12700"/>
+          </a:xfrm>
+          <a:prstGeom prst="rect">
+            <a:avLst/>
+          </a:prstGeom>
+          <a:solidFill>
+            <a:srgbClr val="DDECF4"/>
+          </a:solidFill>
+          <a:ln>
+            <a:noFill/>
+          </a:ln>
+          <a:effectLst/>
+        </p:spPr>
+        <p:style>
+          <a:lnRef idx="1">
+            <a:schemeClr val="accent1"/>
+          </a:lnRef>
+          <a:fillRef idx="3">
+            <a:schemeClr val="accent1"/>
+          </a:fillRef>
+          <a:effectRef idx="2">
+            <a:schemeClr val="accent1"/>
+          </a:effectRef>
+          <a:fontRef idx="minor">
+            <a:schemeClr val="lt1"/>
+          </a:fontRef>
+        </p:style>
+        <p:txBody>
+          <a:bodyPr rtlCol="0" anchor="ctr"/>
+          <a:lstStyle/>
+          <a:p>
+            <a:pPr algn="ctr"/>
+          </a:p>
+        </p:txBody>
+      </p:sp>
+      <p:sp>
+        <p:nvSpPr>
+          <p:cNvPr id="10" name="Oval 9"/>
+          <p:cNvSpPr/>
+          <p:nvPr/>
+        </p:nvSpPr>
+        <p:spPr>
+          <a:xfrm>
+            <a:off x="621792" y="3886200"/>
+            <a:ext cx="310896" cy="310896"/>
+          </a:xfrm>
+          <a:prstGeom prst="ellipse">
+            <a:avLst/>
+          </a:prstGeom>
+          <a:solidFill>
+            <a:srgbClr val="009CD6"/>
+          </a:solidFill>
+          <a:ln>
+            <a:noFill/>
+          </a:ln>
+          <a:effectLst/>
+        </p:spPr>
+        <p:style>
+          <a:lnRef idx="1">
+            <a:schemeClr val="accent1"/>
+          </a:lnRef>
+          <a:fillRef idx="3">
+            <a:schemeClr val="accent1"/>
+          </a:fillRef>
+          <a:effectRef idx="2">
+            <a:schemeClr val="accent1"/>
+          </a:effectRef>
+          <a:fontRef idx="minor">
+            <a:schemeClr val="lt1"/>
+          </a:fontRef>
+        </p:style>
+        <p:txBody>
+          <a:bodyPr rtlCol="0" anchor="ctr" lIns="0" rIns="0" tIns="0" bIns="0" wrap="square"/>
+          <a:lstStyle/>
+          <a:p>
+            <a:pPr algn="ctr"/>
+            <a:r>
+              <a:rPr sz="1300" b="1" i="0">
+                <a:solidFill>
+                  <a:srgbClr val="FFFFFF"/>
+                </a:solidFill>
+                <a:latin typeface="Arial"/>
+              </a:rPr>
+              <a:t>3</a:t>
+            </a:r>
+          </a:p>
+        </p:txBody>
+      </p:sp>
+      <p:sp>
+        <p:nvSpPr>
+          <p:cNvPr id="11" name="TextBox 10"/>
+          <p:cNvSpPr txBox="1"/>
+          <p:nvPr/>
+        </p:nvSpPr>
+        <p:spPr>
+          <a:xfrm>
+            <a:off x="1115568" y="3840480"/>
+            <a:ext cx="10527487" cy="1165860"/>
+          </a:xfrm>
+          <a:prstGeom prst="rect">
+            <a:avLst/>
+          </a:prstGeom>
+          <a:noFill/>
+        </p:spPr>
+        <p:txBody>
+          <a:bodyPr wrap="square">
+            <a:spAutoFit/>
+          </a:bodyPr>
+          <a:lstStyle/>
+          <a:p>
+            <a:pPr>
+              <a:spcAft>
+                <a:spcPts val="300"/>
+              </a:spcAft>
+            </a:pPr>
+            <a:r>
+              <a:rPr sz="1900" b="1" i="0">
+                <a:solidFill>
+                  <a:srgbClr val="1A1A1A"/>
+                </a:solidFill>
+                <a:latin typeface="Arial"/>
+              </a:rPr>
+              <a:t>Point-to-point spaghetti</a:t>
+            </a:r>
+          </a:p>
+          <a:p>
+            <a:pPr>
+              <a:spcAft>
+                <a:spcPts val="300"/>
+              </a:spcAft>
+            </a:pPr>
+            <a:r>
+              <a:rPr sz="1550" b="0" i="0">
+                <a:solidFill>
+                  <a:srgbClr val="595959"/>
+                </a:solidFill>
+                <a:latin typeface="Arial"/>
+              </a:rPr>
+              <a:t>Every system connected to every other by its own custom link, with no shared data exchange.</a:t>
+            </a:r>
+          </a:p>
+        </p:txBody>
+      </p:sp>
+      <p:sp>
+        <p:nvSpPr>
+          <p:cNvPr id="12" name="Rectangle 11"/>
+          <p:cNvSpPr/>
+          <p:nvPr/>
+        </p:nvSpPr>
+        <p:spPr>
+          <a:xfrm>
+            <a:off x="621792" y="5010912"/>
+            <a:ext cx="10881360" cy="12700"/>
+          </a:xfrm>
+          <a:prstGeom prst="rect">
+            <a:avLst/>
+          </a:prstGeom>
+          <a:solidFill>
+            <a:srgbClr val="DDECF4"/>
+          </a:solidFill>
+          <a:ln>
+            <a:noFill/>
+          </a:ln>
+          <a:effectLst/>
+        </p:spPr>
+        <p:style>
+          <a:lnRef idx="1">
+            <a:schemeClr val="accent1"/>
+          </a:lnRef>
+          <a:fillRef idx="3">
+            <a:schemeClr val="accent1"/>
+          </a:fillRef>
+          <a:effectRef idx="2">
+            <a:schemeClr val="accent1"/>
+          </a:effectRef>
+          <a:fontRef idx="minor">
+            <a:schemeClr val="lt1"/>
+          </a:fontRef>
+        </p:style>
+        <p:txBody>
+          <a:bodyPr rtlCol="0" anchor="ctr"/>
+          <a:lstStyle/>
+          <a:p>
+            <a:pPr algn="ctr"/>
+          </a:p>
+        </p:txBody>
+      </p:sp>
+      <p:sp>
+        <p:nvSpPr>
+          <p:cNvPr id="13" name="Oval 12"/>
+          <p:cNvSpPr/>
+          <p:nvPr/>
+        </p:nvSpPr>
+        <p:spPr>
+          <a:xfrm>
+            <a:off x="621792" y="5097779"/>
+            <a:ext cx="310896" cy="310896"/>
+          </a:xfrm>
+          <a:prstGeom prst="ellipse">
+            <a:avLst/>
+          </a:prstGeom>
+          <a:solidFill>
+            <a:srgbClr val="009CD6"/>
+          </a:solidFill>
+          <a:ln>
+            <a:noFill/>
+          </a:ln>
+          <a:effectLst/>
+        </p:spPr>
+        <p:style>
+          <a:lnRef idx="1">
+            <a:schemeClr val="accent1"/>
+          </a:lnRef>
+          <a:fillRef idx="3">
+            <a:schemeClr val="accent1"/>
+          </a:fillRef>
+          <a:effectRef idx="2">
+            <a:schemeClr val="accent1"/>
+          </a:effectRef>
+          <a:fontRef idx="minor">
+            <a:schemeClr val="lt1"/>
+          </a:fontRef>
+        </p:style>
+        <p:txBody>
+          <a:bodyPr rtlCol="0" anchor="ctr" lIns="0" rIns="0" tIns="0" bIns="0" wrap="square"/>
+          <a:lstStyle/>
+          <a:p>
+            <a:pPr algn="ctr"/>
+            <a:r>
+              <a:rPr sz="1300" b="1" i="0">
+                <a:solidFill>
+                  <a:srgbClr val="FFFFFF"/>
+                </a:solidFill>
+                <a:latin typeface="Arial"/>
+              </a:rPr>
+              <a:t>4</a:t>
+            </a:r>
+          </a:p>
+        </p:txBody>
+      </p:sp>
+      <p:sp>
+        <p:nvSpPr>
+          <p:cNvPr id="14" name="TextBox 13"/>
+          <p:cNvSpPr txBox="1"/>
+          <p:nvPr/>
+        </p:nvSpPr>
+        <p:spPr>
+          <a:xfrm>
+            <a:off x="1115568" y="5052059"/>
+            <a:ext cx="10527487" cy="1165860"/>
+          </a:xfrm>
+          <a:prstGeom prst="rect">
+            <a:avLst/>
+          </a:prstGeom>
+          <a:noFill/>
+        </p:spPr>
+        <p:txBody>
+          <a:bodyPr wrap="square">
+            <a:spAutoFit/>
+          </a:bodyPr>
+          <a:lstStyle/>
+          <a:p>
+            <a:pPr>
+              <a:spcAft>
+                <a:spcPts val="300"/>
+              </a:spcAft>
+            </a:pPr>
+            <a:r>
+              <a:rPr sz="1900" b="1" i="0">
+                <a:solidFill>
+                  <a:srgbClr val="1A1A1A"/>
+                </a:solidFill>
+                <a:latin typeface="Arial"/>
+              </a:rPr>
+              <a:t>No clear owner</a:t>
+            </a:r>
+          </a:p>
+          <a:p>
+            <a:pPr>
+              <a:spcAft>
+                <a:spcPts val="300"/>
+              </a:spcAft>
+            </a:pPr>
+            <a:r>
+              <a:rPr sz="1550" b="0" i="0">
+                <a:solidFill>
+                  <a:srgbClr val="595959"/>
+                </a:solidFill>
+                <a:latin typeface="Arial"/>
+              </a:rPr>
+              <a:t>A capability or a domain that everyone uses and no one owns — where accountability quietly disappears.</a:t>
+            </a:r>
+          </a:p>
+        </p:txBody>
+      </p:sp>
+      <p:sp>
+        <p:nvSpPr>
+          <p:cNvPr id="15" name="TextBox 14"/>
+          <p:cNvSpPr txBox="1"/>
+          <p:nvPr/>
+        </p:nvSpPr>
+        <p:spPr>
+          <a:xfrm>
+            <a:off x="457200" y="6473952"/>
+            <a:ext cx="7772400" cy="292608"/>
+          </a:xfrm>
+          <a:prstGeom prst="rect">
+            <a:avLst/>
+          </a:prstGeom>
+          <a:noFill/>
+        </p:spPr>
+        <p:txBody>
+          <a:bodyPr wrap="square">
+            <a:spAutoFit/>
+          </a:bodyPr>
+          <a:lstStyle/>
+          <a:p>
+            <a:r>
+              <a:rPr sz="900" b="0" i="0">
+                <a:solidFill>
+                  <a:srgbClr val="595959"/>
+                </a:solidFill>
+                <a:latin typeface="Arial"/>
+              </a:rPr>
+              <a:t>2.6 · Run a Phase 2 Assess</a:t>
+            </a:r>
+          </a:p>
+        </p:txBody>
+      </p:sp>
+    </p:spTree>
+  </p:cSld>
+  <p:clrMapOvr>
+    <a:masterClrMapping/>
+  </p:clrMapOvr>
+</p:sld>
+</file>
+
+<file path=ppt/slides/slide49.xml><?xml version="1.0" encoding="utf-8"?>
+<p:sld xmlns:a="http://schemas.openxmlformats.org/drawingml/2006/main" xmlns:p="http://schemas.openxmlformats.org/presentationml/2006/main" xmlns:r="http://schemas.openxmlformats.org/officeDocument/2006/relationships">
+  <p:cSld>
+    <p:spTree>
+      <p:nvGrpSpPr>
+        <p:cNvPr id="1" name=""/>
+        <p:cNvGrpSpPr/>
+        <p:nvPr/>
+      </p:nvGrpSpPr>
+      <p:grpSpPr/>
+      <p:sp>
+        <p:nvSpPr>
+          <p:cNvPr id="2" name="Rectangle 1"/>
+          <p:cNvSpPr/>
+          <p:nvPr/>
+        </p:nvSpPr>
+        <p:spPr>
+          <a:xfrm>
+            <a:off x="457200" y="384048"/>
+            <a:ext cx="45720" cy="256032"/>
+          </a:xfrm>
+          <a:prstGeom prst="rect">
+            <a:avLst/>
+          </a:prstGeom>
+          <a:solidFill>
+            <a:srgbClr val="009CD6"/>
+          </a:solidFill>
+          <a:ln>
+            <a:noFill/>
+          </a:ln>
+          <a:effectLst/>
+        </p:spPr>
+        <p:style>
+          <a:lnRef idx="1">
+            <a:schemeClr val="accent1"/>
+          </a:lnRef>
+          <a:fillRef idx="3">
+            <a:schemeClr val="accent1"/>
+          </a:fillRef>
+          <a:effectRef idx="2">
+            <a:schemeClr val="accent1"/>
+          </a:effectRef>
+          <a:fontRef idx="minor">
+            <a:schemeClr val="lt1"/>
+          </a:fontRef>
+        </p:style>
+        <p:txBody>
+          <a:bodyPr rtlCol="0" anchor="ctr"/>
+          <a:lstStyle/>
+          <a:p>
+            <a:pPr algn="ctr"/>
+          </a:p>
+        </p:txBody>
+      </p:sp>
+      <p:sp>
+        <p:nvSpPr>
+          <p:cNvPr id="3" name="TextBox 2"/>
+          <p:cNvSpPr txBox="1"/>
+          <p:nvPr/>
+        </p:nvSpPr>
+        <p:spPr>
+          <a:xfrm>
+            <a:off x="621792" y="274320"/>
+            <a:ext cx="11247120" cy="914400"/>
+          </a:xfrm>
+          <a:prstGeom prst="rect">
+            <a:avLst/>
+          </a:prstGeom>
+          <a:noFill/>
+        </p:spPr>
+        <p:txBody>
+          <a:bodyPr wrap="square">
+            <a:spAutoFit/>
+          </a:bodyPr>
+          <a:lstStyle/>
+          <a:p>
+            <a:r>
+              <a:rPr sz="2800" b="1" i="0">
+                <a:solidFill>
+                  <a:srgbClr val="1A1A1A"/>
+                </a:solidFill>
+                <a:latin typeface="Arial"/>
+              </a:rPr>
+              <a:t>A list of gaps is not an assessment — the priority order is</a:t>
+            </a:r>
+          </a:p>
+        </p:txBody>
+      </p:sp>
+      <p:sp>
+        <p:nvSpPr>
+          <p:cNvPr id="4" name="TextBox 3"/>
+          <p:cNvSpPr txBox="1"/>
+          <p:nvPr/>
+        </p:nvSpPr>
+        <p:spPr>
+          <a:xfrm>
+            <a:off x="658368" y="1463040"/>
+            <a:ext cx="10984687" cy="1325879"/>
+          </a:xfrm>
+          <a:prstGeom prst="rect">
+            <a:avLst/>
+          </a:prstGeom>
+          <a:noFill/>
+        </p:spPr>
+        <p:txBody>
+          <a:bodyPr wrap="square">
+            <a:spAutoFit/>
+          </a:bodyPr>
+          <a:lstStyle/>
+          <a:p>
+            <a:pPr>
+              <a:spcAft>
+                <a:spcPts val="300"/>
+              </a:spcAft>
+            </a:pPr>
+            <a:r>
+              <a:rPr sz="1900" b="1" i="0">
+                <a:solidFill>
+                  <a:srgbClr val="1A1A1A"/>
+                </a:solidFill>
+                <a:latin typeface="Arial"/>
+              </a:rPr>
+              <a:t>For each gap, judge how much it hurts</a:t>
+            </a:r>
+          </a:p>
+          <a:p>
+            <a:pPr>
+              <a:spcAft>
+                <a:spcPts val="300"/>
+              </a:spcAft>
+            </a:pPr>
+            <a:r>
+              <a:rPr sz="1550" b="0" i="0">
+                <a:solidFill>
+                  <a:srgbClr val="595959"/>
+                </a:solidFill>
+                <a:latin typeface="Arial"/>
+              </a:rPr>
+              <a:t>The cost to the country, the burden on the citizen, the risk to the minister’s programme.</a:t>
+            </a:r>
+          </a:p>
+        </p:txBody>
+      </p:sp>
+      <p:sp>
+        <p:nvSpPr>
+          <p:cNvPr id="5" name="Rectangle 4"/>
+          <p:cNvSpPr/>
+          <p:nvPr/>
+        </p:nvSpPr>
+        <p:spPr>
+          <a:xfrm>
+            <a:off x="621792" y="2793491"/>
+            <a:ext cx="10881360" cy="12700"/>
+          </a:xfrm>
+          <a:prstGeom prst="rect">
+            <a:avLst/>
+          </a:prstGeom>
+          <a:solidFill>
+            <a:srgbClr val="DDECF4"/>
+          </a:solidFill>
+          <a:ln>
+            <a:noFill/>
+          </a:ln>
+          <a:effectLst/>
+        </p:spPr>
+        <p:style>
+          <a:lnRef idx="1">
+            <a:schemeClr val="accent1"/>
+          </a:lnRef>
+          <a:fillRef idx="3">
+            <a:schemeClr val="accent1"/>
+          </a:fillRef>
+          <a:effectRef idx="2">
+            <a:schemeClr val="accent1"/>
+          </a:effectRef>
+          <a:fontRef idx="minor">
+            <a:schemeClr val="lt1"/>
+          </a:fontRef>
+        </p:style>
+        <p:txBody>
+          <a:bodyPr rtlCol="0" anchor="ctr"/>
+          <a:lstStyle/>
+          <a:p>
+            <a:pPr algn="ctr"/>
+          </a:p>
+        </p:txBody>
+      </p:sp>
+      <p:sp>
+        <p:nvSpPr>
+          <p:cNvPr id="6" name="TextBox 5"/>
+          <p:cNvSpPr txBox="1"/>
+          <p:nvPr/>
+        </p:nvSpPr>
+        <p:spPr>
+          <a:xfrm>
+            <a:off x="658368" y="2834639"/>
+            <a:ext cx="10984687" cy="1325879"/>
+          </a:xfrm>
+          <a:prstGeom prst="rect">
+            <a:avLst/>
+          </a:prstGeom>
+          <a:noFill/>
+        </p:spPr>
+        <p:txBody>
+          <a:bodyPr wrap="square">
+            <a:spAutoFit/>
+          </a:bodyPr>
+          <a:lstStyle/>
+          <a:p>
+            <a:pPr>
+              <a:spcAft>
+                <a:spcPts val="300"/>
+              </a:spcAft>
+            </a:pPr>
+            <a:r>
+              <a:rPr sz="1900" b="1" i="0">
+                <a:solidFill>
+                  <a:srgbClr val="1A1A1A"/>
+                </a:solidFill>
+                <a:latin typeface="Arial"/>
+              </a:rPr>
+              <a:t>And judge how hard it is to close</a:t>
+            </a:r>
+          </a:p>
+          <a:p>
+            <a:pPr>
+              <a:spcAft>
+                <a:spcPts val="300"/>
+              </a:spcAft>
+            </a:pPr>
+            <a:r>
+              <a:rPr sz="1550" b="0" i="0">
+                <a:solidFill>
+                  <a:srgbClr val="595959"/>
+                </a:solidFill>
+                <a:latin typeface="Arial"/>
+              </a:rPr>
+              <a:t>A per-layer maturity scorecard helps — how far each layer is from where it needs to be.</a:t>
+            </a:r>
+          </a:p>
+        </p:txBody>
+      </p:sp>
+      <p:sp>
+        <p:nvSpPr>
+          <p:cNvPr id="7" name="Rounded Rectangle 6"/>
+          <p:cNvSpPr/>
+          <p:nvPr/>
+        </p:nvSpPr>
+        <p:spPr>
+          <a:xfrm>
+            <a:off x="658368" y="4434840"/>
+            <a:ext cx="10881360" cy="1371600"/>
+          </a:xfrm>
+          <a:prstGeom prst="roundRect">
+            <a:avLst>
+              <a:gd name="adj" fmla="val 4500"/>
+            </a:avLst>
+          </a:prstGeom>
+          <a:solidFill>
+            <a:srgbClr val="E5F5FB"/>
+          </a:solidFill>
+          <a:ln>
+            <a:noFill/>
+          </a:ln>
+          <a:effectLst/>
+        </p:spPr>
+        <p:style>
+          <a:lnRef idx="1">
+            <a:schemeClr val="accent1"/>
+          </a:lnRef>
+          <a:fillRef idx="3">
+            <a:schemeClr val="accent1"/>
+          </a:fillRef>
+          <a:effectRef idx="2">
+            <a:schemeClr val="accent1"/>
+          </a:effectRef>
+          <a:fontRef idx="minor">
+            <a:schemeClr val="lt1"/>
+          </a:fontRef>
+        </p:style>
+        <p:txBody>
+          <a:bodyPr rtlCol="0" anchor="ctr"/>
+          <a:lstStyle/>
+          <a:p>
+            <a:pPr algn="ctr"/>
+          </a:p>
+        </p:txBody>
+      </p:sp>
+      <p:sp>
+        <p:nvSpPr>
+          <p:cNvPr id="8" name="TextBox 7"/>
+          <p:cNvSpPr txBox="1"/>
+          <p:nvPr/>
+        </p:nvSpPr>
+        <p:spPr>
+          <a:xfrm>
+            <a:off x="859536" y="4626864"/>
+            <a:ext cx="10479024" cy="1097280"/>
+          </a:xfrm>
+          <a:prstGeom prst="rect">
+            <a:avLst/>
+          </a:prstGeom>
+          <a:noFill/>
+        </p:spPr>
+        <p:txBody>
+          <a:bodyPr wrap="square">
+            <a:spAutoFit/>
+          </a:bodyPr>
+          <a:lstStyle/>
+          <a:p>
+            <a:pPr>
+              <a:spcAft>
+                <a:spcPts val="700"/>
+              </a:spcAft>
+            </a:pPr>
+            <a:r>
+              <a:rPr sz="2200" b="1" i="0">
+                <a:solidFill>
+                  <a:srgbClr val="006E96"/>
+                </a:solidFill>
+                <a:latin typeface="Arial"/>
+              </a:rPr>
+              <a:t>Priority = high impact, where movement is possible.</a:t>
+            </a:r>
+          </a:p>
+          <a:p>
+            <a:pPr>
+              <a:spcAft>
+                <a:spcPts val="700"/>
+              </a:spcAft>
+            </a:pPr>
+            <a:r>
+              <a:rPr sz="1500" b="0" i="0">
+                <a:solidFill>
+                  <a:srgbClr val="1A1A1A"/>
+                </a:solidFill>
+                <a:latin typeface="Arial"/>
+              </a:rPr>
+              <a:t>What the EA Board signs off is not “here is everything wrong”. It is “here are the right problems, in the right order, with the reasons”.</a:t>
+            </a:r>
+          </a:p>
+        </p:txBody>
+      </p:sp>
+      <p:sp>
+        <p:nvSpPr>
+          <p:cNvPr id="9" name="TextBox 8"/>
+          <p:cNvSpPr txBox="1"/>
+          <p:nvPr/>
+        </p:nvSpPr>
+        <p:spPr>
+          <a:xfrm>
+            <a:off x="457200" y="6473952"/>
+            <a:ext cx="7772400" cy="292608"/>
+          </a:xfrm>
+          <a:prstGeom prst="rect">
+            <a:avLst/>
+          </a:prstGeom>
+          <a:noFill/>
+        </p:spPr>
+        <p:txBody>
+          <a:bodyPr wrap="square">
+            <a:spAutoFit/>
+          </a:bodyPr>
+          <a:lstStyle/>
+          <a:p>
+            <a:r>
+              <a:rPr sz="900" b="0" i="0">
+                <a:solidFill>
+                  <a:srgbClr val="595959"/>
+                </a:solidFill>
+                <a:latin typeface="Arial"/>
+              </a:rPr>
+              <a:t>2.6 · Run a Phase 2 Assess</a:t>
+            </a:r>
+          </a:p>
+        </p:txBody>
+      </p:sp>
+    </p:spTree>
+  </p:cSld>
+  <p:clrMapOvr>
+    <a:masterClrMapping/>
+  </p:clrMapOvr>
+</p:sld>
+</file>
+
+<file path=ppt/slides/slide50.xml><?xml version="1.0" encoding="utf-8"?>
+<p:sld xmlns:a="http://schemas.openxmlformats.org/drawingml/2006/main" xmlns:p="http://schemas.openxmlformats.org/presentationml/2006/main" xmlns:r="http://schemas.openxmlformats.org/officeDocument/2006/relationships">
+  <p:cSld>
+    <p:spTree>
+      <p:nvGrpSpPr>
+        <p:cNvPr id="1" name=""/>
+        <p:cNvGrpSpPr/>
+        <p:nvPr/>
+      </p:nvGrpSpPr>
+      <p:grpSpPr/>
+      <p:sp>
+        <p:nvSpPr>
+          <p:cNvPr id="2" name="Rectangle 1"/>
+          <p:cNvSpPr/>
+          <p:nvPr/>
+        </p:nvSpPr>
+        <p:spPr>
+          <a:xfrm>
+            <a:off x="457200" y="384048"/>
+            <a:ext cx="45720" cy="256032"/>
+          </a:xfrm>
+          <a:prstGeom prst="rect">
+            <a:avLst/>
+          </a:prstGeom>
+          <a:solidFill>
+            <a:srgbClr val="009CD6"/>
+          </a:solidFill>
+          <a:ln>
+            <a:noFill/>
+          </a:ln>
+          <a:effectLst/>
+        </p:spPr>
+        <p:style>
+          <a:lnRef idx="1">
+            <a:schemeClr val="accent1"/>
+          </a:lnRef>
+          <a:fillRef idx="3">
+            <a:schemeClr val="accent1"/>
+          </a:fillRef>
+          <a:effectRef idx="2">
+            <a:schemeClr val="accent1"/>
+          </a:effectRef>
+          <a:fontRef idx="minor">
+            <a:schemeClr val="lt1"/>
+          </a:fontRef>
+        </p:style>
+        <p:txBody>
+          <a:bodyPr rtlCol="0" anchor="ctr"/>
+          <a:lstStyle/>
+          <a:p>
+            <a:pPr algn="ctr"/>
+          </a:p>
+        </p:txBody>
+      </p:sp>
+      <p:sp>
+        <p:nvSpPr>
+          <p:cNvPr id="3" name="TextBox 2"/>
+          <p:cNvSpPr txBox="1"/>
+          <p:nvPr/>
+        </p:nvSpPr>
+        <p:spPr>
+          <a:xfrm>
+            <a:off x="621792" y="274320"/>
+            <a:ext cx="11247120" cy="914400"/>
+          </a:xfrm>
+          <a:prstGeom prst="rect">
+            <a:avLst/>
+          </a:prstGeom>
+          <a:noFill/>
+        </p:spPr>
+        <p:txBody>
+          <a:bodyPr wrap="square">
+            <a:spAutoFit/>
+          </a:bodyPr>
+          <a:lstStyle/>
+          <a:p>
+            <a:r>
+              <a:rPr sz="2800" b="1" i="0">
+                <a:solidFill>
+                  <a:srgbClr val="1A1A1A"/>
+                </a:solidFill>
+                <a:latin typeface="Arial"/>
+              </a:rPr>
+              <a:t>The sign-off has one quality test of its own — honesty</a:t>
+            </a:r>
+          </a:p>
+        </p:txBody>
+      </p:sp>
+      <p:sp>
+        <p:nvSpPr>
+          <p:cNvPr id="4" name="TextBox 3"/>
+          <p:cNvSpPr txBox="1"/>
+          <p:nvPr/>
+        </p:nvSpPr>
+        <p:spPr>
+          <a:xfrm>
+            <a:off x="658368" y="1600200"/>
+            <a:ext cx="10881360" cy="2651760"/>
+          </a:xfrm>
+          <a:prstGeom prst="rect">
+            <a:avLst/>
+          </a:prstGeom>
+          <a:noFill/>
+        </p:spPr>
+        <p:txBody>
+          <a:bodyPr wrap="square">
+            <a:spAutoFit/>
+          </a:bodyPr>
+          <a:lstStyle/>
+          <a:p>
+            <a:pPr>
+              <a:spcAft>
+                <a:spcPts val="1200"/>
+              </a:spcAft>
+            </a:pPr>
+            <a:r>
+              <a:rPr sz="2100" b="0" i="0">
+                <a:solidFill>
+                  <a:srgbClr val="1A1A1A"/>
+                </a:solidFill>
+                <a:latin typeface="Arial"/>
+              </a:rPr>
+              <a:t>Assess ends when the senior decision-maker confirms the gap analysis reflects ground truth. Your job is to name the right problems in the right order — including the politically uncomfortable ones — in language the decision-maker can act on.</a:t>
+            </a:r>
+          </a:p>
+        </p:txBody>
+      </p:sp>
+      <p:sp>
+        <p:nvSpPr>
+          <p:cNvPr id="5" name="Rounded Rectangle 4"/>
+          <p:cNvSpPr/>
+          <p:nvPr/>
+        </p:nvSpPr>
+        <p:spPr>
+          <a:xfrm>
+            <a:off x="658368" y="4434840"/>
+            <a:ext cx="10881360" cy="1325880"/>
+          </a:xfrm>
+          <a:prstGeom prst="roundRect">
+            <a:avLst>
+              <a:gd name="adj" fmla="val 4500"/>
+            </a:avLst>
+          </a:prstGeom>
+          <a:solidFill>
+            <a:srgbClr val="009CD6"/>
+          </a:solidFill>
+          <a:ln>
+            <a:noFill/>
+          </a:ln>
+          <a:effectLst/>
+        </p:spPr>
+        <p:style>
+          <a:lnRef idx="1">
+            <a:schemeClr val="accent1"/>
+          </a:lnRef>
+          <a:fillRef idx="3">
+            <a:schemeClr val="accent1"/>
+          </a:fillRef>
+          <a:effectRef idx="2">
+            <a:schemeClr val="accent1"/>
+          </a:effectRef>
+          <a:fontRef idx="minor">
+            <a:schemeClr val="lt1"/>
+          </a:fontRef>
+        </p:style>
+        <p:txBody>
+          <a:bodyPr rtlCol="0" anchor="ctr"/>
+          <a:lstStyle/>
+          <a:p>
+            <a:pPr algn="ctr"/>
+          </a:p>
+        </p:txBody>
+      </p:sp>
+      <p:sp>
+        <p:nvSpPr>
+          <p:cNvPr id="6" name="TextBox 5"/>
+          <p:cNvSpPr txBox="1"/>
+          <p:nvPr/>
+        </p:nvSpPr>
+        <p:spPr>
+          <a:xfrm>
+            <a:off x="859536" y="4626864"/>
+            <a:ext cx="10479024" cy="1051560"/>
+          </a:xfrm>
+          <a:prstGeom prst="rect">
+            <a:avLst/>
+          </a:prstGeom>
+          <a:noFill/>
+        </p:spPr>
+        <p:txBody>
+          <a:bodyPr wrap="square">
+            <a:spAutoFit/>
+          </a:bodyPr>
+          <a:lstStyle/>
+          <a:p>
+            <a:pPr>
+              <a:spcAft>
+                <a:spcPts val="700"/>
+              </a:spcAft>
+            </a:pPr>
+            <a:r>
+              <a:rPr sz="2300" b="1" i="0">
+                <a:solidFill>
+                  <a:srgbClr val="FFFFFF"/>
+                </a:solidFill>
+                <a:latin typeface="Arial"/>
+              </a:rPr>
+              <a:t>An assessment that softens a problem because a powerful ministry owns one of the copies fails quietly, a year later.</a:t>
+            </a:r>
+          </a:p>
+        </p:txBody>
+      </p:sp>
+      <p:sp>
+        <p:nvSpPr>
+          <p:cNvPr id="7" name="TextBox 6"/>
+          <p:cNvSpPr txBox="1"/>
+          <p:nvPr/>
+        </p:nvSpPr>
+        <p:spPr>
+          <a:xfrm>
+            <a:off x="457200" y="6473952"/>
+            <a:ext cx="7772400" cy="292608"/>
+          </a:xfrm>
+          <a:prstGeom prst="rect">
+            <a:avLst/>
+          </a:prstGeom>
+          <a:noFill/>
+        </p:spPr>
+        <p:txBody>
+          <a:bodyPr wrap="square">
+            <a:spAutoFit/>
+          </a:bodyPr>
+          <a:lstStyle/>
+          <a:p>
+            <a:r>
+              <a:rPr sz="900" b="0" i="0">
+                <a:solidFill>
+                  <a:srgbClr val="595959"/>
+                </a:solidFill>
+                <a:latin typeface="Arial"/>
+              </a:rPr>
+              <a:t>2.6 · Run a Phase 2 Assess</a:t>
+            </a:r>
+          </a:p>
+        </p:txBody>
+      </p:sp>
+    </p:spTree>
+  </p:cSld>
+  <p:clrMapOvr>
+    <a:masterClrMapping/>
+  </p:clrMapOvr>
+</p:sld>
+</file>
+
+<file path=ppt/slides/slide51.xml><?xml version="1.0" encoding="utf-8"?>
+<p:sld xmlns:a="http://schemas.openxmlformats.org/drawingml/2006/main" xmlns:p="http://schemas.openxmlformats.org/presentationml/2006/main" xmlns:r="http://schemas.openxmlformats.org/officeDocument/2006/relationships">
+  <p:cSld>
+    <p:spTree>
+      <p:nvGrpSpPr>
+        <p:cNvPr id="1" name=""/>
+        <p:cNvGrpSpPr/>
+        <p:nvPr/>
+      </p:nvGrpSpPr>
+      <p:grpSpPr/>
+      <p:sp>
+        <p:nvSpPr>
+          <p:cNvPr id="2" name="TextBox 1"/>
+          <p:cNvSpPr txBox="1"/>
+          <p:nvPr/>
+        </p:nvSpPr>
+        <p:spPr>
+          <a:xfrm>
             <a:off x="1005840" y="2103120"/>
             <a:ext cx="10149840" cy="2377440"/>
           </a:xfrm>
@@ -15158,7 +14727,7 @@
 </p:sld>
 </file>
 
-<file path=ppt/slides/slide46.xml><?xml version="1.0" encoding="utf-8"?>
+<file path=ppt/slides/slide52.xml><?xml version="1.0" encoding="utf-8"?>
 <p:sld xmlns:a="http://schemas.openxmlformats.org/drawingml/2006/main" xmlns:p="http://schemas.openxmlformats.org/presentationml/2006/main" xmlns:r="http://schemas.openxmlformats.org/officeDocument/2006/relationships">
   <p:cSld>
     <p:spTree>

--- a/10-Knowledge-Products/KP1-GEA/videos/module_2/en/decks/KP1_M2_2.6_Deck_v0.2.pptx
+++ b/10-Knowledge-Products/KP1-GEA/videos/module_2/en/decks/KP1_M2_2.6_Deck_v0.2.pptx
@@ -11854,7 +11854,7 @@
                 </a:solidFill>
                 <a:latin typeface="Arial"/>
               </a:rPr>
-              <a:t>~5 minutes · standalone video · voice-over on text slides</a:t>
+              <a:t>standalone video · voice-over on text slides</a:t>
             </a:r>
           </a:p>
         </p:txBody>

--- a/10-Knowledge-Products/KP1-GEA/videos/module_2/en/decks/KP1_M2_2.6_Deck_v0.2.pptx
+++ b/10-Knowledge-Products/KP1-GEA/videos/module_2/en/decks/KP1_M2_2.6_Deck_v0.2.pptx
@@ -11718,7 +11718,7 @@
                 </a:solidFill>
                 <a:latin typeface="Arial"/>
               </a:rPr>
-              <a:t>KP1 · MODULE 2 · VIDEO 2.6</a:t>
+              <a:t>MODULE 2 · VIDEO 2.6</a:t>
             </a:r>
           </a:p>
         </p:txBody>
